--- a/course/高校实验室安全/课件/第1章_法规、管理与安全文化.pptx
+++ b/course/高校实验室安全/课件/第1章_法规、管理与安全文化.pptx
@@ -38,6 +38,21 @@
     <p:sldId id="286" r:id="rId38"/>
     <p:sldId id="287" r:id="rId39"/>
     <p:sldId id="288" r:id="rId40"/>
+    <p:sldId id="289" r:id="rId41"/>
+    <p:sldId id="290" r:id="rId42"/>
+    <p:sldId id="291" r:id="rId43"/>
+    <p:sldId id="292" r:id="rId44"/>
+    <p:sldId id="293" r:id="rId45"/>
+    <p:sldId id="294" r:id="rId46"/>
+    <p:sldId id="295" r:id="rId47"/>
+    <p:sldId id="296" r:id="rId48"/>
+    <p:sldId id="297" r:id="rId49"/>
+    <p:sldId id="298" r:id="rId50"/>
+    <p:sldId id="299" r:id="rId51"/>
+    <p:sldId id="300" r:id="rId52"/>
+    <p:sldId id="301" r:id="rId53"/>
+    <p:sldId id="302" r:id="rId54"/>
+    <p:sldId id="303" r:id="rId55"/>
   </p:sldIdLst>
   <p:sldSz cx="12191695" cy="6858000" type="screen4x3"/>
   <p:notesSz cx="6858000" cy="9144000"/>
@@ -1957,6 +1972,345 @@
 </p:notes>
 </file>
 
+<file path=ppt/notesSlides/notesSlide26.xml><?xml version="1.0" encoding="utf-8"?>
+<p:notes xmlns:a="http://schemas.openxmlformats.org/drawingml/2006/main" xmlns:p="http://schemas.openxmlformats.org/presentationml/2006/main" xmlns:r="http://schemas.openxmlformats.org/officeDocument/2006/relationships">
+  <p:cSld>
+    <p:spTree>
+      <p:nvGrpSpPr>
+        <p:cNvPr id="1" name=""/>
+        <p:cNvGrpSpPr/>
+        <p:nvPr/>
+      </p:nvGrpSpPr>
+      <p:grpSpPr>
+        <a:xfrm>
+          <a:off x="0" y="0"/>
+          <a:ext cx="0" cy="0"/>
+          <a:chOff x="0" y="0"/>
+          <a:chExt cx="0" cy="0"/>
+        </a:xfrm>
+      </p:grpSpPr>
+      <p:sp>
+        <p:nvSpPr>
+          <p:cNvPr id="2" name="Slide Image Placeholder 1"/>
+          <p:cNvSpPr>
+            <a:spLocks noGrp="1"/>
+          </p:cNvSpPr>
+          <p:nvPr>
+            <p:ph type="sldImg" idx="2"/>
+          </p:nvPr>
+        </p:nvSpPr>
+        <p:spPr/>
+      </p:sp>
+      <p:sp>
+        <p:nvSpPr>
+          <p:cNvPr id="3" name="Notes Placeholder 2"/>
+          <p:cNvSpPr>
+            <a:spLocks noGrp="1"/>
+          </p:cNvSpPr>
+          <p:nvPr>
+            <p:ph type="body" idx="3" sz="quarter"/>
+          </p:nvPr>
+        </p:nvSpPr>
+        <p:spPr/>
+        <p:txBody>
+          <a:bodyPr/>
+          <a:lstStyle/>
+          <a:p>
+            <a:r>
+              <a:t>《高等学校实验室安全规范》由教育部办公厅于 2023 年印发（教科信厅函〔2023〕5 号），是针对高校实验室安全工作的专门规范性文件。它以安全生产、消防、危险化学品、生物安全、辐射安全等法律法规为基础，结合高校实验室人员流动大、学科门类多、危险源分散等特点，对高校实验室安全管理提出系统要求。</a:t>
+            </a:r>
+          </a:p>
+          <a:p>
+            <a:r>
+              <a:t>规范适用于高校开展教学、科研活动的各类实验室（含实验场所）。各高校依据规范制定或修订本校的实验室安全管理办法、准入、检查、应急等制度，学院和实验室再细化为具体规程。学生日常遵守的本校制度，背后就是规范和上位法的要求。</a:t>
+            </a:r>
+          </a:p>
+          <a:p>
+            <a:r>
+              <a:t>规范的具体条文以现行文本为准；本课介绍其主要内容，各项要求在后续各章中展开。</a:t>
+            </a:r>
+          </a:p>
+          <a:p/>
+          <a:p>
+            <a:r>
+              <a:t>来源：补充知识点（依据《高等学校实验室安全规范》，原视频未涉及）</a:t>
+            </a:r>
+          </a:p>
+        </p:txBody>
+      </p:sp>
+      <p:sp>
+        <p:nvSpPr>
+          <p:cNvPr id="4" name="Slide Number Placeholder 3"/>
+          <p:cNvSpPr>
+            <a:spLocks noGrp="1"/>
+          </p:cNvSpPr>
+          <p:nvPr>
+            <p:ph type="sldNum" idx="5" sz="quarter"/>
+          </p:nvPr>
+        </p:nvSpPr>
+        <p:spPr/>
+      </p:sp>
+    </p:spTree>
+  </p:cSld>
+  <p:clrMapOvr>
+    <a:masterClrMapping/>
+  </p:clrMapOvr>
+</p:notes>
+</file>
+
+<file path=ppt/notesSlides/notesSlide27.xml><?xml version="1.0" encoding="utf-8"?>
+<p:notes xmlns:a="http://schemas.openxmlformats.org/drawingml/2006/main" xmlns:p="http://schemas.openxmlformats.org/presentationml/2006/main" xmlns:r="http://schemas.openxmlformats.org/officeDocument/2006/relationships">
+  <p:cSld>
+    <p:spTree>
+      <p:nvGrpSpPr>
+        <p:cNvPr id="1" name=""/>
+        <p:cNvGrpSpPr/>
+        <p:nvPr/>
+      </p:nvGrpSpPr>
+      <p:grpSpPr>
+        <a:xfrm>
+          <a:off x="0" y="0"/>
+          <a:ext cx="0" cy="0"/>
+          <a:chOff x="0" y="0"/>
+          <a:chExt cx="0" cy="0"/>
+        </a:xfrm>
+      </p:grpSpPr>
+      <p:sp>
+        <p:nvSpPr>
+          <p:cNvPr id="2" name="Slide Image Placeholder 1"/>
+          <p:cNvSpPr>
+            <a:spLocks noGrp="1"/>
+          </p:cNvSpPr>
+          <p:nvPr>
+            <p:ph type="sldImg" idx="2"/>
+          </p:nvPr>
+        </p:nvSpPr>
+        <p:spPr/>
+      </p:sp>
+      <p:sp>
+        <p:nvSpPr>
+          <p:cNvPr id="3" name="Notes Placeholder 2"/>
+          <p:cNvSpPr>
+            <a:spLocks noGrp="1"/>
+          </p:cNvSpPr>
+          <p:nvPr>
+            <p:ph type="body" idx="3" sz="quarter"/>
+          </p:nvPr>
+        </p:nvSpPr>
+        <p:spPr/>
+        <p:txBody>
+          <a:bodyPr/>
+          <a:lstStyle/>
+          <a:p>
+            <a:r>
+              <a:t>规范的要求可以概括为几个方面（具体章节和表述以现行文本为准）：一是责任体系，学校、学院（二级单位）、实验室逐级明确安全责任；二是制度建设，建立健全实验室安全管理制度和安全操作规程；三是教育培训与准入，进入实验室的人员须接受安全教育培训并考核合格；四是风险管控与隐患排查，对实验项目和危险源进行风险评估、分级管控，开展安全检查并对隐患闭环整改；五是应急管理，制定应急预案、配备应急设施并开展演练；六是条件保障，学校在经费、人员、设施等方面予以保障。</a:t>
+            </a:r>
+          </a:p>
+          <a:p>
+            <a:r>
+              <a:t>此外，规范对危险化学品、病原微生物、放射性物质和射线装置、机电设备、特种设备、激光、废弃物等各类危险源的管理分别提出要求。这些要求就是本课程第 3 章至第 14 章的主要内容。</a:t>
+            </a:r>
+          </a:p>
+          <a:p/>
+          <a:p>
+            <a:r>
+              <a:t>来源：补充知识点（依据《高等学校实验室安全规范》，原视频未涉及）</a:t>
+            </a:r>
+          </a:p>
+        </p:txBody>
+      </p:sp>
+      <p:sp>
+        <p:nvSpPr>
+          <p:cNvPr id="4" name="Slide Number Placeholder 3"/>
+          <p:cNvSpPr>
+            <a:spLocks noGrp="1"/>
+          </p:cNvSpPr>
+          <p:nvPr>
+            <p:ph type="sldNum" idx="5" sz="quarter"/>
+          </p:nvPr>
+        </p:nvSpPr>
+        <p:spPr/>
+      </p:sp>
+    </p:spTree>
+  </p:cSld>
+  <p:clrMapOvr>
+    <a:masterClrMapping/>
+  </p:clrMapOvr>
+</p:notes>
+</file>
+
+<file path=ppt/notesSlides/notesSlide28.xml><?xml version="1.0" encoding="utf-8"?>
+<p:notes xmlns:a="http://schemas.openxmlformats.org/drawingml/2006/main" xmlns:p="http://schemas.openxmlformats.org/presentationml/2006/main" xmlns:r="http://schemas.openxmlformats.org/officeDocument/2006/relationships">
+  <p:cSld>
+    <p:spTree>
+      <p:nvGrpSpPr>
+        <p:cNvPr id="1" name=""/>
+        <p:cNvGrpSpPr/>
+        <p:nvPr/>
+      </p:nvGrpSpPr>
+      <p:grpSpPr>
+        <a:xfrm>
+          <a:off x="0" y="0"/>
+          <a:ext cx="0" cy="0"/>
+          <a:chOff x="0" y="0"/>
+          <a:chExt cx="0" cy="0"/>
+        </a:xfrm>
+      </p:grpSpPr>
+      <p:sp>
+        <p:nvSpPr>
+          <p:cNvPr id="2" name="Slide Image Placeholder 1"/>
+          <p:cNvSpPr>
+            <a:spLocks noGrp="1"/>
+          </p:cNvSpPr>
+          <p:nvPr>
+            <p:ph type="sldImg" idx="2"/>
+          </p:nvPr>
+        </p:nvSpPr>
+        <p:spPr/>
+      </p:sp>
+      <p:sp>
+        <p:nvSpPr>
+          <p:cNvPr id="3" name="Notes Placeholder 2"/>
+          <p:cNvSpPr>
+            <a:spLocks noGrp="1"/>
+          </p:cNvSpPr>
+          <p:nvPr>
+            <p:ph type="body" idx="3" sz="quarter"/>
+          </p:nvPr>
+        </p:nvSpPr>
+        <p:spPr/>
+        <p:txBody>
+          <a:bodyPr/>
+          <a:lstStyle/>
+          <a:p>
+            <a:r>
+              <a:t>高校实验室数量多、差别大，不能“一刀切”管理。规范要求对实验室实行分类分级管理：按主要危险源的种类分类，例如化学类、生物类、辐射类、机电类、特种设备类等（一间实验室可能同时属于几类）；再按危险源的性质、数量和风险程度分级。</a:t>
+            </a:r>
+          </a:p>
+          <a:p>
+            <a:r>
+              <a:t>很多高校将实验室按风险由高到低分为若干级，并用红、橙、黄、蓝等颜色在信息牌上标识。级别越高，管控要求越严：准入培训更严格、进出需授权登记、检查频次更高、对危险源的数量和存放条件要求更严。低风险实验室也要管理，只是要求相对简单。</a:t>
+            </a:r>
+          </a:p>
+          <a:p>
+            <a:r>
+              <a:t>分级的具体标准、级数和颜色以本校规定为准。实验内容、危险源发生变化时，实验室的级别和信息牌也要相应调整。</a:t>
+            </a:r>
+          </a:p>
+          <a:p/>
+          <a:p>
+            <a:r>
+              <a:t>来源：合并了 1 个原知识点，最佳讲解取自 Acids, Bases &amp; Solvents Safety 11（详见 来源.tsv）</a:t>
+            </a:r>
+          </a:p>
+        </p:txBody>
+      </p:sp>
+      <p:sp>
+        <p:nvSpPr>
+          <p:cNvPr id="4" name="Slide Number Placeholder 3"/>
+          <p:cNvSpPr>
+            <a:spLocks noGrp="1"/>
+          </p:cNvSpPr>
+          <p:nvPr>
+            <p:ph type="sldNum" idx="5" sz="quarter"/>
+          </p:nvPr>
+        </p:nvSpPr>
+        <p:spPr/>
+      </p:sp>
+    </p:spTree>
+  </p:cSld>
+  <p:clrMapOvr>
+    <a:masterClrMapping/>
+  </p:clrMapOvr>
+</p:notes>
+</file>
+
+<file path=ppt/notesSlides/notesSlide29.xml><?xml version="1.0" encoding="utf-8"?>
+<p:notes xmlns:a="http://schemas.openxmlformats.org/drawingml/2006/main" xmlns:p="http://schemas.openxmlformats.org/presentationml/2006/main" xmlns:r="http://schemas.openxmlformats.org/officeDocument/2006/relationships">
+  <p:cSld>
+    <p:spTree>
+      <p:nvGrpSpPr>
+        <p:cNvPr id="1" name=""/>
+        <p:cNvGrpSpPr/>
+        <p:nvPr/>
+      </p:nvGrpSpPr>
+      <p:grpSpPr>
+        <a:xfrm>
+          <a:off x="0" y="0"/>
+          <a:ext cx="0" cy="0"/>
+          <a:chOff x="0" y="0"/>
+          <a:chExt cx="0" cy="0"/>
+        </a:xfrm>
+      </p:grpSpPr>
+      <p:sp>
+        <p:nvSpPr>
+          <p:cNvPr id="2" name="Slide Image Placeholder 1"/>
+          <p:cNvSpPr>
+            <a:spLocks noGrp="1"/>
+          </p:cNvSpPr>
+          <p:nvPr>
+            <p:ph type="sldImg" idx="2"/>
+          </p:nvPr>
+        </p:nvSpPr>
+        <p:spPr/>
+      </p:sp>
+      <p:sp>
+        <p:nvSpPr>
+          <p:cNvPr id="3" name="Notes Placeholder 2"/>
+          <p:cNvSpPr>
+            <a:spLocks noGrp="1"/>
+          </p:cNvSpPr>
+          <p:nvPr>
+            <p:ph type="body" idx="3" sz="quarter"/>
+          </p:nvPr>
+        </p:nvSpPr>
+        <p:spPr/>
+        <p:txBody>
+          <a:bodyPr/>
+          <a:lstStyle/>
+          <a:p>
+            <a:r>
+              <a:t>两间相邻的实验室，可能用着同一种化学品，但一间只是取几滴做显色，另一间要大量加热、回流或放大反应。前者暴露少、后果有限，后者可能产生大量蒸气、存在火灾或喷溅风险。两者的防护措施、设施要求和管理要求自然不同。</a:t>
+            </a:r>
+          </a:p>
+          <a:p>
+            <a:r>
+              <a:t>因此，判断管理要求不能只看“清单上有什么物质”，而要看实际在做什么：用量多少、是否加热加压、是否产生气溶胶或蒸气、在什么场所、由谁操作。这也是第 2 章风险评估要解决的问题。</a:t>
+            </a:r>
+          </a:p>
+          <a:p>
+            <a:r>
+              <a:t>当用量增加、操作条件改变或换到新场所时，要重新评估风险并相应调整措施。</a:t>
+            </a:r>
+          </a:p>
+          <a:p/>
+          <a:p>
+            <a:r>
+              <a:t>来源：合并了 1 个原知识点，最佳讲解取自 Acids, Bases &amp; Solvents Safety 11（详见 来源.tsv）</a:t>
+            </a:r>
+          </a:p>
+        </p:txBody>
+      </p:sp>
+      <p:sp>
+        <p:nvSpPr>
+          <p:cNvPr id="4" name="Slide Number Placeholder 3"/>
+          <p:cNvSpPr>
+            <a:spLocks noGrp="1"/>
+          </p:cNvSpPr>
+          <p:nvPr>
+            <p:ph type="sldNum" idx="5" sz="quarter"/>
+          </p:nvPr>
+        </p:nvSpPr>
+        <p:spPr/>
+      </p:sp>
+    </p:spTree>
+  </p:cSld>
+  <p:clrMapOvr>
+    <a:masterClrMapping/>
+  </p:clrMapOvr>
+</p:notes>
+</file>
+
 <file path=ppt/notesSlides/notesSlide3.xml><?xml version="1.0" encoding="utf-8"?>
 <p:notes xmlns:a="http://schemas.openxmlformats.org/drawingml/2006/main" xmlns:p="http://schemas.openxmlformats.org/presentationml/2006/main" xmlns:r="http://schemas.openxmlformats.org/officeDocument/2006/relationships">
   <p:cSld>
@@ -2014,6 +2368,565 @@
           <a:p>
             <a:r>
               <a:t>来源：合并了 2 个原知识点，最佳讲解取自 Acids, Bases &amp; Solvents Safety 12（详见 来源.tsv）</a:t>
+            </a:r>
+          </a:p>
+        </p:txBody>
+      </p:sp>
+      <p:sp>
+        <p:nvSpPr>
+          <p:cNvPr id="4" name="Slide Number Placeholder 3"/>
+          <p:cNvSpPr>
+            <a:spLocks noGrp="1"/>
+          </p:cNvSpPr>
+          <p:nvPr>
+            <p:ph type="sldNum" idx="5" sz="quarter"/>
+          </p:nvPr>
+        </p:nvSpPr>
+        <p:spPr/>
+      </p:sp>
+    </p:spTree>
+  </p:cSld>
+  <p:clrMapOvr>
+    <a:masterClrMapping/>
+  </p:clrMapOvr>
+</p:notes>
+</file>
+
+<file path=ppt/notesSlides/notesSlide30.xml><?xml version="1.0" encoding="utf-8"?>
+<p:notes xmlns:a="http://schemas.openxmlformats.org/drawingml/2006/main" xmlns:p="http://schemas.openxmlformats.org/presentationml/2006/main" xmlns:r="http://schemas.openxmlformats.org/officeDocument/2006/relationships">
+  <p:cSld>
+    <p:spTree>
+      <p:nvGrpSpPr>
+        <p:cNvPr id="1" name=""/>
+        <p:cNvGrpSpPr/>
+        <p:nvPr/>
+      </p:nvGrpSpPr>
+      <p:grpSpPr>
+        <a:xfrm>
+          <a:off x="0" y="0"/>
+          <a:ext cx="0" cy="0"/>
+          <a:chOff x="0" y="0"/>
+          <a:chExt cx="0" cy="0"/>
+        </a:xfrm>
+      </p:grpSpPr>
+      <p:sp>
+        <p:nvSpPr>
+          <p:cNvPr id="2" name="Slide Image Placeholder 1"/>
+          <p:cNvSpPr>
+            <a:spLocks noGrp="1"/>
+          </p:cNvSpPr>
+          <p:nvPr>
+            <p:ph type="sldImg" idx="2"/>
+          </p:nvPr>
+        </p:nvSpPr>
+        <p:spPr/>
+      </p:sp>
+      <p:sp>
+        <p:nvSpPr>
+          <p:cNvPr id="3" name="Notes Placeholder 2"/>
+          <p:cNvSpPr>
+            <a:spLocks noGrp="1"/>
+          </p:cNvSpPr>
+          <p:nvPr>
+            <p:ph type="body" idx="3" sz="quarter"/>
+          </p:nvPr>
+        </p:nvSpPr>
+        <p:spPr/>
+        <p:txBody>
+          <a:bodyPr/>
+          <a:lstStyle/>
+          <a:p>
+            <a:r>
+              <a:t>实验室应在门口等显著位置张贴安全信息牌，内容一般包括：实验室名称和安全分级，涉及的主要危险类别和相应的安全警示标志，安全责任人和联系方式，必要的防护要求，以及有效的应急联系电话（具体格式以本校规定为准）。室内还应张贴主要的安全操作规程和应急处置流程。</a:t>
+            </a:r>
+          </a:p>
+          <a:p>
+            <a:r>
+              <a:t>信息牌的作用之一，是让不熟悉实验室的人——新同学、访客、维修人员，尤其是火灾或事故时赶来的救援人员——在进门之前就知道里面有什么危险、该采取什么防护、该联系谁。</a:t>
+            </a:r>
+          </a:p>
+          <a:p>
+            <a:r>
+              <a:t>信息牌必须准确、及时：新进了危险化学品或开展新的危险性实验，要对照化学品安全技术说明书（SDS）更新危险类别和防护要求；责任人、电话变更要立即更换。信息过期或不全的信息牌，等于没有挂。</a:t>
+            </a:r>
+          </a:p>
+          <a:p/>
+          <a:p>
+            <a:r>
+              <a:t>来源：合并了 1 个原知识点，最佳讲解取自 Microbiology Biosafety 23（详见 来源.tsv）</a:t>
+            </a:r>
+          </a:p>
+        </p:txBody>
+      </p:sp>
+      <p:sp>
+        <p:nvSpPr>
+          <p:cNvPr id="4" name="Slide Number Placeholder 3"/>
+          <p:cNvSpPr>
+            <a:spLocks noGrp="1"/>
+          </p:cNvSpPr>
+          <p:nvPr>
+            <p:ph type="sldNum" idx="5" sz="quarter"/>
+          </p:nvPr>
+        </p:nvSpPr>
+        <p:spPr/>
+      </p:sp>
+    </p:spTree>
+  </p:cSld>
+  <p:clrMapOvr>
+    <a:masterClrMapping/>
+  </p:clrMapOvr>
+</p:notes>
+</file>
+
+<file path=ppt/notesSlides/notesSlide31.xml><?xml version="1.0" encoding="utf-8"?>
+<p:notes xmlns:a="http://schemas.openxmlformats.org/drawingml/2006/main" xmlns:p="http://schemas.openxmlformats.org/presentationml/2006/main" xmlns:r="http://schemas.openxmlformats.org/officeDocument/2006/relationships">
+  <p:cSld>
+    <p:spTree>
+      <p:nvGrpSpPr>
+        <p:cNvPr id="1" name=""/>
+        <p:cNvGrpSpPr/>
+        <p:nvPr/>
+      </p:nvGrpSpPr>
+      <p:grpSpPr>
+        <a:xfrm>
+          <a:off x="0" y="0"/>
+          <a:ext cx="0" cy="0"/>
+          <a:chOff x="0" y="0"/>
+          <a:chExt cx="0" cy="0"/>
+        </a:xfrm>
+      </p:grpSpPr>
+      <p:sp>
+        <p:nvSpPr>
+          <p:cNvPr id="2" name="Slide Image Placeholder 1"/>
+          <p:cNvSpPr>
+            <a:spLocks noGrp="1"/>
+          </p:cNvSpPr>
+          <p:nvPr>
+            <p:ph type="sldImg" idx="2"/>
+          </p:nvPr>
+        </p:nvSpPr>
+        <p:spPr/>
+      </p:sp>
+      <p:sp>
+        <p:nvSpPr>
+          <p:cNvPr id="3" name="Notes Placeholder 2"/>
+          <p:cNvSpPr>
+            <a:spLocks noGrp="1"/>
+          </p:cNvSpPr>
+          <p:nvPr>
+            <p:ph type="body" idx="3" sz="quarter"/>
+          </p:nvPr>
+        </p:nvSpPr>
+        <p:spPr/>
+        <p:txBody>
+          <a:bodyPr/>
+          <a:lstStyle/>
+          <a:p>
+            <a:r>
+              <a:t>很多高校要求进入实验室的人员签订安全承诺书（或安全责任书），承诺遵守学校和实验室的安全制度、规范操作、及时报告隐患。签字是一种郑重的承诺，也意味着本人知晓并愿意承担相应责任。</a:t>
+            </a:r>
+          </a:p>
+          <a:p>
+            <a:r>
+              <a:t>但承诺的意义在于落实到每天的行动：进门时按要求穿好实验服、戴好防护用品，查看仪器使用记录和交接信息；实验中遵守规程；离开前检查并关闭水、电、气，关好门窗，按本实验室的离室检查清单逐项确认。</a:t>
+            </a:r>
+          </a:p>
+          <a:p/>
+          <a:p>
+            <a:r>
+              <a:t>来源：合并了 1 个原知识点，最佳讲解取自 Laboratory Ergonomics &amp; RSI 34（详见 来源.tsv）</a:t>
+            </a:r>
+          </a:p>
+        </p:txBody>
+      </p:sp>
+      <p:sp>
+        <p:nvSpPr>
+          <p:cNvPr id="4" name="Slide Number Placeholder 3"/>
+          <p:cNvSpPr>
+            <a:spLocks noGrp="1"/>
+          </p:cNvSpPr>
+          <p:nvPr>
+            <p:ph type="sldNum" idx="5" sz="quarter"/>
+          </p:nvPr>
+        </p:nvSpPr>
+        <p:spPr/>
+      </p:sp>
+    </p:spTree>
+  </p:cSld>
+  <p:clrMapOvr>
+    <a:masterClrMapping/>
+  </p:clrMapOvr>
+</p:notes>
+</file>
+
+<file path=ppt/notesSlides/notesSlide32.xml><?xml version="1.0" encoding="utf-8"?>
+<p:notes xmlns:a="http://schemas.openxmlformats.org/drawingml/2006/main" xmlns:p="http://schemas.openxmlformats.org/presentationml/2006/main" xmlns:r="http://schemas.openxmlformats.org/officeDocument/2006/relationships">
+  <p:cSld>
+    <p:spTree>
+      <p:nvGrpSpPr>
+        <p:cNvPr id="1" name=""/>
+        <p:cNvGrpSpPr/>
+        <p:nvPr/>
+      </p:nvGrpSpPr>
+      <p:grpSpPr>
+        <a:xfrm>
+          <a:off x="0" y="0"/>
+          <a:ext cx="0" cy="0"/>
+          <a:chOff x="0" y="0"/>
+          <a:chExt cx="0" cy="0"/>
+        </a:xfrm>
+      </p:grpSpPr>
+      <p:sp>
+        <p:nvSpPr>
+          <p:cNvPr id="2" name="Slide Image Placeholder 1"/>
+          <p:cNvSpPr>
+            <a:spLocks noGrp="1"/>
+          </p:cNvSpPr>
+          <p:nvPr>
+            <p:ph type="sldImg" idx="2"/>
+          </p:nvPr>
+        </p:nvSpPr>
+        <p:spPr/>
+      </p:sp>
+      <p:sp>
+        <p:nvSpPr>
+          <p:cNvPr id="3" name="Notes Placeholder 2"/>
+          <p:cNvSpPr>
+            <a:spLocks noGrp="1"/>
+          </p:cNvSpPr>
+          <p:nvPr>
+            <p:ph type="body" idx="3" sz="quarter"/>
+          </p:nvPr>
+        </p:nvSpPr>
+        <p:spPr/>
+        <p:txBody>
+          <a:bodyPr/>
+          <a:lstStyle/>
+          <a:p>
+            <a:r>
+              <a:t>教育部组织制定的高校实验室安全检查项目表，把规范和相关法规的要求细化为一条条可检查的条目，是学校、学院、实验室自查和上级部门检查的依据。</a:t>
+            </a:r>
+          </a:p>
+          <a:p>
+            <a:r>
+              <a:t>项目表大体可分为两部分（具体类别和条目以教育部发布的现行版本为准）：管理类，包括责任体系、规章制度、安全宣传教育与培训、安全检查等；现场类，包括实验场所、安全设施、基础安全，以及化学、生物、辐射、机电、特种设备和常规冷热设备等专项安全。</a:t>
+            </a:r>
+          </a:p>
+          <a:p>
+            <a:r>
+              <a:t>检查中问题较集中的往往是：危险化学品的存放和台账、气瓶的固定和管理、消防器材和疏散通道、用电线路和插座、废弃物的收集存放、个人防护等。平时对照项目表逐项自查，是发现问题、避免“临检突击”的最有效办法。</a:t>
+            </a:r>
+          </a:p>
+          <a:p/>
+          <a:p>
+            <a:r>
+              <a:t>来源：补充知识点（依据教育部高校实验室安全检查项目表，原视频未涉及）</a:t>
+            </a:r>
+          </a:p>
+        </p:txBody>
+      </p:sp>
+      <p:sp>
+        <p:nvSpPr>
+          <p:cNvPr id="4" name="Slide Number Placeholder 3"/>
+          <p:cNvSpPr>
+            <a:spLocks noGrp="1"/>
+          </p:cNvSpPr>
+          <p:nvPr>
+            <p:ph type="sldNum" idx="5" sz="quarter"/>
+          </p:nvPr>
+        </p:nvSpPr>
+        <p:spPr/>
+      </p:sp>
+    </p:spTree>
+  </p:cSld>
+  <p:clrMapOvr>
+    <a:masterClrMapping/>
+  </p:clrMapOvr>
+</p:notes>
+</file>
+
+<file path=ppt/notesSlides/notesSlide33.xml><?xml version="1.0" encoding="utf-8"?>
+<p:notes xmlns:a="http://schemas.openxmlformats.org/drawingml/2006/main" xmlns:p="http://schemas.openxmlformats.org/presentationml/2006/main" xmlns:r="http://schemas.openxmlformats.org/officeDocument/2006/relationships">
+  <p:cSld>
+    <p:spTree>
+      <p:nvGrpSpPr>
+        <p:cNvPr id="1" name=""/>
+        <p:cNvGrpSpPr/>
+        <p:nvPr/>
+      </p:nvGrpSpPr>
+      <p:grpSpPr>
+        <a:xfrm>
+          <a:off x="0" y="0"/>
+          <a:ext cx="0" cy="0"/>
+          <a:chOff x="0" y="0"/>
+          <a:chExt cx="0" cy="0"/>
+        </a:xfrm>
+      </p:grpSpPr>
+      <p:sp>
+        <p:nvSpPr>
+          <p:cNvPr id="2" name="Slide Image Placeholder 1"/>
+          <p:cNvSpPr>
+            <a:spLocks noGrp="1"/>
+          </p:cNvSpPr>
+          <p:nvPr>
+            <p:ph type="sldImg" idx="2"/>
+          </p:nvPr>
+        </p:nvSpPr>
+        <p:spPr/>
+      </p:sp>
+      <p:sp>
+        <p:nvSpPr>
+          <p:cNvPr id="3" name="Notes Placeholder 2"/>
+          <p:cNvSpPr>
+            <a:spLocks noGrp="1"/>
+          </p:cNvSpPr>
+          <p:nvPr>
+            <p:ph type="body" idx="3" sz="quarter"/>
+          </p:nvPr>
+        </p:nvSpPr>
+        <p:spPr/>
+        <p:txBody>
+          <a:bodyPr/>
+          <a:lstStyle/>
+          <a:p>
+            <a:r>
+              <a:t>高校实验室安全检查分层开展：学校层面组织定期和专项检查，学院（二级单位）开展定期巡查，实验室负责人和安全员组织日常自查。教育部等上级部门也会按检查项目表对高校进行检查或抽查。</a:t>
+            </a:r>
+          </a:p>
+          <a:p>
+            <a:r>
+              <a:t>检查的目的是发现和消除隐患，而不是“过关”。把杂物塞进柜子、临时补记录的突击做法，既掩盖了问题，也可能制造新的隐患（如堵塞柜内通风、混放不相容物质）。真正有效的迎检准备就是平时按规范做到位。</a:t>
+            </a:r>
+          </a:p>
+          <a:p>
+            <a:r>
+              <a:t>检查发现的问题要登记、整改并复查；存在重大隐患的，要立即停止相关实验或停用相关设备，整改合格后才能恢复。日常自查、隐患分级和整改闭环的具体方法在第 5 课讲解。</a:t>
+            </a:r>
+          </a:p>
+          <a:p/>
+          <a:p>
+            <a:r>
+              <a:t>来源：合并了 1 个原知识点，最佳讲解取自 Acids, Bases &amp; Solvents Safety 02（详见 来源.tsv）</a:t>
+            </a:r>
+          </a:p>
+        </p:txBody>
+      </p:sp>
+      <p:sp>
+        <p:nvSpPr>
+          <p:cNvPr id="4" name="Slide Number Placeholder 3"/>
+          <p:cNvSpPr>
+            <a:spLocks noGrp="1"/>
+          </p:cNvSpPr>
+          <p:nvPr>
+            <p:ph type="sldNum" idx="5" sz="quarter"/>
+          </p:nvPr>
+        </p:nvSpPr>
+        <p:spPr/>
+      </p:sp>
+    </p:spTree>
+  </p:cSld>
+  <p:clrMapOvr>
+    <a:masterClrMapping/>
+  </p:clrMapOvr>
+</p:notes>
+</file>
+
+<file path=ppt/notesSlides/notesSlide34.xml><?xml version="1.0" encoding="utf-8"?>
+<p:notes xmlns:a="http://schemas.openxmlformats.org/drawingml/2006/main" xmlns:p="http://schemas.openxmlformats.org/presentationml/2006/main" xmlns:r="http://schemas.openxmlformats.org/officeDocument/2006/relationships">
+  <p:cSld>
+    <p:spTree>
+      <p:nvGrpSpPr>
+        <p:cNvPr id="1" name=""/>
+        <p:cNvGrpSpPr/>
+        <p:nvPr/>
+      </p:nvGrpSpPr>
+      <p:grpSpPr>
+        <a:xfrm>
+          <a:off x="0" y="0"/>
+          <a:ext cx="0" cy="0"/>
+          <a:chOff x="0" y="0"/>
+          <a:chExt cx="0" cy="0"/>
+        </a:xfrm>
+      </p:grpSpPr>
+      <p:sp>
+        <p:nvSpPr>
+          <p:cNvPr id="2" name="Slide Image Placeholder 1"/>
+          <p:cNvSpPr>
+            <a:spLocks noGrp="1"/>
+          </p:cNvSpPr>
+          <p:nvPr>
+            <p:ph type="sldImg" idx="2"/>
+          </p:nvPr>
+        </p:nvSpPr>
+        <p:spPr/>
+      </p:sp>
+      <p:sp>
+        <p:nvSpPr>
+          <p:cNvPr id="3" name="Notes Placeholder 2"/>
+          <p:cNvSpPr>
+            <a:spLocks noGrp="1"/>
+          </p:cNvSpPr>
+          <p:nvPr>
+            <p:ph type="body" idx="3" sz="quarter"/>
+          </p:nvPr>
+        </p:nvSpPr>
+        <p:spPr/>
+        <p:txBody>
+          <a:bodyPr/>
+          <a:lstStyle/>
+          <a:p>
+            <a:r>
+              <a:t>第 1 题 答案：A。解析：规范由教育部办公厅于 2023 年印发，文号为教科信厅函〔2023〕5 号。</a:t>
+            </a:r>
+          </a:p>
+          <a:p>
+            <a:r>
+              <a:t>第 2 题 答案：B。解析：风险取决于用量、操作方式和场所，管理要求按实际在做的工作来定。</a:t>
+            </a:r>
+          </a:p>
+        </p:txBody>
+      </p:sp>
+      <p:sp>
+        <p:nvSpPr>
+          <p:cNvPr id="4" name="Slide Number Placeholder 3"/>
+          <p:cNvSpPr>
+            <a:spLocks noGrp="1"/>
+          </p:cNvSpPr>
+          <p:nvPr>
+            <p:ph type="sldNum" idx="5" sz="quarter"/>
+          </p:nvPr>
+        </p:nvSpPr>
+        <p:spPr/>
+      </p:sp>
+    </p:spTree>
+  </p:cSld>
+  <p:clrMapOvr>
+    <a:masterClrMapping/>
+  </p:clrMapOvr>
+</p:notes>
+</file>
+
+<file path=ppt/notesSlides/notesSlide35.xml><?xml version="1.0" encoding="utf-8"?>
+<p:notes xmlns:a="http://schemas.openxmlformats.org/drawingml/2006/main" xmlns:p="http://schemas.openxmlformats.org/presentationml/2006/main" xmlns:r="http://schemas.openxmlformats.org/officeDocument/2006/relationships">
+  <p:cSld>
+    <p:spTree>
+      <p:nvGrpSpPr>
+        <p:cNvPr id="1" name=""/>
+        <p:cNvGrpSpPr/>
+        <p:nvPr/>
+      </p:nvGrpSpPr>
+      <p:grpSpPr>
+        <a:xfrm>
+          <a:off x="0" y="0"/>
+          <a:ext cx="0" cy="0"/>
+          <a:chOff x="0" y="0"/>
+          <a:chExt cx="0" cy="0"/>
+        </a:xfrm>
+      </p:grpSpPr>
+      <p:sp>
+        <p:nvSpPr>
+          <p:cNvPr id="2" name="Slide Image Placeholder 1"/>
+          <p:cNvSpPr>
+            <a:spLocks noGrp="1"/>
+          </p:cNvSpPr>
+          <p:nvPr>
+            <p:ph type="sldImg" idx="2"/>
+          </p:nvPr>
+        </p:nvSpPr>
+        <p:spPr/>
+      </p:sp>
+      <p:sp>
+        <p:nvSpPr>
+          <p:cNvPr id="3" name="Notes Placeholder 2"/>
+          <p:cNvSpPr>
+            <a:spLocks noGrp="1"/>
+          </p:cNvSpPr>
+          <p:nvPr>
+            <p:ph type="body" idx="3" sz="quarter"/>
+          </p:nvPr>
+        </p:nvSpPr>
+        <p:spPr/>
+        <p:txBody>
+          <a:bodyPr/>
+          <a:lstStyle/>
+          <a:p>
+            <a:r>
+              <a:t>第 3 题 答案：D。解析：信息牌写明危险类别、安全责任人、防护要求和应急电话等，供进入人员和救援人员识别。</a:t>
+            </a:r>
+          </a:p>
+          <a:p>
+            <a:r>
+              <a:t>第 4 题 答案：B。解析：突击藏匿会掩盖问题并可能造成混放等新隐患，迎检应靠平时做到位。</a:t>
+            </a:r>
+          </a:p>
+        </p:txBody>
+      </p:sp>
+      <p:sp>
+        <p:nvSpPr>
+          <p:cNvPr id="4" name="Slide Number Placeholder 3"/>
+          <p:cNvSpPr>
+            <a:spLocks noGrp="1"/>
+          </p:cNvSpPr>
+          <p:nvPr>
+            <p:ph type="sldNum" idx="5" sz="quarter"/>
+          </p:nvPr>
+        </p:nvSpPr>
+        <p:spPr/>
+      </p:sp>
+    </p:spTree>
+  </p:cSld>
+  <p:clrMapOvr>
+    <a:masterClrMapping/>
+  </p:clrMapOvr>
+</p:notes>
+</file>
+
+<file path=ppt/notesSlides/notesSlide36.xml><?xml version="1.0" encoding="utf-8"?>
+<p:notes xmlns:a="http://schemas.openxmlformats.org/drawingml/2006/main" xmlns:p="http://schemas.openxmlformats.org/presentationml/2006/main" xmlns:r="http://schemas.openxmlformats.org/officeDocument/2006/relationships">
+  <p:cSld>
+    <p:spTree>
+      <p:nvGrpSpPr>
+        <p:cNvPr id="1" name=""/>
+        <p:cNvGrpSpPr/>
+        <p:nvPr/>
+      </p:nvGrpSpPr>
+      <p:grpSpPr>
+        <a:xfrm>
+          <a:off x="0" y="0"/>
+          <a:ext cx="0" cy="0"/>
+          <a:chOff x="0" y="0"/>
+          <a:chExt cx="0" cy="0"/>
+        </a:xfrm>
+      </p:grpSpPr>
+      <p:sp>
+        <p:nvSpPr>
+          <p:cNvPr id="2" name="Slide Image Placeholder 1"/>
+          <p:cNvSpPr>
+            <a:spLocks noGrp="1"/>
+          </p:cNvSpPr>
+          <p:nvPr>
+            <p:ph type="sldImg" idx="2"/>
+          </p:nvPr>
+        </p:nvSpPr>
+        <p:spPr/>
+      </p:sp>
+      <p:sp>
+        <p:nvSpPr>
+          <p:cNvPr id="3" name="Notes Placeholder 2"/>
+          <p:cNvSpPr>
+            <a:spLocks noGrp="1"/>
+          </p:cNvSpPr>
+          <p:nvPr>
+            <p:ph type="body" idx="3" sz="quarter"/>
+          </p:nvPr>
+        </p:nvSpPr>
+        <p:spPr/>
+        <p:txBody>
+          <a:bodyPr/>
+          <a:lstStyle/>
+          <a:p>
+            <a:r>
+              <a:t>第 5 题 答案：关水、关电、关气，关好门窗，按本实验室离室检查清单逐项确认。解析：安全承诺要落实到每天的行动。</a:t>
             </a:r>
           </a:p>
         </p:txBody>
@@ -20413,6 +21326,3686 @@
 </p:sld>
 </file>
 
+<file path=ppt/slides/slide34.xml><?xml version="1.0" encoding="utf-8"?>
+<p:sld xmlns:a="http://schemas.openxmlformats.org/drawingml/2006/main" xmlns:p="http://schemas.openxmlformats.org/presentationml/2006/main" xmlns:r="http://schemas.openxmlformats.org/officeDocument/2006/relationships">
+  <p:cSld>
+    <p:bg>
+      <p:bgPr>
+        <a:solidFill>
+          <a:srgbClr val="0B3C5D"/>
+        </a:solidFill>
+        <a:effectLst/>
+      </p:bgPr>
+    </p:bg>
+    <p:spTree>
+      <p:nvGrpSpPr>
+        <p:cNvPr id="1" name=""/>
+        <p:cNvGrpSpPr/>
+        <p:nvPr/>
+      </p:nvGrpSpPr>
+      <p:grpSpPr/>
+      <p:sp>
+        <p:nvSpPr>
+          <p:cNvPr id="2" name="Oval 1"/>
+          <p:cNvSpPr/>
+          <p:nvPr/>
+        </p:nvSpPr>
+        <p:spPr>
+          <a:xfrm>
+            <a:off x="548640" y="1280160"/>
+            <a:ext cx="1005840" cy="1005840"/>
+          </a:xfrm>
+          <a:prstGeom prst="ellipse">
+            <a:avLst/>
+          </a:prstGeom>
+          <a:solidFill>
+            <a:srgbClr val="F28C28"/>
+          </a:solidFill>
+          <a:ln>
+            <a:noFill/>
+          </a:ln>
+          <a:effectLst/>
+        </p:spPr>
+        <p:style>
+          <a:lnRef idx="1">
+            <a:schemeClr val="accent1"/>
+          </a:lnRef>
+          <a:fillRef idx="3">
+            <a:schemeClr val="accent1"/>
+          </a:fillRef>
+          <a:effectRef idx="2">
+            <a:schemeClr val="accent1"/>
+          </a:effectRef>
+          <a:fontRef idx="minor">
+            <a:schemeClr val="lt1"/>
+          </a:fontRef>
+        </p:style>
+        <p:txBody>
+          <a:bodyPr rtlCol="0" anchor="ctr"/>
+          <a:lstStyle/>
+          <a:p>
+            <a:pPr algn="ctr"/>
+          </a:p>
+        </p:txBody>
+      </p:sp>
+      <p:sp>
+        <p:nvSpPr>
+          <p:cNvPr id="3" name="TextBox 2"/>
+          <p:cNvSpPr txBox="1"/>
+          <p:nvPr/>
+        </p:nvSpPr>
+        <p:spPr>
+          <a:xfrm>
+            <a:off x="548640" y="1280160"/>
+            <a:ext cx="1005840" cy="1005840"/>
+          </a:xfrm>
+          <a:prstGeom prst="rect">
+            <a:avLst/>
+          </a:prstGeom>
+          <a:noFill/>
+        </p:spPr>
+        <p:txBody>
+          <a:bodyPr wrap="square" anchor="ctr" lIns="0" rIns="0" tIns="0" bIns="0">
+            <a:spAutoFit/>
+          </a:bodyPr>
+          <a:lstStyle/>
+          <a:p>
+            <a:pPr algn="ctr"/>
+            <a:r>
+              <a:rPr sz="2400" b="1">
+                <a:solidFill>
+                  <a:srgbClr val="FFFFFF"/>
+                </a:solidFill>
+                <a:latin typeface="Microsoft YaHei"/>
+              </a:rPr>
+              <a:t>003</a:t>
+            </a:r>
+          </a:p>
+        </p:txBody>
+      </p:sp>
+      <p:sp>
+        <p:nvSpPr>
+          <p:cNvPr id="4" name="TextBox 3"/>
+          <p:cNvSpPr txBox="1"/>
+          <p:nvPr/>
+        </p:nvSpPr>
+        <p:spPr>
+          <a:xfrm>
+            <a:off x="548640" y="2651760"/>
+            <a:ext cx="11094415" cy="1097280"/>
+          </a:xfrm>
+          <a:prstGeom prst="rect">
+            <a:avLst/>
+          </a:prstGeom>
+          <a:noFill/>
+        </p:spPr>
+        <p:txBody>
+          <a:bodyPr wrap="square" anchor="t" lIns="0" rIns="0" tIns="0" bIns="0">
+            <a:spAutoFit/>
+          </a:bodyPr>
+          <a:lstStyle/>
+          <a:p>
+            <a:pPr algn="l"/>
+            <a:r>
+              <a:rPr sz="4400" b="1">
+                <a:solidFill>
+                  <a:srgbClr val="FFFFFF"/>
+                </a:solidFill>
+                <a:latin typeface="Microsoft YaHei"/>
+              </a:rPr>
+              <a:t>高校实验室安全规范与检查</a:t>
+            </a:r>
+          </a:p>
+        </p:txBody>
+      </p:sp>
+      <p:sp>
+        <p:nvSpPr>
+          <p:cNvPr id="5" name="TextBox 4"/>
+          <p:cNvSpPr txBox="1"/>
+          <p:nvPr/>
+        </p:nvSpPr>
+        <p:spPr>
+          <a:xfrm>
+            <a:off x="548640" y="3840480"/>
+            <a:ext cx="11094415" cy="457200"/>
+          </a:xfrm>
+          <a:prstGeom prst="rect">
+            <a:avLst/>
+          </a:prstGeom>
+          <a:noFill/>
+        </p:spPr>
+        <p:txBody>
+          <a:bodyPr wrap="square" anchor="t" lIns="0" rIns="0" tIns="0" bIns="0">
+            <a:spAutoFit/>
+          </a:bodyPr>
+          <a:lstStyle/>
+          <a:p>
+            <a:pPr algn="l"/>
+            <a:r>
+              <a:rPr sz="2000" b="0">
+                <a:solidFill>
+                  <a:srgbClr val="CADCE6"/>
+                </a:solidFill>
+                <a:latin typeface="Microsoft YaHei"/>
+              </a:rPr>
+              <a:t>第1章 法规、管理与安全文化</a:t>
+            </a:r>
+          </a:p>
+        </p:txBody>
+      </p:sp>
+      <p:sp>
+        <p:nvSpPr>
+          <p:cNvPr id="6" name="TextBox 5"/>
+          <p:cNvSpPr txBox="1"/>
+          <p:nvPr/>
+        </p:nvSpPr>
+        <p:spPr>
+          <a:xfrm>
+            <a:off x="548640" y="4389120"/>
+            <a:ext cx="11094415" cy="457200"/>
+          </a:xfrm>
+          <a:prstGeom prst="rect">
+            <a:avLst/>
+          </a:prstGeom>
+          <a:noFill/>
+        </p:spPr>
+        <p:txBody>
+          <a:bodyPr wrap="square" anchor="t" lIns="0" rIns="0" tIns="0" bIns="0">
+            <a:spAutoFit/>
+          </a:bodyPr>
+          <a:lstStyle/>
+          <a:p>
+            <a:pPr algn="l"/>
+            <a:r>
+              <a:rPr sz="1400" b="0">
+                <a:solidFill>
+                  <a:srgbClr val="CADCE6"/>
+                </a:solidFill>
+                <a:latin typeface="Microsoft YaHei"/>
+              </a:rPr>
+              <a:t>课时：约 5 分钟（卡通视频 56 镜）　适用对象：全体进入高校实验室的本科生、研究生、新进教职工和博士后（必修）；实验室负责人、安全员可作为迎检准备参考</a:t>
+            </a:r>
+          </a:p>
+        </p:txBody>
+      </p:sp>
+      <p:sp>
+        <p:nvSpPr>
+          <p:cNvPr id="7" name="TextBox 6"/>
+          <p:cNvSpPr txBox="1"/>
+          <p:nvPr/>
+        </p:nvSpPr>
+        <p:spPr>
+          <a:xfrm>
+            <a:off x="548640" y="6126480"/>
+            <a:ext cx="7315200" cy="365760"/>
+          </a:xfrm>
+          <a:prstGeom prst="rect">
+            <a:avLst/>
+          </a:prstGeom>
+          <a:noFill/>
+        </p:spPr>
+        <p:txBody>
+          <a:bodyPr wrap="square" anchor="t" lIns="0" rIns="0" tIns="0" bIns="0">
+            <a:spAutoFit/>
+          </a:bodyPr>
+          <a:lstStyle/>
+          <a:p>
+            <a:pPr algn="l"/>
+            <a:r>
+              <a:rPr sz="1400" b="1">
+                <a:solidFill>
+                  <a:srgbClr val="F28C28"/>
+                </a:solidFill>
+                <a:latin typeface="Microsoft YaHei"/>
+              </a:rPr>
+              <a:t>《高校实验室安全》学习课件</a:t>
+            </a:r>
+          </a:p>
+        </p:txBody>
+      </p:sp>
+    </p:spTree>
+  </p:cSld>
+  <p:clrMapOvr>
+    <a:masterClrMapping/>
+  </p:clrMapOvr>
+</p:sld>
+</file>
+
+<file path=ppt/slides/slide35.xml><?xml version="1.0" encoding="utf-8"?>
+<p:sld xmlns:a="http://schemas.openxmlformats.org/drawingml/2006/main" xmlns:p="http://schemas.openxmlformats.org/presentationml/2006/main" xmlns:r="http://schemas.openxmlformats.org/officeDocument/2006/relationships">
+  <p:cSld>
+    <p:bg>
+      <p:bgPr>
+        <a:solidFill>
+          <a:srgbClr val="FFFFFF"/>
+        </a:solidFill>
+        <a:effectLst/>
+      </p:bgPr>
+    </p:bg>
+    <p:spTree>
+      <p:nvGrpSpPr>
+        <p:cNvPr id="1" name=""/>
+        <p:cNvGrpSpPr/>
+        <p:nvPr/>
+      </p:nvGrpSpPr>
+      <p:grpSpPr/>
+      <p:sp>
+        <p:nvSpPr>
+          <p:cNvPr id="2" name="TextBox 1"/>
+          <p:cNvSpPr txBox="1"/>
+          <p:nvPr/>
+        </p:nvSpPr>
+        <p:spPr>
+          <a:xfrm>
+            <a:off x="548640" y="320040"/>
+            <a:ext cx="8229600" cy="320040"/>
+          </a:xfrm>
+          <a:prstGeom prst="rect">
+            <a:avLst/>
+          </a:prstGeom>
+          <a:noFill/>
+        </p:spPr>
+        <p:txBody>
+          <a:bodyPr wrap="square" anchor="t" lIns="0" rIns="0" tIns="0" bIns="0">
+            <a:spAutoFit/>
+          </a:bodyPr>
+          <a:lstStyle/>
+          <a:p>
+            <a:pPr algn="l"/>
+            <a:r>
+              <a:rPr sz="1200" b="1">
+                <a:solidFill>
+                  <a:srgbClr val="1D7A8C"/>
+                </a:solidFill>
+                <a:latin typeface="Microsoft YaHei"/>
+              </a:rPr>
+              <a:t>003 · 高校实验室安全规范与检查</a:t>
+            </a:r>
+          </a:p>
+        </p:txBody>
+      </p:sp>
+      <p:sp>
+        <p:nvSpPr>
+          <p:cNvPr id="3" name="TextBox 2"/>
+          <p:cNvSpPr txBox="1"/>
+          <p:nvPr/>
+        </p:nvSpPr>
+        <p:spPr>
+          <a:xfrm>
+            <a:off x="548640" y="640080"/>
+            <a:ext cx="11094415" cy="731520"/>
+          </a:xfrm>
+          <a:prstGeom prst="rect">
+            <a:avLst/>
+          </a:prstGeom>
+          <a:noFill/>
+        </p:spPr>
+        <p:txBody>
+          <a:bodyPr wrap="square" anchor="t" lIns="0" rIns="0" tIns="0" bIns="0">
+            <a:spAutoFit/>
+          </a:bodyPr>
+          <a:lstStyle/>
+          <a:p>
+            <a:pPr algn="l"/>
+            <a:r>
+              <a:rPr sz="3000" b="1">
+                <a:solidFill>
+                  <a:srgbClr val="0B3C5D"/>
+                </a:solidFill>
+                <a:latin typeface="Microsoft YaHei"/>
+              </a:rPr>
+              <a:t>学习目标</a:t>
+            </a:r>
+          </a:p>
+        </p:txBody>
+      </p:sp>
+      <p:sp>
+        <p:nvSpPr>
+          <p:cNvPr id="4" name="TextBox 3"/>
+          <p:cNvSpPr txBox="1"/>
+          <p:nvPr/>
+        </p:nvSpPr>
+        <p:spPr>
+          <a:xfrm>
+            <a:off x="548640" y="6446520"/>
+            <a:ext cx="7315200" cy="274320"/>
+          </a:xfrm>
+          <a:prstGeom prst="rect">
+            <a:avLst/>
+          </a:prstGeom>
+          <a:noFill/>
+        </p:spPr>
+        <p:txBody>
+          <a:bodyPr wrap="square" anchor="t" lIns="0" rIns="0" tIns="0" bIns="0">
+            <a:spAutoFit/>
+          </a:bodyPr>
+          <a:lstStyle/>
+          <a:p>
+            <a:pPr algn="l"/>
+            <a:r>
+              <a:rPr sz="1000" b="0">
+                <a:solidFill>
+                  <a:srgbClr val="5F6B75"/>
+                </a:solidFill>
+                <a:latin typeface="Microsoft YaHei"/>
+              </a:rPr>
+              <a:t>《高校实验室安全》 003 高校实验室安全规范与检查</a:t>
+            </a:r>
+          </a:p>
+        </p:txBody>
+      </p:sp>
+      <p:sp>
+        <p:nvSpPr>
+          <p:cNvPr id="5" name="Rounded Rectangle 4"/>
+          <p:cNvSpPr/>
+          <p:nvPr/>
+        </p:nvSpPr>
+        <p:spPr>
+          <a:xfrm>
+            <a:off x="548640" y="1828800"/>
+            <a:ext cx="2499283" cy="3931920"/>
+          </a:xfrm>
+          <a:prstGeom prst="roundRect">
+            <a:avLst>
+              <a:gd name="adj" fmla="val 8000"/>
+            </a:avLst>
+          </a:prstGeom>
+          <a:solidFill>
+            <a:srgbClr val="EEF4F7"/>
+          </a:solidFill>
+          <a:ln>
+            <a:noFill/>
+          </a:ln>
+          <a:effectLst/>
+        </p:spPr>
+        <p:style>
+          <a:lnRef idx="1">
+            <a:schemeClr val="accent1"/>
+          </a:lnRef>
+          <a:fillRef idx="3">
+            <a:schemeClr val="accent1"/>
+          </a:fillRef>
+          <a:effectRef idx="2">
+            <a:schemeClr val="accent1"/>
+          </a:effectRef>
+          <a:fontRef idx="minor">
+            <a:schemeClr val="lt1"/>
+          </a:fontRef>
+        </p:style>
+        <p:txBody>
+          <a:bodyPr rtlCol="0" anchor="ctr"/>
+          <a:lstStyle/>
+          <a:p>
+            <a:pPr algn="ctr"/>
+          </a:p>
+        </p:txBody>
+      </p:sp>
+      <p:sp>
+        <p:nvSpPr>
+          <p:cNvPr id="6" name="Oval 5"/>
+          <p:cNvSpPr/>
+          <p:nvPr/>
+        </p:nvSpPr>
+        <p:spPr>
+          <a:xfrm>
+            <a:off x="868680" y="2148840"/>
+            <a:ext cx="685800" cy="685800"/>
+          </a:xfrm>
+          <a:prstGeom prst="ellipse">
+            <a:avLst/>
+          </a:prstGeom>
+          <a:solidFill>
+            <a:srgbClr val="1D7A8C"/>
+          </a:solidFill>
+          <a:ln>
+            <a:noFill/>
+          </a:ln>
+          <a:effectLst/>
+        </p:spPr>
+        <p:style>
+          <a:lnRef idx="1">
+            <a:schemeClr val="accent1"/>
+          </a:lnRef>
+          <a:fillRef idx="3">
+            <a:schemeClr val="accent1"/>
+          </a:fillRef>
+          <a:effectRef idx="2">
+            <a:schemeClr val="accent1"/>
+          </a:effectRef>
+          <a:fontRef idx="minor">
+            <a:schemeClr val="lt1"/>
+          </a:fontRef>
+        </p:style>
+        <p:txBody>
+          <a:bodyPr rtlCol="0" anchor="ctr" lIns="0" rIns="0" tIns="0" bIns="0"/>
+          <a:lstStyle/>
+          <a:p>
+            <a:pPr algn="ctr"/>
+            <a:r>
+              <a:rPr sz="2000" b="1">
+                <a:solidFill>
+                  <a:srgbClr val="FFFFFF"/>
+                </a:solidFill>
+                <a:latin typeface="Microsoft YaHei"/>
+              </a:rPr>
+              <a:t>1</a:t>
+            </a:r>
+          </a:p>
+        </p:txBody>
+      </p:sp>
+      <p:sp>
+        <p:nvSpPr>
+          <p:cNvPr id="7" name="TextBox 6"/>
+          <p:cNvSpPr txBox="1"/>
+          <p:nvPr/>
+        </p:nvSpPr>
+        <p:spPr>
+          <a:xfrm>
+            <a:off x="868680" y="3108960"/>
+            <a:ext cx="1859203" cy="2468880"/>
+          </a:xfrm>
+          <a:prstGeom prst="rect">
+            <a:avLst/>
+          </a:prstGeom>
+          <a:noFill/>
+        </p:spPr>
+        <p:txBody>
+          <a:bodyPr wrap="square" anchor="t" lIns="0" rIns="0" tIns="0" bIns="0">
+            <a:spAutoFit/>
+          </a:bodyPr>
+          <a:lstStyle/>
+          <a:p>
+            <a:pPr algn="l"/>
+            <a:r>
+              <a:rPr sz="1800" b="0">
+                <a:solidFill>
+                  <a:srgbClr val="222B33"/>
+                </a:solidFill>
+                <a:latin typeface="Microsoft YaHei"/>
+              </a:rPr>
+              <a:t>能说出《高等学校实验室安全规范》的发布单位、适用范围和主要要求。</a:t>
+            </a:r>
+          </a:p>
+        </p:txBody>
+      </p:sp>
+      <p:sp>
+        <p:nvSpPr>
+          <p:cNvPr id="8" name="Rounded Rectangle 7"/>
+          <p:cNvSpPr/>
+          <p:nvPr/>
+        </p:nvSpPr>
+        <p:spPr>
+          <a:xfrm>
+            <a:off x="3413683" y="1828800"/>
+            <a:ext cx="2499283" cy="3931920"/>
+          </a:xfrm>
+          <a:prstGeom prst="roundRect">
+            <a:avLst>
+              <a:gd name="adj" fmla="val 8000"/>
+            </a:avLst>
+          </a:prstGeom>
+          <a:solidFill>
+            <a:srgbClr val="EEF4F7"/>
+          </a:solidFill>
+          <a:ln>
+            <a:noFill/>
+          </a:ln>
+          <a:effectLst/>
+        </p:spPr>
+        <p:style>
+          <a:lnRef idx="1">
+            <a:schemeClr val="accent1"/>
+          </a:lnRef>
+          <a:fillRef idx="3">
+            <a:schemeClr val="accent1"/>
+          </a:fillRef>
+          <a:effectRef idx="2">
+            <a:schemeClr val="accent1"/>
+          </a:effectRef>
+          <a:fontRef idx="minor">
+            <a:schemeClr val="lt1"/>
+          </a:fontRef>
+        </p:style>
+        <p:txBody>
+          <a:bodyPr rtlCol="0" anchor="ctr"/>
+          <a:lstStyle/>
+          <a:p>
+            <a:pPr algn="ctr"/>
+          </a:p>
+        </p:txBody>
+      </p:sp>
+      <p:sp>
+        <p:nvSpPr>
+          <p:cNvPr id="9" name="Oval 8"/>
+          <p:cNvSpPr/>
+          <p:nvPr/>
+        </p:nvSpPr>
+        <p:spPr>
+          <a:xfrm>
+            <a:off x="3733723" y="2148840"/>
+            <a:ext cx="685800" cy="685800"/>
+          </a:xfrm>
+          <a:prstGeom prst="ellipse">
+            <a:avLst/>
+          </a:prstGeom>
+          <a:solidFill>
+            <a:srgbClr val="1D7A8C"/>
+          </a:solidFill>
+          <a:ln>
+            <a:noFill/>
+          </a:ln>
+          <a:effectLst/>
+        </p:spPr>
+        <p:style>
+          <a:lnRef idx="1">
+            <a:schemeClr val="accent1"/>
+          </a:lnRef>
+          <a:fillRef idx="3">
+            <a:schemeClr val="accent1"/>
+          </a:fillRef>
+          <a:effectRef idx="2">
+            <a:schemeClr val="accent1"/>
+          </a:effectRef>
+          <a:fontRef idx="minor">
+            <a:schemeClr val="lt1"/>
+          </a:fontRef>
+        </p:style>
+        <p:txBody>
+          <a:bodyPr rtlCol="0" anchor="ctr" lIns="0" rIns="0" tIns="0" bIns="0"/>
+          <a:lstStyle/>
+          <a:p>
+            <a:pPr algn="ctr"/>
+            <a:r>
+              <a:rPr sz="2000" b="1">
+                <a:solidFill>
+                  <a:srgbClr val="FFFFFF"/>
+                </a:solidFill>
+                <a:latin typeface="Microsoft YaHei"/>
+              </a:rPr>
+              <a:t>2</a:t>
+            </a:r>
+          </a:p>
+        </p:txBody>
+      </p:sp>
+      <p:sp>
+        <p:nvSpPr>
+          <p:cNvPr id="10" name="TextBox 9"/>
+          <p:cNvSpPr txBox="1"/>
+          <p:nvPr/>
+        </p:nvSpPr>
+        <p:spPr>
+          <a:xfrm>
+            <a:off x="3733723" y="3108960"/>
+            <a:ext cx="1859203" cy="2468880"/>
+          </a:xfrm>
+          <a:prstGeom prst="rect">
+            <a:avLst/>
+          </a:prstGeom>
+          <a:noFill/>
+        </p:spPr>
+        <p:txBody>
+          <a:bodyPr wrap="square" anchor="t" lIns="0" rIns="0" tIns="0" bIns="0">
+            <a:spAutoFit/>
+          </a:bodyPr>
+          <a:lstStyle/>
+          <a:p>
+            <a:pPr algn="l"/>
+            <a:r>
+              <a:rPr sz="1800" b="0">
+                <a:solidFill>
+                  <a:srgbClr val="222B33"/>
+                </a:solidFill>
+                <a:latin typeface="Microsoft YaHei"/>
+              </a:rPr>
+              <a:t>能说出高校实验室安全检查项目表的大体结构和检查重点。</a:t>
+            </a:r>
+          </a:p>
+        </p:txBody>
+      </p:sp>
+      <p:sp>
+        <p:nvSpPr>
+          <p:cNvPr id="11" name="Rounded Rectangle 10"/>
+          <p:cNvSpPr/>
+          <p:nvPr/>
+        </p:nvSpPr>
+        <p:spPr>
+          <a:xfrm>
+            <a:off x="6278727" y="1828800"/>
+            <a:ext cx="2499283" cy="3931920"/>
+          </a:xfrm>
+          <a:prstGeom prst="roundRect">
+            <a:avLst>
+              <a:gd name="adj" fmla="val 8000"/>
+            </a:avLst>
+          </a:prstGeom>
+          <a:solidFill>
+            <a:srgbClr val="EEF4F7"/>
+          </a:solidFill>
+          <a:ln>
+            <a:noFill/>
+          </a:ln>
+          <a:effectLst/>
+        </p:spPr>
+        <p:style>
+          <a:lnRef idx="1">
+            <a:schemeClr val="accent1"/>
+          </a:lnRef>
+          <a:fillRef idx="3">
+            <a:schemeClr val="accent1"/>
+          </a:fillRef>
+          <a:effectRef idx="2">
+            <a:schemeClr val="accent1"/>
+          </a:effectRef>
+          <a:fontRef idx="minor">
+            <a:schemeClr val="lt1"/>
+          </a:fontRef>
+        </p:style>
+        <p:txBody>
+          <a:bodyPr rtlCol="0" anchor="ctr"/>
+          <a:lstStyle/>
+          <a:p>
+            <a:pPr algn="ctr"/>
+          </a:p>
+        </p:txBody>
+      </p:sp>
+      <p:sp>
+        <p:nvSpPr>
+          <p:cNvPr id="12" name="Oval 11"/>
+          <p:cNvSpPr/>
+          <p:nvPr/>
+        </p:nvSpPr>
+        <p:spPr>
+          <a:xfrm>
+            <a:off x="6598767" y="2148840"/>
+            <a:ext cx="685800" cy="685800"/>
+          </a:xfrm>
+          <a:prstGeom prst="ellipse">
+            <a:avLst/>
+          </a:prstGeom>
+          <a:solidFill>
+            <a:srgbClr val="1D7A8C"/>
+          </a:solidFill>
+          <a:ln>
+            <a:noFill/>
+          </a:ln>
+          <a:effectLst/>
+        </p:spPr>
+        <p:style>
+          <a:lnRef idx="1">
+            <a:schemeClr val="accent1"/>
+          </a:lnRef>
+          <a:fillRef idx="3">
+            <a:schemeClr val="accent1"/>
+          </a:fillRef>
+          <a:effectRef idx="2">
+            <a:schemeClr val="accent1"/>
+          </a:effectRef>
+          <a:fontRef idx="minor">
+            <a:schemeClr val="lt1"/>
+          </a:fontRef>
+        </p:style>
+        <p:txBody>
+          <a:bodyPr rtlCol="0" anchor="ctr" lIns="0" rIns="0" tIns="0" bIns="0"/>
+          <a:lstStyle/>
+          <a:p>
+            <a:pPr algn="ctr"/>
+            <a:r>
+              <a:rPr sz="2000" b="1">
+                <a:solidFill>
+                  <a:srgbClr val="FFFFFF"/>
+                </a:solidFill>
+                <a:latin typeface="Microsoft YaHei"/>
+              </a:rPr>
+              <a:t>3</a:t>
+            </a:r>
+          </a:p>
+        </p:txBody>
+      </p:sp>
+      <p:sp>
+        <p:nvSpPr>
+          <p:cNvPr id="13" name="TextBox 12"/>
+          <p:cNvSpPr txBox="1"/>
+          <p:nvPr/>
+        </p:nvSpPr>
+        <p:spPr>
+          <a:xfrm>
+            <a:off x="6598767" y="3108960"/>
+            <a:ext cx="1859203" cy="2468880"/>
+          </a:xfrm>
+          <a:prstGeom prst="rect">
+            <a:avLst/>
+          </a:prstGeom>
+          <a:noFill/>
+        </p:spPr>
+        <p:txBody>
+          <a:bodyPr wrap="square" anchor="t" lIns="0" rIns="0" tIns="0" bIns="0">
+            <a:spAutoFit/>
+          </a:bodyPr>
+          <a:lstStyle/>
+          <a:p>
+            <a:pPr algn="l"/>
+            <a:r>
+              <a:rPr sz="1800" b="0">
+                <a:solidFill>
+                  <a:srgbClr val="222B33"/>
+                </a:solidFill>
+                <a:latin typeface="Microsoft YaHei"/>
+              </a:rPr>
+              <a:t>能理解实验室分类分级管理的含义，判断“同样的物质、不同的操作”为什么管理要求不同。</a:t>
+            </a:r>
+          </a:p>
+        </p:txBody>
+      </p:sp>
+      <p:sp>
+        <p:nvSpPr>
+          <p:cNvPr id="14" name="Rounded Rectangle 13"/>
+          <p:cNvSpPr/>
+          <p:nvPr/>
+        </p:nvSpPr>
+        <p:spPr>
+          <a:xfrm>
+            <a:off x="9143771" y="1828800"/>
+            <a:ext cx="2499283" cy="3931920"/>
+          </a:xfrm>
+          <a:prstGeom prst="roundRect">
+            <a:avLst>
+              <a:gd name="adj" fmla="val 8000"/>
+            </a:avLst>
+          </a:prstGeom>
+          <a:solidFill>
+            <a:srgbClr val="EEF4F7"/>
+          </a:solidFill>
+          <a:ln>
+            <a:noFill/>
+          </a:ln>
+          <a:effectLst/>
+        </p:spPr>
+        <p:style>
+          <a:lnRef idx="1">
+            <a:schemeClr val="accent1"/>
+          </a:lnRef>
+          <a:fillRef idx="3">
+            <a:schemeClr val="accent1"/>
+          </a:fillRef>
+          <a:effectRef idx="2">
+            <a:schemeClr val="accent1"/>
+          </a:effectRef>
+          <a:fontRef idx="minor">
+            <a:schemeClr val="lt1"/>
+          </a:fontRef>
+        </p:style>
+        <p:txBody>
+          <a:bodyPr rtlCol="0" anchor="ctr"/>
+          <a:lstStyle/>
+          <a:p>
+            <a:pPr algn="ctr"/>
+          </a:p>
+        </p:txBody>
+      </p:sp>
+      <p:sp>
+        <p:nvSpPr>
+          <p:cNvPr id="15" name="Oval 14"/>
+          <p:cNvSpPr/>
+          <p:nvPr/>
+        </p:nvSpPr>
+        <p:spPr>
+          <a:xfrm>
+            <a:off x="9463811" y="2148840"/>
+            <a:ext cx="685800" cy="685800"/>
+          </a:xfrm>
+          <a:prstGeom prst="ellipse">
+            <a:avLst/>
+          </a:prstGeom>
+          <a:solidFill>
+            <a:srgbClr val="1D7A8C"/>
+          </a:solidFill>
+          <a:ln>
+            <a:noFill/>
+          </a:ln>
+          <a:effectLst/>
+        </p:spPr>
+        <p:style>
+          <a:lnRef idx="1">
+            <a:schemeClr val="accent1"/>
+          </a:lnRef>
+          <a:fillRef idx="3">
+            <a:schemeClr val="accent1"/>
+          </a:fillRef>
+          <a:effectRef idx="2">
+            <a:schemeClr val="accent1"/>
+          </a:effectRef>
+          <a:fontRef idx="minor">
+            <a:schemeClr val="lt1"/>
+          </a:fontRef>
+        </p:style>
+        <p:txBody>
+          <a:bodyPr rtlCol="0" anchor="ctr" lIns="0" rIns="0" tIns="0" bIns="0"/>
+          <a:lstStyle/>
+          <a:p>
+            <a:pPr algn="ctr"/>
+            <a:r>
+              <a:rPr sz="2000" b="1">
+                <a:solidFill>
+                  <a:srgbClr val="FFFFFF"/>
+                </a:solidFill>
+                <a:latin typeface="Microsoft YaHei"/>
+              </a:rPr>
+              <a:t>4</a:t>
+            </a:r>
+          </a:p>
+        </p:txBody>
+      </p:sp>
+      <p:sp>
+        <p:nvSpPr>
+          <p:cNvPr id="16" name="TextBox 15"/>
+          <p:cNvSpPr txBox="1"/>
+          <p:nvPr/>
+        </p:nvSpPr>
+        <p:spPr>
+          <a:xfrm>
+            <a:off x="9463811" y="3108960"/>
+            <a:ext cx="1859203" cy="2468880"/>
+          </a:xfrm>
+          <a:prstGeom prst="rect">
+            <a:avLst/>
+          </a:prstGeom>
+          <a:noFill/>
+        </p:spPr>
+        <p:txBody>
+          <a:bodyPr wrap="square" anchor="t" lIns="0" rIns="0" tIns="0" bIns="0">
+            <a:spAutoFit/>
+          </a:bodyPr>
+          <a:lstStyle/>
+          <a:p>
+            <a:pPr algn="l"/>
+            <a:r>
+              <a:rPr sz="1800" b="0">
+                <a:solidFill>
+                  <a:srgbClr val="222B33"/>
+                </a:solidFill>
+                <a:latin typeface="Microsoft YaHei"/>
+              </a:rPr>
+              <a:t>能做到：看懂并协助更新门口安全信息牌，把安全承诺落实到每天的进出实验室行为中。</a:t>
+            </a:r>
+          </a:p>
+        </p:txBody>
+      </p:sp>
+    </p:spTree>
+  </p:cSld>
+  <p:clrMapOvr>
+    <a:masterClrMapping/>
+  </p:clrMapOvr>
+</p:sld>
+</file>
+
+<file path=ppt/slides/slide36.xml><?xml version="1.0" encoding="utf-8"?>
+<p:sld xmlns:a="http://schemas.openxmlformats.org/drawingml/2006/main" xmlns:p="http://schemas.openxmlformats.org/presentationml/2006/main" xmlns:r="http://schemas.openxmlformats.org/officeDocument/2006/relationships">
+  <p:cSld>
+    <p:bg>
+      <p:bgPr>
+        <a:solidFill>
+          <a:srgbClr val="FFFFFF"/>
+        </a:solidFill>
+        <a:effectLst/>
+      </p:bgPr>
+    </p:bg>
+    <p:spTree>
+      <p:nvGrpSpPr>
+        <p:cNvPr id="1" name=""/>
+        <p:cNvGrpSpPr/>
+        <p:nvPr/>
+      </p:nvGrpSpPr>
+      <p:grpSpPr/>
+      <p:sp>
+        <p:nvSpPr>
+          <p:cNvPr id="2" name="TextBox 1"/>
+          <p:cNvSpPr txBox="1"/>
+          <p:nvPr/>
+        </p:nvSpPr>
+        <p:spPr>
+          <a:xfrm>
+            <a:off x="548640" y="320040"/>
+            <a:ext cx="8229600" cy="320040"/>
+          </a:xfrm>
+          <a:prstGeom prst="rect">
+            <a:avLst/>
+          </a:prstGeom>
+          <a:noFill/>
+        </p:spPr>
+        <p:txBody>
+          <a:bodyPr wrap="square" anchor="t" lIns="0" rIns="0" tIns="0" bIns="0">
+            <a:spAutoFit/>
+          </a:bodyPr>
+          <a:lstStyle/>
+          <a:p>
+            <a:pPr algn="l"/>
+            <a:r>
+              <a:rPr sz="1200" b="1">
+                <a:solidFill>
+                  <a:srgbClr val="1D7A8C"/>
+                </a:solidFill>
+                <a:latin typeface="Microsoft YaHei"/>
+              </a:rPr>
+              <a:t>003 · 高校实验室安全规范与检查</a:t>
+            </a:r>
+          </a:p>
+        </p:txBody>
+      </p:sp>
+      <p:sp>
+        <p:nvSpPr>
+          <p:cNvPr id="3" name="TextBox 2"/>
+          <p:cNvSpPr txBox="1"/>
+          <p:nvPr/>
+        </p:nvSpPr>
+        <p:spPr>
+          <a:xfrm>
+            <a:off x="548640" y="640080"/>
+            <a:ext cx="11094415" cy="731520"/>
+          </a:xfrm>
+          <a:prstGeom prst="rect">
+            <a:avLst/>
+          </a:prstGeom>
+          <a:noFill/>
+        </p:spPr>
+        <p:txBody>
+          <a:bodyPr wrap="square" anchor="t" lIns="0" rIns="0" tIns="0" bIns="0">
+            <a:spAutoFit/>
+          </a:bodyPr>
+          <a:lstStyle/>
+          <a:p>
+            <a:pPr algn="l"/>
+            <a:r>
+              <a:rPr sz="3000" b="1">
+                <a:solidFill>
+                  <a:srgbClr val="0B3C5D"/>
+                </a:solidFill>
+                <a:latin typeface="Microsoft YaHei"/>
+              </a:rPr>
+              <a:t>法规与标准依据</a:t>
+            </a:r>
+          </a:p>
+        </p:txBody>
+      </p:sp>
+      <p:sp>
+        <p:nvSpPr>
+          <p:cNvPr id="4" name="TextBox 3"/>
+          <p:cNvSpPr txBox="1"/>
+          <p:nvPr/>
+        </p:nvSpPr>
+        <p:spPr>
+          <a:xfrm>
+            <a:off x="548640" y="6446520"/>
+            <a:ext cx="7315200" cy="274320"/>
+          </a:xfrm>
+          <a:prstGeom prst="rect">
+            <a:avLst/>
+          </a:prstGeom>
+          <a:noFill/>
+        </p:spPr>
+        <p:txBody>
+          <a:bodyPr wrap="square" anchor="t" lIns="0" rIns="0" tIns="0" bIns="0">
+            <a:spAutoFit/>
+          </a:bodyPr>
+          <a:lstStyle/>
+          <a:p>
+            <a:pPr algn="l"/>
+            <a:r>
+              <a:rPr sz="1000" b="0">
+                <a:solidFill>
+                  <a:srgbClr val="5F6B75"/>
+                </a:solidFill>
+                <a:latin typeface="Microsoft YaHei"/>
+              </a:rPr>
+              <a:t>《高校实验室安全》 003 高校实验室安全规范与检查</a:t>
+            </a:r>
+          </a:p>
+        </p:txBody>
+      </p:sp>
+      <p:sp>
+        <p:nvSpPr>
+          <p:cNvPr id="5" name="Rounded Rectangle 4"/>
+          <p:cNvSpPr/>
+          <p:nvPr/>
+        </p:nvSpPr>
+        <p:spPr>
+          <a:xfrm>
+            <a:off x="548640" y="1737360"/>
+            <a:ext cx="5364327" cy="960120"/>
+          </a:xfrm>
+          <a:prstGeom prst="roundRect">
+            <a:avLst>
+              <a:gd name="adj" fmla="val 8000"/>
+            </a:avLst>
+          </a:prstGeom>
+          <a:solidFill>
+            <a:srgbClr val="EEF4F7"/>
+          </a:solidFill>
+          <a:ln>
+            <a:noFill/>
+          </a:ln>
+          <a:effectLst/>
+        </p:spPr>
+        <p:style>
+          <a:lnRef idx="1">
+            <a:schemeClr val="accent1"/>
+          </a:lnRef>
+          <a:fillRef idx="3">
+            <a:schemeClr val="accent1"/>
+          </a:fillRef>
+          <a:effectRef idx="2">
+            <a:schemeClr val="accent1"/>
+          </a:effectRef>
+          <a:fontRef idx="minor">
+            <a:schemeClr val="lt1"/>
+          </a:fontRef>
+        </p:style>
+        <p:txBody>
+          <a:bodyPr rtlCol="0" anchor="ctr"/>
+          <a:lstStyle/>
+          <a:p>
+            <a:pPr algn="ctr"/>
+          </a:p>
+        </p:txBody>
+      </p:sp>
+      <p:sp>
+        <p:nvSpPr>
+          <p:cNvPr id="6" name="Oval 5"/>
+          <p:cNvSpPr/>
+          <p:nvPr/>
+        </p:nvSpPr>
+        <p:spPr>
+          <a:xfrm>
+            <a:off x="731520" y="1988820"/>
+            <a:ext cx="457200" cy="457200"/>
+          </a:xfrm>
+          <a:prstGeom prst="ellipse">
+            <a:avLst/>
+          </a:prstGeom>
+          <a:solidFill>
+            <a:srgbClr val="0B3C5D"/>
+          </a:solidFill>
+          <a:ln>
+            <a:noFill/>
+          </a:ln>
+          <a:effectLst/>
+        </p:spPr>
+        <p:style>
+          <a:lnRef idx="1">
+            <a:schemeClr val="accent1"/>
+          </a:lnRef>
+          <a:fillRef idx="3">
+            <a:schemeClr val="accent1"/>
+          </a:fillRef>
+          <a:effectRef idx="2">
+            <a:schemeClr val="accent1"/>
+          </a:effectRef>
+          <a:fontRef idx="minor">
+            <a:schemeClr val="lt1"/>
+          </a:fontRef>
+        </p:style>
+        <p:txBody>
+          <a:bodyPr rtlCol="0" anchor="ctr" lIns="0" rIns="0" tIns="0" bIns="0"/>
+          <a:lstStyle/>
+          <a:p>
+            <a:pPr algn="ctr"/>
+            <a:r>
+              <a:rPr sz="1600" b="1">
+                <a:solidFill>
+                  <a:srgbClr val="FFFFFF"/>
+                </a:solidFill>
+                <a:latin typeface="Microsoft YaHei"/>
+              </a:rPr>
+              <a:t>§</a:t>
+            </a:r>
+          </a:p>
+        </p:txBody>
+      </p:sp>
+      <p:sp>
+        <p:nvSpPr>
+          <p:cNvPr id="7" name="TextBox 6"/>
+          <p:cNvSpPr txBox="1"/>
+          <p:nvPr/>
+        </p:nvSpPr>
+        <p:spPr>
+          <a:xfrm>
+            <a:off x="1371600" y="1828800"/>
+            <a:ext cx="4358487" cy="777240"/>
+          </a:xfrm>
+          <a:prstGeom prst="rect">
+            <a:avLst/>
+          </a:prstGeom>
+          <a:noFill/>
+        </p:spPr>
+        <p:txBody>
+          <a:bodyPr wrap="square" anchor="ctr" lIns="0" rIns="0" tIns="0" bIns="0">
+            <a:spAutoFit/>
+          </a:bodyPr>
+          <a:lstStyle/>
+          <a:p>
+            <a:pPr algn="l"/>
+            <a:r>
+              <a:rPr sz="1400" b="0">
+                <a:solidFill>
+                  <a:srgbClr val="222B33"/>
+                </a:solidFill>
+                <a:latin typeface="Microsoft YaHei"/>
+              </a:rPr>
+              <a:t>《高等学校实验室安全规范》（教科信厅函〔2023〕5 号，以现行文本为准）</a:t>
+            </a:r>
+          </a:p>
+        </p:txBody>
+      </p:sp>
+      <p:sp>
+        <p:nvSpPr>
+          <p:cNvPr id="8" name="Rounded Rectangle 7"/>
+          <p:cNvSpPr/>
+          <p:nvPr/>
+        </p:nvSpPr>
+        <p:spPr>
+          <a:xfrm>
+            <a:off x="6278727" y="1737360"/>
+            <a:ext cx="5364327" cy="960120"/>
+          </a:xfrm>
+          <a:prstGeom prst="roundRect">
+            <a:avLst>
+              <a:gd name="adj" fmla="val 8000"/>
+            </a:avLst>
+          </a:prstGeom>
+          <a:solidFill>
+            <a:srgbClr val="EEF4F7"/>
+          </a:solidFill>
+          <a:ln>
+            <a:noFill/>
+          </a:ln>
+          <a:effectLst/>
+        </p:spPr>
+        <p:style>
+          <a:lnRef idx="1">
+            <a:schemeClr val="accent1"/>
+          </a:lnRef>
+          <a:fillRef idx="3">
+            <a:schemeClr val="accent1"/>
+          </a:fillRef>
+          <a:effectRef idx="2">
+            <a:schemeClr val="accent1"/>
+          </a:effectRef>
+          <a:fontRef idx="minor">
+            <a:schemeClr val="lt1"/>
+          </a:fontRef>
+        </p:style>
+        <p:txBody>
+          <a:bodyPr rtlCol="0" anchor="ctr"/>
+          <a:lstStyle/>
+          <a:p>
+            <a:pPr algn="ctr"/>
+          </a:p>
+        </p:txBody>
+      </p:sp>
+      <p:sp>
+        <p:nvSpPr>
+          <p:cNvPr id="9" name="Oval 8"/>
+          <p:cNvSpPr/>
+          <p:nvPr/>
+        </p:nvSpPr>
+        <p:spPr>
+          <a:xfrm>
+            <a:off x="6461607" y="1988820"/>
+            <a:ext cx="457200" cy="457200"/>
+          </a:xfrm>
+          <a:prstGeom prst="ellipse">
+            <a:avLst/>
+          </a:prstGeom>
+          <a:solidFill>
+            <a:srgbClr val="0B3C5D"/>
+          </a:solidFill>
+          <a:ln>
+            <a:noFill/>
+          </a:ln>
+          <a:effectLst/>
+        </p:spPr>
+        <p:style>
+          <a:lnRef idx="1">
+            <a:schemeClr val="accent1"/>
+          </a:lnRef>
+          <a:fillRef idx="3">
+            <a:schemeClr val="accent1"/>
+          </a:fillRef>
+          <a:effectRef idx="2">
+            <a:schemeClr val="accent1"/>
+          </a:effectRef>
+          <a:fontRef idx="minor">
+            <a:schemeClr val="lt1"/>
+          </a:fontRef>
+        </p:style>
+        <p:txBody>
+          <a:bodyPr rtlCol="0" anchor="ctr" lIns="0" rIns="0" tIns="0" bIns="0"/>
+          <a:lstStyle/>
+          <a:p>
+            <a:pPr algn="ctr"/>
+            <a:r>
+              <a:rPr sz="1600" b="1">
+                <a:solidFill>
+                  <a:srgbClr val="FFFFFF"/>
+                </a:solidFill>
+                <a:latin typeface="Microsoft YaHei"/>
+              </a:rPr>
+              <a:t>§</a:t>
+            </a:r>
+          </a:p>
+        </p:txBody>
+      </p:sp>
+      <p:sp>
+        <p:nvSpPr>
+          <p:cNvPr id="10" name="TextBox 9"/>
+          <p:cNvSpPr txBox="1"/>
+          <p:nvPr/>
+        </p:nvSpPr>
+        <p:spPr>
+          <a:xfrm>
+            <a:off x="7101687" y="1828800"/>
+            <a:ext cx="4358487" cy="777240"/>
+          </a:xfrm>
+          <a:prstGeom prst="rect">
+            <a:avLst/>
+          </a:prstGeom>
+          <a:noFill/>
+        </p:spPr>
+        <p:txBody>
+          <a:bodyPr wrap="square" anchor="ctr" lIns="0" rIns="0" tIns="0" bIns="0">
+            <a:spAutoFit/>
+          </a:bodyPr>
+          <a:lstStyle/>
+          <a:p>
+            <a:pPr algn="l"/>
+            <a:r>
+              <a:rPr sz="1400" b="0">
+                <a:solidFill>
+                  <a:srgbClr val="222B33"/>
+                </a:solidFill>
+                <a:latin typeface="Microsoft YaHei"/>
+              </a:rPr>
+              <a:t>教育部高校实验室安全检查项目表（以教育部当年发布的现行版本为准）</a:t>
+            </a:r>
+          </a:p>
+        </p:txBody>
+      </p:sp>
+      <p:sp>
+        <p:nvSpPr>
+          <p:cNvPr id="11" name="Rounded Rectangle 10"/>
+          <p:cNvSpPr/>
+          <p:nvPr/>
+        </p:nvSpPr>
+        <p:spPr>
+          <a:xfrm>
+            <a:off x="548640" y="2834640"/>
+            <a:ext cx="5364327" cy="960120"/>
+          </a:xfrm>
+          <a:prstGeom prst="roundRect">
+            <a:avLst>
+              <a:gd name="adj" fmla="val 8000"/>
+            </a:avLst>
+          </a:prstGeom>
+          <a:solidFill>
+            <a:srgbClr val="EEF4F7"/>
+          </a:solidFill>
+          <a:ln>
+            <a:noFill/>
+          </a:ln>
+          <a:effectLst/>
+        </p:spPr>
+        <p:style>
+          <a:lnRef idx="1">
+            <a:schemeClr val="accent1"/>
+          </a:lnRef>
+          <a:fillRef idx="3">
+            <a:schemeClr val="accent1"/>
+          </a:fillRef>
+          <a:effectRef idx="2">
+            <a:schemeClr val="accent1"/>
+          </a:effectRef>
+          <a:fontRef idx="minor">
+            <a:schemeClr val="lt1"/>
+          </a:fontRef>
+        </p:style>
+        <p:txBody>
+          <a:bodyPr rtlCol="0" anchor="ctr"/>
+          <a:lstStyle/>
+          <a:p>
+            <a:pPr algn="ctr"/>
+          </a:p>
+        </p:txBody>
+      </p:sp>
+      <p:sp>
+        <p:nvSpPr>
+          <p:cNvPr id="12" name="Oval 11"/>
+          <p:cNvSpPr/>
+          <p:nvPr/>
+        </p:nvSpPr>
+        <p:spPr>
+          <a:xfrm>
+            <a:off x="731520" y="3086100"/>
+            <a:ext cx="457200" cy="457200"/>
+          </a:xfrm>
+          <a:prstGeom prst="ellipse">
+            <a:avLst/>
+          </a:prstGeom>
+          <a:solidFill>
+            <a:srgbClr val="0B3C5D"/>
+          </a:solidFill>
+          <a:ln>
+            <a:noFill/>
+          </a:ln>
+          <a:effectLst/>
+        </p:spPr>
+        <p:style>
+          <a:lnRef idx="1">
+            <a:schemeClr val="accent1"/>
+          </a:lnRef>
+          <a:fillRef idx="3">
+            <a:schemeClr val="accent1"/>
+          </a:fillRef>
+          <a:effectRef idx="2">
+            <a:schemeClr val="accent1"/>
+          </a:effectRef>
+          <a:fontRef idx="minor">
+            <a:schemeClr val="lt1"/>
+          </a:fontRef>
+        </p:style>
+        <p:txBody>
+          <a:bodyPr rtlCol="0" anchor="ctr" lIns="0" rIns="0" tIns="0" bIns="0"/>
+          <a:lstStyle/>
+          <a:p>
+            <a:pPr algn="ctr"/>
+            <a:r>
+              <a:rPr sz="1600" b="1">
+                <a:solidFill>
+                  <a:srgbClr val="FFFFFF"/>
+                </a:solidFill>
+                <a:latin typeface="Microsoft YaHei"/>
+              </a:rPr>
+              <a:t>§</a:t>
+            </a:r>
+          </a:p>
+        </p:txBody>
+      </p:sp>
+      <p:sp>
+        <p:nvSpPr>
+          <p:cNvPr id="13" name="TextBox 12"/>
+          <p:cNvSpPr txBox="1"/>
+          <p:nvPr/>
+        </p:nvSpPr>
+        <p:spPr>
+          <a:xfrm>
+            <a:off x="1371600" y="2926080"/>
+            <a:ext cx="4358487" cy="777240"/>
+          </a:xfrm>
+          <a:prstGeom prst="rect">
+            <a:avLst/>
+          </a:prstGeom>
+          <a:noFill/>
+        </p:spPr>
+        <p:txBody>
+          <a:bodyPr wrap="square" anchor="ctr" lIns="0" rIns="0" tIns="0" bIns="0">
+            <a:spAutoFit/>
+          </a:bodyPr>
+          <a:lstStyle/>
+          <a:p>
+            <a:pPr algn="l"/>
+            <a:r>
+              <a:rPr sz="1400" b="0">
+                <a:solidFill>
+                  <a:srgbClr val="222B33"/>
+                </a:solidFill>
+                <a:latin typeface="Microsoft YaHei"/>
+              </a:rPr>
+              <a:t>《中华人民共和国安全生产法》（风险分级管控和隐患排查治理，以现行文本为准）</a:t>
+            </a:r>
+          </a:p>
+        </p:txBody>
+      </p:sp>
+      <p:sp>
+        <p:nvSpPr>
+          <p:cNvPr id="14" name="Rounded Rectangle 13"/>
+          <p:cNvSpPr/>
+          <p:nvPr/>
+        </p:nvSpPr>
+        <p:spPr>
+          <a:xfrm>
+            <a:off x="6278727" y="2834640"/>
+            <a:ext cx="5364327" cy="960120"/>
+          </a:xfrm>
+          <a:prstGeom prst="roundRect">
+            <a:avLst>
+              <a:gd name="adj" fmla="val 8000"/>
+            </a:avLst>
+          </a:prstGeom>
+          <a:solidFill>
+            <a:srgbClr val="EEF4F7"/>
+          </a:solidFill>
+          <a:ln>
+            <a:noFill/>
+          </a:ln>
+          <a:effectLst/>
+        </p:spPr>
+        <p:style>
+          <a:lnRef idx="1">
+            <a:schemeClr val="accent1"/>
+          </a:lnRef>
+          <a:fillRef idx="3">
+            <a:schemeClr val="accent1"/>
+          </a:fillRef>
+          <a:effectRef idx="2">
+            <a:schemeClr val="accent1"/>
+          </a:effectRef>
+          <a:fontRef idx="minor">
+            <a:schemeClr val="lt1"/>
+          </a:fontRef>
+        </p:style>
+        <p:txBody>
+          <a:bodyPr rtlCol="0" anchor="ctr"/>
+          <a:lstStyle/>
+          <a:p>
+            <a:pPr algn="ctr"/>
+          </a:p>
+        </p:txBody>
+      </p:sp>
+      <p:sp>
+        <p:nvSpPr>
+          <p:cNvPr id="15" name="Oval 14"/>
+          <p:cNvSpPr/>
+          <p:nvPr/>
+        </p:nvSpPr>
+        <p:spPr>
+          <a:xfrm>
+            <a:off x="6461607" y="3086100"/>
+            <a:ext cx="457200" cy="457200"/>
+          </a:xfrm>
+          <a:prstGeom prst="ellipse">
+            <a:avLst/>
+          </a:prstGeom>
+          <a:solidFill>
+            <a:srgbClr val="0B3C5D"/>
+          </a:solidFill>
+          <a:ln>
+            <a:noFill/>
+          </a:ln>
+          <a:effectLst/>
+        </p:spPr>
+        <p:style>
+          <a:lnRef idx="1">
+            <a:schemeClr val="accent1"/>
+          </a:lnRef>
+          <a:fillRef idx="3">
+            <a:schemeClr val="accent1"/>
+          </a:fillRef>
+          <a:effectRef idx="2">
+            <a:schemeClr val="accent1"/>
+          </a:effectRef>
+          <a:fontRef idx="minor">
+            <a:schemeClr val="lt1"/>
+          </a:fontRef>
+        </p:style>
+        <p:txBody>
+          <a:bodyPr rtlCol="0" anchor="ctr" lIns="0" rIns="0" tIns="0" bIns="0"/>
+          <a:lstStyle/>
+          <a:p>
+            <a:pPr algn="ctr"/>
+            <a:r>
+              <a:rPr sz="1600" b="1">
+                <a:solidFill>
+                  <a:srgbClr val="FFFFFF"/>
+                </a:solidFill>
+                <a:latin typeface="Microsoft YaHei"/>
+              </a:rPr>
+              <a:t>§</a:t>
+            </a:r>
+          </a:p>
+        </p:txBody>
+      </p:sp>
+      <p:sp>
+        <p:nvSpPr>
+          <p:cNvPr id="16" name="TextBox 15"/>
+          <p:cNvSpPr txBox="1"/>
+          <p:nvPr/>
+        </p:nvSpPr>
+        <p:spPr>
+          <a:xfrm>
+            <a:off x="7101687" y="2926080"/>
+            <a:ext cx="4358487" cy="777240"/>
+          </a:xfrm>
+          <a:prstGeom prst="rect">
+            <a:avLst/>
+          </a:prstGeom>
+          <a:noFill/>
+        </p:spPr>
+        <p:txBody>
+          <a:bodyPr wrap="square" anchor="ctr" lIns="0" rIns="0" tIns="0" bIns="0">
+            <a:spAutoFit/>
+          </a:bodyPr>
+          <a:lstStyle/>
+          <a:p>
+            <a:pPr algn="l"/>
+            <a:r>
+              <a:rPr sz="1400" b="0">
+                <a:solidFill>
+                  <a:srgbClr val="222B33"/>
+                </a:solidFill>
+                <a:latin typeface="Microsoft YaHei"/>
+              </a:rPr>
+              <a:t>《中华人民共和国危险化学品安全法》（2026 年 5 月 1 日起施行）及《危险化学品安全管理条例》（以现行文本为准）：化学品安全技术说明书和安全标签</a:t>
+            </a:r>
+          </a:p>
+        </p:txBody>
+      </p:sp>
+      <p:sp>
+        <p:nvSpPr>
+          <p:cNvPr id="17" name="Rounded Rectangle 16"/>
+          <p:cNvSpPr/>
+          <p:nvPr/>
+        </p:nvSpPr>
+        <p:spPr>
+          <a:xfrm>
+            <a:off x="548640" y="3931920"/>
+            <a:ext cx="5364327" cy="960120"/>
+          </a:xfrm>
+          <a:prstGeom prst="roundRect">
+            <a:avLst>
+              <a:gd name="adj" fmla="val 8000"/>
+            </a:avLst>
+          </a:prstGeom>
+          <a:solidFill>
+            <a:srgbClr val="EEF4F7"/>
+          </a:solidFill>
+          <a:ln>
+            <a:noFill/>
+          </a:ln>
+          <a:effectLst/>
+        </p:spPr>
+        <p:style>
+          <a:lnRef idx="1">
+            <a:schemeClr val="accent1"/>
+          </a:lnRef>
+          <a:fillRef idx="3">
+            <a:schemeClr val="accent1"/>
+          </a:fillRef>
+          <a:effectRef idx="2">
+            <a:schemeClr val="accent1"/>
+          </a:effectRef>
+          <a:fontRef idx="minor">
+            <a:schemeClr val="lt1"/>
+          </a:fontRef>
+        </p:style>
+        <p:txBody>
+          <a:bodyPr rtlCol="0" anchor="ctr"/>
+          <a:lstStyle/>
+          <a:p>
+            <a:pPr algn="ctr"/>
+          </a:p>
+        </p:txBody>
+      </p:sp>
+      <p:sp>
+        <p:nvSpPr>
+          <p:cNvPr id="18" name="Oval 17"/>
+          <p:cNvSpPr/>
+          <p:nvPr/>
+        </p:nvSpPr>
+        <p:spPr>
+          <a:xfrm>
+            <a:off x="731520" y="4183380"/>
+            <a:ext cx="457200" cy="457200"/>
+          </a:xfrm>
+          <a:prstGeom prst="ellipse">
+            <a:avLst/>
+          </a:prstGeom>
+          <a:solidFill>
+            <a:srgbClr val="0B3C5D"/>
+          </a:solidFill>
+          <a:ln>
+            <a:noFill/>
+          </a:ln>
+          <a:effectLst/>
+        </p:spPr>
+        <p:style>
+          <a:lnRef idx="1">
+            <a:schemeClr val="accent1"/>
+          </a:lnRef>
+          <a:fillRef idx="3">
+            <a:schemeClr val="accent1"/>
+          </a:fillRef>
+          <a:effectRef idx="2">
+            <a:schemeClr val="accent1"/>
+          </a:effectRef>
+          <a:fontRef idx="minor">
+            <a:schemeClr val="lt1"/>
+          </a:fontRef>
+        </p:style>
+        <p:txBody>
+          <a:bodyPr rtlCol="0" anchor="ctr" lIns="0" rIns="0" tIns="0" bIns="0"/>
+          <a:lstStyle/>
+          <a:p>
+            <a:pPr algn="ctr"/>
+            <a:r>
+              <a:rPr sz="1600" b="1">
+                <a:solidFill>
+                  <a:srgbClr val="FFFFFF"/>
+                </a:solidFill>
+                <a:latin typeface="Microsoft YaHei"/>
+              </a:rPr>
+              <a:t>§</a:t>
+            </a:r>
+          </a:p>
+        </p:txBody>
+      </p:sp>
+      <p:sp>
+        <p:nvSpPr>
+          <p:cNvPr id="19" name="TextBox 18"/>
+          <p:cNvSpPr txBox="1"/>
+          <p:nvPr/>
+        </p:nvSpPr>
+        <p:spPr>
+          <a:xfrm>
+            <a:off x="1371600" y="4023360"/>
+            <a:ext cx="4358487" cy="777240"/>
+          </a:xfrm>
+          <a:prstGeom prst="rect">
+            <a:avLst/>
+          </a:prstGeom>
+          <a:noFill/>
+        </p:spPr>
+        <p:txBody>
+          <a:bodyPr wrap="square" anchor="ctr" lIns="0" rIns="0" tIns="0" bIns="0">
+            <a:spAutoFit/>
+          </a:bodyPr>
+          <a:lstStyle/>
+          <a:p>
+            <a:pPr algn="l"/>
+            <a:r>
+              <a:rPr sz="1400" b="0">
+                <a:solidFill>
+                  <a:srgbClr val="222B33"/>
+                </a:solidFill>
+                <a:latin typeface="Microsoft YaHei"/>
+              </a:rPr>
+              <a:t>GB 2894-2025（以现行文本为准）《安全色和安全标志》：信息牌上的安全标志</a:t>
+            </a:r>
+          </a:p>
+        </p:txBody>
+      </p:sp>
+      <p:sp>
+        <p:nvSpPr>
+          <p:cNvPr id="20" name="Rounded Rectangle 19"/>
+          <p:cNvSpPr/>
+          <p:nvPr/>
+        </p:nvSpPr>
+        <p:spPr>
+          <a:xfrm>
+            <a:off x="6278727" y="3931920"/>
+            <a:ext cx="5364327" cy="960120"/>
+          </a:xfrm>
+          <a:prstGeom prst="roundRect">
+            <a:avLst>
+              <a:gd name="adj" fmla="val 8000"/>
+            </a:avLst>
+          </a:prstGeom>
+          <a:solidFill>
+            <a:srgbClr val="EEF4F7"/>
+          </a:solidFill>
+          <a:ln>
+            <a:noFill/>
+          </a:ln>
+          <a:effectLst/>
+        </p:spPr>
+        <p:style>
+          <a:lnRef idx="1">
+            <a:schemeClr val="accent1"/>
+          </a:lnRef>
+          <a:fillRef idx="3">
+            <a:schemeClr val="accent1"/>
+          </a:fillRef>
+          <a:effectRef idx="2">
+            <a:schemeClr val="accent1"/>
+          </a:effectRef>
+          <a:fontRef idx="minor">
+            <a:schemeClr val="lt1"/>
+          </a:fontRef>
+        </p:style>
+        <p:txBody>
+          <a:bodyPr rtlCol="0" anchor="ctr"/>
+          <a:lstStyle/>
+          <a:p>
+            <a:pPr algn="ctr"/>
+          </a:p>
+        </p:txBody>
+      </p:sp>
+      <p:sp>
+        <p:nvSpPr>
+          <p:cNvPr id="21" name="Oval 20"/>
+          <p:cNvSpPr/>
+          <p:nvPr/>
+        </p:nvSpPr>
+        <p:spPr>
+          <a:xfrm>
+            <a:off x="6461607" y="4183380"/>
+            <a:ext cx="457200" cy="457200"/>
+          </a:xfrm>
+          <a:prstGeom prst="ellipse">
+            <a:avLst/>
+          </a:prstGeom>
+          <a:solidFill>
+            <a:srgbClr val="0B3C5D"/>
+          </a:solidFill>
+          <a:ln>
+            <a:noFill/>
+          </a:ln>
+          <a:effectLst/>
+        </p:spPr>
+        <p:style>
+          <a:lnRef idx="1">
+            <a:schemeClr val="accent1"/>
+          </a:lnRef>
+          <a:fillRef idx="3">
+            <a:schemeClr val="accent1"/>
+          </a:fillRef>
+          <a:effectRef idx="2">
+            <a:schemeClr val="accent1"/>
+          </a:effectRef>
+          <a:fontRef idx="minor">
+            <a:schemeClr val="lt1"/>
+          </a:fontRef>
+        </p:style>
+        <p:txBody>
+          <a:bodyPr rtlCol="0" anchor="ctr" lIns="0" rIns="0" tIns="0" bIns="0"/>
+          <a:lstStyle/>
+          <a:p>
+            <a:pPr algn="ctr"/>
+            <a:r>
+              <a:rPr sz="1600" b="1">
+                <a:solidFill>
+                  <a:srgbClr val="FFFFFF"/>
+                </a:solidFill>
+                <a:latin typeface="Microsoft YaHei"/>
+              </a:rPr>
+              <a:t>§</a:t>
+            </a:r>
+          </a:p>
+        </p:txBody>
+      </p:sp>
+      <p:sp>
+        <p:nvSpPr>
+          <p:cNvPr id="22" name="TextBox 21"/>
+          <p:cNvSpPr txBox="1"/>
+          <p:nvPr/>
+        </p:nvSpPr>
+        <p:spPr>
+          <a:xfrm>
+            <a:off x="7101687" y="4023360"/>
+            <a:ext cx="4358487" cy="777240"/>
+          </a:xfrm>
+          <a:prstGeom prst="rect">
+            <a:avLst/>
+          </a:prstGeom>
+          <a:noFill/>
+        </p:spPr>
+        <p:txBody>
+          <a:bodyPr wrap="square" anchor="ctr" lIns="0" rIns="0" tIns="0" bIns="0">
+            <a:spAutoFit/>
+          </a:bodyPr>
+          <a:lstStyle/>
+          <a:p>
+            <a:pPr algn="l"/>
+            <a:r>
+              <a:rPr sz="1400" b="0">
+                <a:solidFill>
+                  <a:srgbClr val="222B33"/>
+                </a:solidFill>
+                <a:latin typeface="Microsoft YaHei"/>
+              </a:rPr>
+              <a:t>本校实验室安全管理办法、分级分类管理规定（以本校规定为准）</a:t>
+            </a:r>
+          </a:p>
+        </p:txBody>
+      </p:sp>
+    </p:spTree>
+  </p:cSld>
+  <p:clrMapOvr>
+    <a:masterClrMapping/>
+  </p:clrMapOvr>
+</p:sld>
+</file>
+
+<file path=ppt/slides/slide37.xml><?xml version="1.0" encoding="utf-8"?>
+<p:sld xmlns:a="http://schemas.openxmlformats.org/drawingml/2006/main" xmlns:p="http://schemas.openxmlformats.org/presentationml/2006/main" xmlns:r="http://schemas.openxmlformats.org/officeDocument/2006/relationships">
+  <p:cSld>
+    <p:bg>
+      <p:bgPr>
+        <a:solidFill>
+          <a:srgbClr val="FFFFFF"/>
+        </a:solidFill>
+        <a:effectLst/>
+      </p:bgPr>
+    </p:bg>
+    <p:spTree>
+      <p:nvGrpSpPr>
+        <p:cNvPr id="1" name=""/>
+        <p:cNvGrpSpPr/>
+        <p:nvPr/>
+      </p:nvGrpSpPr>
+      <p:grpSpPr/>
+      <p:sp>
+        <p:nvSpPr>
+          <p:cNvPr id="2" name="TextBox 1"/>
+          <p:cNvSpPr txBox="1"/>
+          <p:nvPr/>
+        </p:nvSpPr>
+        <p:spPr>
+          <a:xfrm>
+            <a:off x="548640" y="320040"/>
+            <a:ext cx="8229600" cy="320040"/>
+          </a:xfrm>
+          <a:prstGeom prst="rect">
+            <a:avLst/>
+          </a:prstGeom>
+          <a:noFill/>
+        </p:spPr>
+        <p:txBody>
+          <a:bodyPr wrap="square" anchor="t" lIns="0" rIns="0" tIns="0" bIns="0">
+            <a:spAutoFit/>
+          </a:bodyPr>
+          <a:lstStyle/>
+          <a:p>
+            <a:pPr algn="l"/>
+            <a:r>
+              <a:rPr sz="1200" b="1">
+                <a:solidFill>
+                  <a:srgbClr val="1D7A8C"/>
+                </a:solidFill>
+                <a:latin typeface="Microsoft YaHei"/>
+              </a:rPr>
+              <a:t>003 · 高校实验室安全规范与检查</a:t>
+            </a:r>
+          </a:p>
+        </p:txBody>
+      </p:sp>
+      <p:sp>
+        <p:nvSpPr>
+          <p:cNvPr id="3" name="TextBox 2"/>
+          <p:cNvSpPr txBox="1"/>
+          <p:nvPr/>
+        </p:nvSpPr>
+        <p:spPr>
+          <a:xfrm>
+            <a:off x="548640" y="640080"/>
+            <a:ext cx="11094415" cy="731520"/>
+          </a:xfrm>
+          <a:prstGeom prst="rect">
+            <a:avLst/>
+          </a:prstGeom>
+          <a:noFill/>
+        </p:spPr>
+        <p:txBody>
+          <a:bodyPr wrap="square" anchor="t" lIns="0" rIns="0" tIns="0" bIns="0">
+            <a:spAutoFit/>
+          </a:bodyPr>
+          <a:lstStyle/>
+          <a:p>
+            <a:pPr algn="l"/>
+            <a:r>
+              <a:rPr sz="3000" b="1">
+                <a:solidFill>
+                  <a:srgbClr val="0B3C5D"/>
+                </a:solidFill>
+                <a:latin typeface="Microsoft YaHei"/>
+              </a:rPr>
+              <a:t>《高等学校实验室安全规范》是什么</a:t>
+            </a:r>
+          </a:p>
+        </p:txBody>
+      </p:sp>
+      <p:sp>
+        <p:nvSpPr>
+          <p:cNvPr id="4" name="TextBox 3"/>
+          <p:cNvSpPr txBox="1"/>
+          <p:nvPr/>
+        </p:nvSpPr>
+        <p:spPr>
+          <a:xfrm>
+            <a:off x="548640" y="6446520"/>
+            <a:ext cx="7315200" cy="274320"/>
+          </a:xfrm>
+          <a:prstGeom prst="rect">
+            <a:avLst/>
+          </a:prstGeom>
+          <a:noFill/>
+        </p:spPr>
+        <p:txBody>
+          <a:bodyPr wrap="square" anchor="t" lIns="0" rIns="0" tIns="0" bIns="0">
+            <a:spAutoFit/>
+          </a:bodyPr>
+          <a:lstStyle/>
+          <a:p>
+            <a:pPr algn="l"/>
+            <a:r>
+              <a:rPr sz="1000" b="0">
+                <a:solidFill>
+                  <a:srgbClr val="5F6B75"/>
+                </a:solidFill>
+                <a:latin typeface="Microsoft YaHei"/>
+              </a:rPr>
+              <a:t>《高校实验室安全》 003 高校实验室安全规范与检查</a:t>
+            </a:r>
+          </a:p>
+        </p:txBody>
+      </p:sp>
+      <p:sp>
+        <p:nvSpPr>
+          <p:cNvPr id="5" name="Oval 4"/>
+          <p:cNvSpPr/>
+          <p:nvPr/>
+        </p:nvSpPr>
+        <p:spPr>
+          <a:xfrm>
+            <a:off x="10820095" y="411480"/>
+            <a:ext cx="822960" cy="822960"/>
+          </a:xfrm>
+          <a:prstGeom prst="ellipse">
+            <a:avLst/>
+          </a:prstGeom>
+          <a:solidFill>
+            <a:srgbClr val="F28C28"/>
+          </a:solidFill>
+          <a:ln>
+            <a:noFill/>
+          </a:ln>
+          <a:effectLst/>
+        </p:spPr>
+        <p:style>
+          <a:lnRef idx="1">
+            <a:schemeClr val="accent1"/>
+          </a:lnRef>
+          <a:fillRef idx="3">
+            <a:schemeClr val="accent1"/>
+          </a:fillRef>
+          <a:effectRef idx="2">
+            <a:schemeClr val="accent1"/>
+          </a:effectRef>
+          <a:fontRef idx="minor">
+            <a:schemeClr val="lt1"/>
+          </a:fontRef>
+        </p:style>
+        <p:txBody>
+          <a:bodyPr rtlCol="0" anchor="ctr" lIns="0" rIns="0" tIns="0" bIns="0"/>
+          <a:lstStyle/>
+          <a:p>
+            <a:pPr algn="ctr"/>
+            <a:r>
+              <a:rPr sz="1800" b="1">
+                <a:solidFill>
+                  <a:srgbClr val="FFFFFF"/>
+                </a:solidFill>
+                <a:latin typeface="Microsoft YaHei"/>
+              </a:rPr>
+              <a:t>S1</a:t>
+            </a:r>
+          </a:p>
+        </p:txBody>
+      </p:sp>
+      <p:sp>
+        <p:nvSpPr>
+          <p:cNvPr id="6" name="Rounded Rectangle 5"/>
+          <p:cNvSpPr/>
+          <p:nvPr/>
+        </p:nvSpPr>
+        <p:spPr>
+          <a:xfrm>
+            <a:off x="548640" y="1645920"/>
+            <a:ext cx="6656649" cy="4389120"/>
+          </a:xfrm>
+          <a:prstGeom prst="roundRect">
+            <a:avLst>
+              <a:gd name="adj" fmla="val 8000"/>
+            </a:avLst>
+          </a:prstGeom>
+          <a:solidFill>
+            <a:srgbClr val="EEF4F7"/>
+          </a:solidFill>
+          <a:ln>
+            <a:noFill/>
+          </a:ln>
+          <a:effectLst/>
+        </p:spPr>
+        <p:style>
+          <a:lnRef idx="1">
+            <a:schemeClr val="accent1"/>
+          </a:lnRef>
+          <a:fillRef idx="3">
+            <a:schemeClr val="accent1"/>
+          </a:fillRef>
+          <a:effectRef idx="2">
+            <a:schemeClr val="accent1"/>
+          </a:effectRef>
+          <a:fontRef idx="minor">
+            <a:schemeClr val="lt1"/>
+          </a:fontRef>
+        </p:style>
+        <p:txBody>
+          <a:bodyPr rtlCol="0" anchor="ctr"/>
+          <a:lstStyle/>
+          <a:p>
+            <a:pPr algn="ctr"/>
+          </a:p>
+        </p:txBody>
+      </p:sp>
+      <p:sp>
+        <p:nvSpPr>
+          <p:cNvPr id="7" name="TextBox 6"/>
+          <p:cNvSpPr txBox="1"/>
+          <p:nvPr/>
+        </p:nvSpPr>
+        <p:spPr>
+          <a:xfrm>
+            <a:off x="914400" y="1874519"/>
+            <a:ext cx="2743200" cy="365760"/>
+          </a:xfrm>
+          <a:prstGeom prst="rect">
+            <a:avLst/>
+          </a:prstGeom>
+          <a:noFill/>
+        </p:spPr>
+        <p:txBody>
+          <a:bodyPr wrap="square" anchor="t" lIns="0" rIns="0" tIns="0" bIns="0">
+            <a:spAutoFit/>
+          </a:bodyPr>
+          <a:lstStyle/>
+          <a:p>
+            <a:pPr algn="l"/>
+            <a:r>
+              <a:rPr sz="1600" b="1">
+                <a:solidFill>
+                  <a:srgbClr val="1D7A8C"/>
+                </a:solidFill>
+                <a:latin typeface="Microsoft YaHei"/>
+              </a:rPr>
+              <a:t>要点</a:t>
+            </a:r>
+          </a:p>
+        </p:txBody>
+      </p:sp>
+      <p:sp>
+        <p:nvSpPr>
+          <p:cNvPr id="8" name="TextBox 7"/>
+          <p:cNvSpPr txBox="1"/>
+          <p:nvPr/>
+        </p:nvSpPr>
+        <p:spPr>
+          <a:xfrm>
+            <a:off x="914400" y="2377440"/>
+            <a:ext cx="5925129" cy="2267712"/>
+          </a:xfrm>
+          <a:prstGeom prst="rect">
+            <a:avLst/>
+          </a:prstGeom>
+          <a:noFill/>
+        </p:spPr>
+        <p:txBody>
+          <a:bodyPr wrap="square" lIns="0" rIns="0" tIns="0" bIns="0">
+            <a:spAutoFit/>
+          </a:bodyPr>
+          <a:lstStyle/>
+          <a:p>
+            <a:pPr>
+              <a:spcAft>
+                <a:spcPts val="1000"/>
+              </a:spcAft>
+            </a:pPr>
+            <a:r>
+              <a:rPr sz="2000">
+                <a:solidFill>
+                  <a:srgbClr val="222B33"/>
+                </a:solidFill>
+                <a:latin typeface="Microsoft YaHei"/>
+              </a:rPr>
+              <a:t>▪ 教育部办公厅 2023 年印发（教科信厅函〔2023〕5 号）</a:t>
+            </a:r>
+          </a:p>
+          <a:p>
+            <a:pPr>
+              <a:spcAft>
+                <a:spcPts val="1000"/>
+              </a:spcAft>
+            </a:pPr>
+            <a:r>
+              <a:rPr sz="2000">
+                <a:solidFill>
+                  <a:srgbClr val="222B33"/>
+                </a:solidFill>
+                <a:latin typeface="Microsoft YaHei"/>
+              </a:rPr>
+              <a:t>▪ 适用于高校各类教学、科研实验室</a:t>
+            </a:r>
+          </a:p>
+          <a:p>
+            <a:pPr>
+              <a:spcAft>
+                <a:spcPts val="1000"/>
+              </a:spcAft>
+            </a:pPr>
+            <a:r>
+              <a:rPr sz="2000">
+                <a:solidFill>
+                  <a:srgbClr val="222B33"/>
+                </a:solidFill>
+                <a:latin typeface="Microsoft YaHei"/>
+              </a:rPr>
+              <a:t>▪ 把法律法规要求落到高校日常管理</a:t>
+            </a:r>
+          </a:p>
+          <a:p>
+            <a:pPr>
+              <a:spcAft>
+                <a:spcPts val="1000"/>
+              </a:spcAft>
+            </a:pPr>
+            <a:r>
+              <a:rPr sz="2000">
+                <a:solidFill>
+                  <a:srgbClr val="222B33"/>
+                </a:solidFill>
+                <a:latin typeface="Microsoft YaHei"/>
+              </a:rPr>
+              <a:t>▪ 学校据此制定本校制度，以现行文本为准</a:t>
+            </a:r>
+          </a:p>
+        </p:txBody>
+      </p:sp>
+      <p:sp>
+        <p:nvSpPr>
+          <p:cNvPr id="9" name="TextBox 8"/>
+          <p:cNvSpPr txBox="1"/>
+          <p:nvPr/>
+        </p:nvSpPr>
+        <p:spPr>
+          <a:xfrm>
+            <a:off x="914400" y="4782312"/>
+            <a:ext cx="5925129" cy="320040"/>
+          </a:xfrm>
+          <a:prstGeom prst="rect">
+            <a:avLst/>
+          </a:prstGeom>
+          <a:noFill/>
+        </p:spPr>
+        <p:txBody>
+          <a:bodyPr wrap="square" anchor="t" lIns="0" rIns="0" tIns="0" bIns="0">
+            <a:spAutoFit/>
+          </a:bodyPr>
+          <a:lstStyle/>
+          <a:p>
+            <a:pPr algn="l"/>
+            <a:r>
+              <a:rPr sz="1300" b="1">
+                <a:solidFill>
+                  <a:srgbClr val="1D7A8C"/>
+                </a:solidFill>
+                <a:latin typeface="Microsoft YaHei"/>
+              </a:rPr>
+              <a:t>说明</a:t>
+            </a:r>
+          </a:p>
+        </p:txBody>
+      </p:sp>
+      <p:sp>
+        <p:nvSpPr>
+          <p:cNvPr id="10" name="TextBox 9"/>
+          <p:cNvSpPr txBox="1"/>
+          <p:nvPr/>
+        </p:nvSpPr>
+        <p:spPr>
+          <a:xfrm>
+            <a:off x="914400" y="5148072"/>
+            <a:ext cx="5925129" cy="612648"/>
+          </a:xfrm>
+          <a:prstGeom prst="rect">
+            <a:avLst/>
+          </a:prstGeom>
+          <a:noFill/>
+        </p:spPr>
+        <p:txBody>
+          <a:bodyPr wrap="square" anchor="t" lIns="0" rIns="0" tIns="0" bIns="0">
+            <a:spAutoFit/>
+          </a:bodyPr>
+          <a:lstStyle/>
+          <a:p>
+            <a:pPr algn="l"/>
+            <a:r>
+              <a:rPr sz="1400" b="0">
+                <a:solidFill>
+                  <a:srgbClr val="5F6B75"/>
+                </a:solidFill>
+                <a:latin typeface="Microsoft YaHei"/>
+              </a:rPr>
+              <a:t>《高等学校实验室安全规范》由教育部办公厅于 2023 年印发（教科信厅函〔2023〕5 号），是针对高校实验室安全工作的专门规范性文件。它以安全生产、消防、危险化学品、生物安全、辐射安全等法律法规为基础，结合高校实验……</a:t>
+            </a:r>
+          </a:p>
+        </p:txBody>
+      </p:sp>
+      <p:sp>
+        <p:nvSpPr>
+          <p:cNvPr id="11" name="Rounded Rectangle 10"/>
+          <p:cNvSpPr/>
+          <p:nvPr/>
+        </p:nvSpPr>
+        <p:spPr>
+          <a:xfrm>
+            <a:off x="7571049" y="1645920"/>
+            <a:ext cx="4072006" cy="4389120"/>
+          </a:xfrm>
+          <a:prstGeom prst="roundRect">
+            <a:avLst>
+              <a:gd name="adj" fmla="val 8000"/>
+            </a:avLst>
+          </a:prstGeom>
+          <a:solidFill>
+            <a:srgbClr val="FBECEA"/>
+          </a:solidFill>
+          <a:ln>
+            <a:noFill/>
+          </a:ln>
+          <a:effectLst/>
+        </p:spPr>
+        <p:style>
+          <a:lnRef idx="1">
+            <a:schemeClr val="accent1"/>
+          </a:lnRef>
+          <a:fillRef idx="3">
+            <a:schemeClr val="accent1"/>
+          </a:fillRef>
+          <a:effectRef idx="2">
+            <a:schemeClr val="accent1"/>
+          </a:effectRef>
+          <a:fontRef idx="minor">
+            <a:schemeClr val="lt1"/>
+          </a:fontRef>
+        </p:style>
+        <p:txBody>
+          <a:bodyPr rtlCol="0" anchor="ctr"/>
+          <a:lstStyle/>
+          <a:p>
+            <a:pPr algn="ctr"/>
+          </a:p>
+        </p:txBody>
+      </p:sp>
+      <p:sp>
+        <p:nvSpPr>
+          <p:cNvPr id="12" name="Oval 11"/>
+          <p:cNvSpPr/>
+          <p:nvPr/>
+        </p:nvSpPr>
+        <p:spPr>
+          <a:xfrm>
+            <a:off x="7936809" y="1828800"/>
+            <a:ext cx="457200" cy="457200"/>
+          </a:xfrm>
+          <a:prstGeom prst="ellipse">
+            <a:avLst/>
+          </a:prstGeom>
+          <a:solidFill>
+            <a:srgbClr val="C0392B"/>
+          </a:solidFill>
+          <a:ln>
+            <a:noFill/>
+          </a:ln>
+          <a:effectLst/>
+        </p:spPr>
+        <p:style>
+          <a:lnRef idx="1">
+            <a:schemeClr val="accent1"/>
+          </a:lnRef>
+          <a:fillRef idx="3">
+            <a:schemeClr val="accent1"/>
+          </a:fillRef>
+          <a:effectRef idx="2">
+            <a:schemeClr val="accent1"/>
+          </a:effectRef>
+          <a:fontRef idx="minor">
+            <a:schemeClr val="lt1"/>
+          </a:fontRef>
+        </p:style>
+        <p:txBody>
+          <a:bodyPr rtlCol="0" anchor="ctr" lIns="0" rIns="0" tIns="0" bIns="0"/>
+          <a:lstStyle/>
+          <a:p>
+            <a:pPr algn="ctr"/>
+            <a:r>
+              <a:rPr sz="1600" b="1">
+                <a:solidFill>
+                  <a:srgbClr val="FFFFFF"/>
+                </a:solidFill>
+                <a:latin typeface="Microsoft YaHei"/>
+              </a:rPr>
+              <a:t>✕</a:t>
+            </a:r>
+          </a:p>
+        </p:txBody>
+      </p:sp>
+      <p:sp>
+        <p:nvSpPr>
+          <p:cNvPr id="13" name="TextBox 12"/>
+          <p:cNvSpPr txBox="1"/>
+          <p:nvPr/>
+        </p:nvSpPr>
+        <p:spPr>
+          <a:xfrm>
+            <a:off x="8531169" y="1874519"/>
+            <a:ext cx="2791846" cy="365760"/>
+          </a:xfrm>
+          <a:prstGeom prst="rect">
+            <a:avLst/>
+          </a:prstGeom>
+          <a:noFill/>
+        </p:spPr>
+        <p:txBody>
+          <a:bodyPr wrap="square" anchor="t" lIns="0" rIns="0" tIns="0" bIns="0">
+            <a:spAutoFit/>
+          </a:bodyPr>
+          <a:lstStyle/>
+          <a:p>
+            <a:pPr algn="l"/>
+            <a:r>
+              <a:rPr sz="1600" b="1">
+                <a:solidFill>
+                  <a:srgbClr val="C0392B"/>
+                </a:solidFill>
+                <a:latin typeface="Microsoft YaHei"/>
+              </a:rPr>
+              <a:t>常见错误</a:t>
+            </a:r>
+          </a:p>
+        </p:txBody>
+      </p:sp>
+      <p:sp>
+        <p:nvSpPr>
+          <p:cNvPr id="14" name="TextBox 13"/>
+          <p:cNvSpPr txBox="1"/>
+          <p:nvPr/>
+        </p:nvSpPr>
+        <p:spPr>
+          <a:xfrm>
+            <a:off x="7936809" y="2514600"/>
+            <a:ext cx="3340486" cy="3291840"/>
+          </a:xfrm>
+          <a:prstGeom prst="rect">
+            <a:avLst/>
+          </a:prstGeom>
+          <a:noFill/>
+        </p:spPr>
+        <p:txBody>
+          <a:bodyPr wrap="square" lIns="0" rIns="0" tIns="0" bIns="0">
+            <a:spAutoFit/>
+          </a:bodyPr>
+          <a:lstStyle/>
+          <a:p>
+            <a:pPr>
+              <a:spcAft>
+                <a:spcPts val="1000"/>
+              </a:spcAft>
+            </a:pPr>
+            <a:r>
+              <a:rPr sz="1500">
+                <a:solidFill>
+                  <a:srgbClr val="222B33"/>
+                </a:solidFill>
+                <a:latin typeface="Microsoft YaHei"/>
+              </a:rPr>
+              <a:t>▪ 认为规范只是管理部门的文件，与学生无关</a:t>
+            </a:r>
+          </a:p>
+        </p:txBody>
+      </p:sp>
+    </p:spTree>
+  </p:cSld>
+  <p:clrMapOvr>
+    <a:masterClrMapping/>
+  </p:clrMapOvr>
+</p:sld>
+</file>
+
+<file path=ppt/slides/slide38.xml><?xml version="1.0" encoding="utf-8"?>
+<p:sld xmlns:a="http://schemas.openxmlformats.org/drawingml/2006/main" xmlns:p="http://schemas.openxmlformats.org/presentationml/2006/main" xmlns:r="http://schemas.openxmlformats.org/officeDocument/2006/relationships">
+  <p:cSld>
+    <p:bg>
+      <p:bgPr>
+        <a:solidFill>
+          <a:srgbClr val="FFFFFF"/>
+        </a:solidFill>
+        <a:effectLst/>
+      </p:bgPr>
+    </p:bg>
+    <p:spTree>
+      <p:nvGrpSpPr>
+        <p:cNvPr id="1" name=""/>
+        <p:cNvGrpSpPr/>
+        <p:nvPr/>
+      </p:nvGrpSpPr>
+      <p:grpSpPr/>
+      <p:sp>
+        <p:nvSpPr>
+          <p:cNvPr id="2" name="TextBox 1"/>
+          <p:cNvSpPr txBox="1"/>
+          <p:nvPr/>
+        </p:nvSpPr>
+        <p:spPr>
+          <a:xfrm>
+            <a:off x="548640" y="320040"/>
+            <a:ext cx="8229600" cy="320040"/>
+          </a:xfrm>
+          <a:prstGeom prst="rect">
+            <a:avLst/>
+          </a:prstGeom>
+          <a:noFill/>
+        </p:spPr>
+        <p:txBody>
+          <a:bodyPr wrap="square" anchor="t" lIns="0" rIns="0" tIns="0" bIns="0">
+            <a:spAutoFit/>
+          </a:bodyPr>
+          <a:lstStyle/>
+          <a:p>
+            <a:pPr algn="l"/>
+            <a:r>
+              <a:rPr sz="1200" b="1">
+                <a:solidFill>
+                  <a:srgbClr val="1D7A8C"/>
+                </a:solidFill>
+                <a:latin typeface="Microsoft YaHei"/>
+              </a:rPr>
+              <a:t>003 · 高校实验室安全规范与检查</a:t>
+            </a:r>
+          </a:p>
+        </p:txBody>
+      </p:sp>
+      <p:sp>
+        <p:nvSpPr>
+          <p:cNvPr id="3" name="TextBox 2"/>
+          <p:cNvSpPr txBox="1"/>
+          <p:nvPr/>
+        </p:nvSpPr>
+        <p:spPr>
+          <a:xfrm>
+            <a:off x="548640" y="640080"/>
+            <a:ext cx="11094415" cy="731520"/>
+          </a:xfrm>
+          <a:prstGeom prst="rect">
+            <a:avLst/>
+          </a:prstGeom>
+          <a:noFill/>
+        </p:spPr>
+        <p:txBody>
+          <a:bodyPr wrap="square" anchor="t" lIns="0" rIns="0" tIns="0" bIns="0">
+            <a:spAutoFit/>
+          </a:bodyPr>
+          <a:lstStyle/>
+          <a:p>
+            <a:pPr algn="l"/>
+            <a:r>
+              <a:rPr sz="3000" b="1">
+                <a:solidFill>
+                  <a:srgbClr val="0B3C5D"/>
+                </a:solidFill>
+                <a:latin typeface="Microsoft YaHei"/>
+              </a:rPr>
+              <a:t>规范的主要要求</a:t>
+            </a:r>
+          </a:p>
+        </p:txBody>
+      </p:sp>
+      <p:sp>
+        <p:nvSpPr>
+          <p:cNvPr id="4" name="TextBox 3"/>
+          <p:cNvSpPr txBox="1"/>
+          <p:nvPr/>
+        </p:nvSpPr>
+        <p:spPr>
+          <a:xfrm>
+            <a:off x="548640" y="6446520"/>
+            <a:ext cx="7315200" cy="274320"/>
+          </a:xfrm>
+          <a:prstGeom prst="rect">
+            <a:avLst/>
+          </a:prstGeom>
+          <a:noFill/>
+        </p:spPr>
+        <p:txBody>
+          <a:bodyPr wrap="square" anchor="t" lIns="0" rIns="0" tIns="0" bIns="0">
+            <a:spAutoFit/>
+          </a:bodyPr>
+          <a:lstStyle/>
+          <a:p>
+            <a:pPr algn="l"/>
+            <a:r>
+              <a:rPr sz="1000" b="0">
+                <a:solidFill>
+                  <a:srgbClr val="5F6B75"/>
+                </a:solidFill>
+                <a:latin typeface="Microsoft YaHei"/>
+              </a:rPr>
+              <a:t>《高校实验室安全》 003 高校实验室安全规范与检查</a:t>
+            </a:r>
+          </a:p>
+        </p:txBody>
+      </p:sp>
+      <p:sp>
+        <p:nvSpPr>
+          <p:cNvPr id="5" name="Oval 4"/>
+          <p:cNvSpPr/>
+          <p:nvPr/>
+        </p:nvSpPr>
+        <p:spPr>
+          <a:xfrm>
+            <a:off x="10820095" y="411480"/>
+            <a:ext cx="822960" cy="822960"/>
+          </a:xfrm>
+          <a:prstGeom prst="ellipse">
+            <a:avLst/>
+          </a:prstGeom>
+          <a:solidFill>
+            <a:srgbClr val="F28C28"/>
+          </a:solidFill>
+          <a:ln>
+            <a:noFill/>
+          </a:ln>
+          <a:effectLst/>
+        </p:spPr>
+        <p:style>
+          <a:lnRef idx="1">
+            <a:schemeClr val="accent1"/>
+          </a:lnRef>
+          <a:fillRef idx="3">
+            <a:schemeClr val="accent1"/>
+          </a:fillRef>
+          <a:effectRef idx="2">
+            <a:schemeClr val="accent1"/>
+          </a:effectRef>
+          <a:fontRef idx="minor">
+            <a:schemeClr val="lt1"/>
+          </a:fontRef>
+        </p:style>
+        <p:txBody>
+          <a:bodyPr rtlCol="0" anchor="ctr" lIns="0" rIns="0" tIns="0" bIns="0"/>
+          <a:lstStyle/>
+          <a:p>
+            <a:pPr algn="ctr"/>
+            <a:r>
+              <a:rPr sz="1800" b="1">
+                <a:solidFill>
+                  <a:srgbClr val="FFFFFF"/>
+                </a:solidFill>
+                <a:latin typeface="Microsoft YaHei"/>
+              </a:rPr>
+              <a:t>S2</a:t>
+            </a:r>
+          </a:p>
+        </p:txBody>
+      </p:sp>
+      <p:sp>
+        <p:nvSpPr>
+          <p:cNvPr id="6" name="Rounded Rectangle 5"/>
+          <p:cNvSpPr/>
+          <p:nvPr/>
+        </p:nvSpPr>
+        <p:spPr>
+          <a:xfrm>
+            <a:off x="548640" y="1645920"/>
+            <a:ext cx="6656649" cy="4389120"/>
+          </a:xfrm>
+          <a:prstGeom prst="roundRect">
+            <a:avLst>
+              <a:gd name="adj" fmla="val 8000"/>
+            </a:avLst>
+          </a:prstGeom>
+          <a:solidFill>
+            <a:srgbClr val="EEF4F7"/>
+          </a:solidFill>
+          <a:ln>
+            <a:noFill/>
+          </a:ln>
+          <a:effectLst/>
+        </p:spPr>
+        <p:style>
+          <a:lnRef idx="1">
+            <a:schemeClr val="accent1"/>
+          </a:lnRef>
+          <a:fillRef idx="3">
+            <a:schemeClr val="accent1"/>
+          </a:fillRef>
+          <a:effectRef idx="2">
+            <a:schemeClr val="accent1"/>
+          </a:effectRef>
+          <a:fontRef idx="minor">
+            <a:schemeClr val="lt1"/>
+          </a:fontRef>
+        </p:style>
+        <p:txBody>
+          <a:bodyPr rtlCol="0" anchor="ctr"/>
+          <a:lstStyle/>
+          <a:p>
+            <a:pPr algn="ctr"/>
+          </a:p>
+        </p:txBody>
+      </p:sp>
+      <p:sp>
+        <p:nvSpPr>
+          <p:cNvPr id="7" name="TextBox 6"/>
+          <p:cNvSpPr txBox="1"/>
+          <p:nvPr/>
+        </p:nvSpPr>
+        <p:spPr>
+          <a:xfrm>
+            <a:off x="914400" y="1874519"/>
+            <a:ext cx="2743200" cy="365760"/>
+          </a:xfrm>
+          <a:prstGeom prst="rect">
+            <a:avLst/>
+          </a:prstGeom>
+          <a:noFill/>
+        </p:spPr>
+        <p:txBody>
+          <a:bodyPr wrap="square" anchor="t" lIns="0" rIns="0" tIns="0" bIns="0">
+            <a:spAutoFit/>
+          </a:bodyPr>
+          <a:lstStyle/>
+          <a:p>
+            <a:pPr algn="l"/>
+            <a:r>
+              <a:rPr sz="1600" b="1">
+                <a:solidFill>
+                  <a:srgbClr val="1D7A8C"/>
+                </a:solidFill>
+                <a:latin typeface="Microsoft YaHei"/>
+              </a:rPr>
+              <a:t>要点</a:t>
+            </a:r>
+          </a:p>
+        </p:txBody>
+      </p:sp>
+      <p:sp>
+        <p:nvSpPr>
+          <p:cNvPr id="8" name="TextBox 7"/>
+          <p:cNvSpPr txBox="1"/>
+          <p:nvPr/>
+        </p:nvSpPr>
+        <p:spPr>
+          <a:xfrm>
+            <a:off x="914400" y="2377440"/>
+            <a:ext cx="5925129" cy="2834640"/>
+          </a:xfrm>
+          <a:prstGeom prst="rect">
+            <a:avLst/>
+          </a:prstGeom>
+          <a:noFill/>
+        </p:spPr>
+        <p:txBody>
+          <a:bodyPr wrap="square" lIns="0" rIns="0" tIns="0" bIns="0">
+            <a:spAutoFit/>
+          </a:bodyPr>
+          <a:lstStyle/>
+          <a:p>
+            <a:pPr>
+              <a:spcAft>
+                <a:spcPts val="1000"/>
+              </a:spcAft>
+            </a:pPr>
+            <a:r>
+              <a:rPr sz="1700">
+                <a:solidFill>
+                  <a:srgbClr val="222B33"/>
+                </a:solidFill>
+                <a:latin typeface="Microsoft YaHei"/>
+              </a:rPr>
+              <a:t>▪ 建立责任体系，制定管理制度和操作规程</a:t>
+            </a:r>
+          </a:p>
+          <a:p>
+            <a:pPr>
+              <a:spcAft>
+                <a:spcPts val="1000"/>
+              </a:spcAft>
+            </a:pPr>
+            <a:r>
+              <a:rPr sz="1700">
+                <a:solidFill>
+                  <a:srgbClr val="222B33"/>
+                </a:solidFill>
+                <a:latin typeface="Microsoft YaHei"/>
+              </a:rPr>
+              <a:t>▪ 开展安全教育培训，考核合格才准入</a:t>
+            </a:r>
+          </a:p>
+          <a:p>
+            <a:pPr>
+              <a:spcAft>
+                <a:spcPts val="1000"/>
+              </a:spcAft>
+            </a:pPr>
+            <a:r>
+              <a:rPr sz="1700">
+                <a:solidFill>
+                  <a:srgbClr val="222B33"/>
+                </a:solidFill>
+                <a:latin typeface="Microsoft YaHei"/>
+              </a:rPr>
+              <a:t>▪ 风险评估、分级管控，排查治理隐患</a:t>
+            </a:r>
+          </a:p>
+          <a:p>
+            <a:pPr>
+              <a:spcAft>
+                <a:spcPts val="1000"/>
+              </a:spcAft>
+            </a:pPr>
+            <a:r>
+              <a:rPr sz="1700">
+                <a:solidFill>
+                  <a:srgbClr val="222B33"/>
+                </a:solidFill>
+                <a:latin typeface="Microsoft YaHei"/>
+              </a:rPr>
+              <a:t>▪ 应急管理、安全设施和条件保障</a:t>
+            </a:r>
+          </a:p>
+          <a:p>
+            <a:pPr>
+              <a:spcAft>
+                <a:spcPts val="1000"/>
+              </a:spcAft>
+            </a:pPr>
+            <a:r>
+              <a:rPr sz="1700">
+                <a:solidFill>
+                  <a:srgbClr val="222B33"/>
+                </a:solidFill>
+                <a:latin typeface="Microsoft YaHei"/>
+              </a:rPr>
+              <a:t>▪ 对化学、生物、辐射、机电等危险源分类管理</a:t>
+            </a:r>
+          </a:p>
+        </p:txBody>
+      </p:sp>
+      <p:sp>
+        <p:nvSpPr>
+          <p:cNvPr id="9" name="TextBox 8"/>
+          <p:cNvSpPr txBox="1"/>
+          <p:nvPr/>
+        </p:nvSpPr>
+        <p:spPr>
+          <a:xfrm>
+            <a:off x="914400" y="5349240"/>
+            <a:ext cx="5925129" cy="320040"/>
+          </a:xfrm>
+          <a:prstGeom prst="rect">
+            <a:avLst/>
+          </a:prstGeom>
+          <a:noFill/>
+        </p:spPr>
+        <p:txBody>
+          <a:bodyPr wrap="square" anchor="t" lIns="0" rIns="0" tIns="0" bIns="0">
+            <a:spAutoFit/>
+          </a:bodyPr>
+          <a:lstStyle/>
+          <a:p>
+            <a:pPr algn="l"/>
+            <a:r>
+              <a:rPr sz="1300" b="1">
+                <a:solidFill>
+                  <a:srgbClr val="1D7A8C"/>
+                </a:solidFill>
+                <a:latin typeface="Microsoft YaHei"/>
+              </a:rPr>
+              <a:t>说明</a:t>
+            </a:r>
+          </a:p>
+        </p:txBody>
+      </p:sp>
+      <p:sp>
+        <p:nvSpPr>
+          <p:cNvPr id="10" name="TextBox 9"/>
+          <p:cNvSpPr txBox="1"/>
+          <p:nvPr/>
+        </p:nvSpPr>
+        <p:spPr>
+          <a:xfrm>
+            <a:off x="914400" y="5715000"/>
+            <a:ext cx="5925129" cy="45720"/>
+          </a:xfrm>
+          <a:prstGeom prst="rect">
+            <a:avLst/>
+          </a:prstGeom>
+          <a:noFill/>
+        </p:spPr>
+        <p:txBody>
+          <a:bodyPr wrap="square" anchor="t" lIns="0" rIns="0" tIns="0" bIns="0">
+            <a:spAutoFit/>
+          </a:bodyPr>
+          <a:lstStyle/>
+          <a:p>
+            <a:pPr algn="l"/>
+            <a:r>
+              <a:rPr sz="1400" b="0">
+                <a:solidFill>
+                  <a:srgbClr val="5F6B75"/>
+                </a:solidFill>
+                <a:latin typeface="Microsoft YaHei"/>
+              </a:rPr>
+              <a:t>规范的要求可以概括为几个方面（具体章节和表述以现行文本为准）：一是责任体系，学校、学院（二级单位）、实验室逐级明确安全责任；二是制度建设，建立健全实验室安全管理制度和安全操作规程；三是教育培训与准入，进入实验室的人员……</a:t>
+            </a:r>
+          </a:p>
+        </p:txBody>
+      </p:sp>
+      <p:sp>
+        <p:nvSpPr>
+          <p:cNvPr id="11" name="Rounded Rectangle 10"/>
+          <p:cNvSpPr/>
+          <p:nvPr/>
+        </p:nvSpPr>
+        <p:spPr>
+          <a:xfrm>
+            <a:off x="7571049" y="1645920"/>
+            <a:ext cx="4072006" cy="4389120"/>
+          </a:xfrm>
+          <a:prstGeom prst="roundRect">
+            <a:avLst>
+              <a:gd name="adj" fmla="val 8000"/>
+            </a:avLst>
+          </a:prstGeom>
+          <a:solidFill>
+            <a:srgbClr val="FBECEA"/>
+          </a:solidFill>
+          <a:ln>
+            <a:noFill/>
+          </a:ln>
+          <a:effectLst/>
+        </p:spPr>
+        <p:style>
+          <a:lnRef idx="1">
+            <a:schemeClr val="accent1"/>
+          </a:lnRef>
+          <a:fillRef idx="3">
+            <a:schemeClr val="accent1"/>
+          </a:fillRef>
+          <a:effectRef idx="2">
+            <a:schemeClr val="accent1"/>
+          </a:effectRef>
+          <a:fontRef idx="minor">
+            <a:schemeClr val="lt1"/>
+          </a:fontRef>
+        </p:style>
+        <p:txBody>
+          <a:bodyPr rtlCol="0" anchor="ctr"/>
+          <a:lstStyle/>
+          <a:p>
+            <a:pPr algn="ctr"/>
+          </a:p>
+        </p:txBody>
+      </p:sp>
+      <p:sp>
+        <p:nvSpPr>
+          <p:cNvPr id="12" name="Oval 11"/>
+          <p:cNvSpPr/>
+          <p:nvPr/>
+        </p:nvSpPr>
+        <p:spPr>
+          <a:xfrm>
+            <a:off x="7936809" y="1828800"/>
+            <a:ext cx="457200" cy="457200"/>
+          </a:xfrm>
+          <a:prstGeom prst="ellipse">
+            <a:avLst/>
+          </a:prstGeom>
+          <a:solidFill>
+            <a:srgbClr val="C0392B"/>
+          </a:solidFill>
+          <a:ln>
+            <a:noFill/>
+          </a:ln>
+          <a:effectLst/>
+        </p:spPr>
+        <p:style>
+          <a:lnRef idx="1">
+            <a:schemeClr val="accent1"/>
+          </a:lnRef>
+          <a:fillRef idx="3">
+            <a:schemeClr val="accent1"/>
+          </a:fillRef>
+          <a:effectRef idx="2">
+            <a:schemeClr val="accent1"/>
+          </a:effectRef>
+          <a:fontRef idx="minor">
+            <a:schemeClr val="lt1"/>
+          </a:fontRef>
+        </p:style>
+        <p:txBody>
+          <a:bodyPr rtlCol="0" anchor="ctr" lIns="0" rIns="0" tIns="0" bIns="0"/>
+          <a:lstStyle/>
+          <a:p>
+            <a:pPr algn="ctr"/>
+            <a:r>
+              <a:rPr sz="1600" b="1">
+                <a:solidFill>
+                  <a:srgbClr val="FFFFFF"/>
+                </a:solidFill>
+                <a:latin typeface="Microsoft YaHei"/>
+              </a:rPr>
+              <a:t>✕</a:t>
+            </a:r>
+          </a:p>
+        </p:txBody>
+      </p:sp>
+      <p:sp>
+        <p:nvSpPr>
+          <p:cNvPr id="13" name="TextBox 12"/>
+          <p:cNvSpPr txBox="1"/>
+          <p:nvPr/>
+        </p:nvSpPr>
+        <p:spPr>
+          <a:xfrm>
+            <a:off x="8531169" y="1874519"/>
+            <a:ext cx="2791846" cy="365760"/>
+          </a:xfrm>
+          <a:prstGeom prst="rect">
+            <a:avLst/>
+          </a:prstGeom>
+          <a:noFill/>
+        </p:spPr>
+        <p:txBody>
+          <a:bodyPr wrap="square" anchor="t" lIns="0" rIns="0" tIns="0" bIns="0">
+            <a:spAutoFit/>
+          </a:bodyPr>
+          <a:lstStyle/>
+          <a:p>
+            <a:pPr algn="l"/>
+            <a:r>
+              <a:rPr sz="1600" b="1">
+                <a:solidFill>
+                  <a:srgbClr val="C0392B"/>
+                </a:solidFill>
+                <a:latin typeface="Microsoft YaHei"/>
+              </a:rPr>
+              <a:t>常见错误</a:t>
+            </a:r>
+          </a:p>
+        </p:txBody>
+      </p:sp>
+      <p:sp>
+        <p:nvSpPr>
+          <p:cNvPr id="14" name="TextBox 13"/>
+          <p:cNvSpPr txBox="1"/>
+          <p:nvPr/>
+        </p:nvSpPr>
+        <p:spPr>
+          <a:xfrm>
+            <a:off x="7936809" y="2514600"/>
+            <a:ext cx="3340486" cy="3291840"/>
+          </a:xfrm>
+          <a:prstGeom prst="rect">
+            <a:avLst/>
+          </a:prstGeom>
+          <a:noFill/>
+        </p:spPr>
+        <p:txBody>
+          <a:bodyPr wrap="square" lIns="0" rIns="0" tIns="0" bIns="0">
+            <a:spAutoFit/>
+          </a:bodyPr>
+          <a:lstStyle/>
+          <a:p>
+            <a:pPr>
+              <a:spcAft>
+                <a:spcPts val="1000"/>
+              </a:spcAft>
+            </a:pPr>
+            <a:r>
+              <a:rPr sz="1500">
+                <a:solidFill>
+                  <a:srgbClr val="222B33"/>
+                </a:solidFill>
+                <a:latin typeface="Microsoft YaHei"/>
+              </a:rPr>
+              <a:t>▪ 把规范理解为“只管化学实验室”</a:t>
+            </a:r>
+          </a:p>
+          <a:p>
+            <a:pPr>
+              <a:spcAft>
+                <a:spcPts val="1000"/>
+              </a:spcAft>
+            </a:pPr>
+            <a:r>
+              <a:rPr sz="1500">
+                <a:solidFill>
+                  <a:srgbClr val="222B33"/>
+                </a:solidFill>
+                <a:latin typeface="Microsoft YaHei"/>
+              </a:rPr>
+              <a:t>▪ 只关注设施配备，忽视制度、培训和应急</a:t>
+            </a:r>
+          </a:p>
+        </p:txBody>
+      </p:sp>
+    </p:spTree>
+  </p:cSld>
+  <p:clrMapOvr>
+    <a:masterClrMapping/>
+  </p:clrMapOvr>
+</p:sld>
+</file>
+
+<file path=ppt/slides/slide39.xml><?xml version="1.0" encoding="utf-8"?>
+<p:sld xmlns:a="http://schemas.openxmlformats.org/drawingml/2006/main" xmlns:p="http://schemas.openxmlformats.org/presentationml/2006/main" xmlns:r="http://schemas.openxmlformats.org/officeDocument/2006/relationships">
+  <p:cSld>
+    <p:bg>
+      <p:bgPr>
+        <a:solidFill>
+          <a:srgbClr val="FFFFFF"/>
+        </a:solidFill>
+        <a:effectLst/>
+      </p:bgPr>
+    </p:bg>
+    <p:spTree>
+      <p:nvGrpSpPr>
+        <p:cNvPr id="1" name=""/>
+        <p:cNvGrpSpPr/>
+        <p:nvPr/>
+      </p:nvGrpSpPr>
+      <p:grpSpPr/>
+      <p:sp>
+        <p:nvSpPr>
+          <p:cNvPr id="2" name="TextBox 1"/>
+          <p:cNvSpPr txBox="1"/>
+          <p:nvPr/>
+        </p:nvSpPr>
+        <p:spPr>
+          <a:xfrm>
+            <a:off x="548640" y="320040"/>
+            <a:ext cx="8229600" cy="320040"/>
+          </a:xfrm>
+          <a:prstGeom prst="rect">
+            <a:avLst/>
+          </a:prstGeom>
+          <a:noFill/>
+        </p:spPr>
+        <p:txBody>
+          <a:bodyPr wrap="square" anchor="t" lIns="0" rIns="0" tIns="0" bIns="0">
+            <a:spAutoFit/>
+          </a:bodyPr>
+          <a:lstStyle/>
+          <a:p>
+            <a:pPr algn="l"/>
+            <a:r>
+              <a:rPr sz="1200" b="1">
+                <a:solidFill>
+                  <a:srgbClr val="1D7A8C"/>
+                </a:solidFill>
+                <a:latin typeface="Microsoft YaHei"/>
+              </a:rPr>
+              <a:t>003 · 高校实验室安全规范与检查</a:t>
+            </a:r>
+          </a:p>
+        </p:txBody>
+      </p:sp>
+      <p:sp>
+        <p:nvSpPr>
+          <p:cNvPr id="3" name="TextBox 2"/>
+          <p:cNvSpPr txBox="1"/>
+          <p:nvPr/>
+        </p:nvSpPr>
+        <p:spPr>
+          <a:xfrm>
+            <a:off x="548640" y="640080"/>
+            <a:ext cx="11094415" cy="731520"/>
+          </a:xfrm>
+          <a:prstGeom prst="rect">
+            <a:avLst/>
+          </a:prstGeom>
+          <a:noFill/>
+        </p:spPr>
+        <p:txBody>
+          <a:bodyPr wrap="square" anchor="t" lIns="0" rIns="0" tIns="0" bIns="0">
+            <a:spAutoFit/>
+          </a:bodyPr>
+          <a:lstStyle/>
+          <a:p>
+            <a:pPr algn="l"/>
+            <a:r>
+              <a:rPr sz="3000" b="1">
+                <a:solidFill>
+                  <a:srgbClr val="0B3C5D"/>
+                </a:solidFill>
+                <a:latin typeface="Microsoft YaHei"/>
+              </a:rPr>
+              <a:t>按危险源分类分级管理</a:t>
+            </a:r>
+          </a:p>
+        </p:txBody>
+      </p:sp>
+      <p:sp>
+        <p:nvSpPr>
+          <p:cNvPr id="4" name="TextBox 3"/>
+          <p:cNvSpPr txBox="1"/>
+          <p:nvPr/>
+        </p:nvSpPr>
+        <p:spPr>
+          <a:xfrm>
+            <a:off x="548640" y="6446520"/>
+            <a:ext cx="7315200" cy="274320"/>
+          </a:xfrm>
+          <a:prstGeom prst="rect">
+            <a:avLst/>
+          </a:prstGeom>
+          <a:noFill/>
+        </p:spPr>
+        <p:txBody>
+          <a:bodyPr wrap="square" anchor="t" lIns="0" rIns="0" tIns="0" bIns="0">
+            <a:spAutoFit/>
+          </a:bodyPr>
+          <a:lstStyle/>
+          <a:p>
+            <a:pPr algn="l"/>
+            <a:r>
+              <a:rPr sz="1000" b="0">
+                <a:solidFill>
+                  <a:srgbClr val="5F6B75"/>
+                </a:solidFill>
+                <a:latin typeface="Microsoft YaHei"/>
+              </a:rPr>
+              <a:t>《高校实验室安全》 003 高校实验室安全规范与检查</a:t>
+            </a:r>
+          </a:p>
+        </p:txBody>
+      </p:sp>
+      <p:sp>
+        <p:nvSpPr>
+          <p:cNvPr id="5" name="Oval 4"/>
+          <p:cNvSpPr/>
+          <p:nvPr/>
+        </p:nvSpPr>
+        <p:spPr>
+          <a:xfrm>
+            <a:off x="10820095" y="411480"/>
+            <a:ext cx="822960" cy="822960"/>
+          </a:xfrm>
+          <a:prstGeom prst="ellipse">
+            <a:avLst/>
+          </a:prstGeom>
+          <a:solidFill>
+            <a:srgbClr val="F28C28"/>
+          </a:solidFill>
+          <a:ln>
+            <a:noFill/>
+          </a:ln>
+          <a:effectLst/>
+        </p:spPr>
+        <p:style>
+          <a:lnRef idx="1">
+            <a:schemeClr val="accent1"/>
+          </a:lnRef>
+          <a:fillRef idx="3">
+            <a:schemeClr val="accent1"/>
+          </a:fillRef>
+          <a:effectRef idx="2">
+            <a:schemeClr val="accent1"/>
+          </a:effectRef>
+          <a:fontRef idx="minor">
+            <a:schemeClr val="lt1"/>
+          </a:fontRef>
+        </p:style>
+        <p:txBody>
+          <a:bodyPr rtlCol="0" anchor="ctr" lIns="0" rIns="0" tIns="0" bIns="0"/>
+          <a:lstStyle/>
+          <a:p>
+            <a:pPr algn="ctr"/>
+            <a:r>
+              <a:rPr sz="1800" b="1">
+                <a:solidFill>
+                  <a:srgbClr val="FFFFFF"/>
+                </a:solidFill>
+                <a:latin typeface="Microsoft YaHei"/>
+              </a:rPr>
+              <a:t>K1</a:t>
+            </a:r>
+          </a:p>
+        </p:txBody>
+      </p:sp>
+      <p:sp>
+        <p:nvSpPr>
+          <p:cNvPr id="6" name="Rounded Rectangle 5"/>
+          <p:cNvSpPr/>
+          <p:nvPr/>
+        </p:nvSpPr>
+        <p:spPr>
+          <a:xfrm>
+            <a:off x="548640" y="1645920"/>
+            <a:ext cx="6656649" cy="4389120"/>
+          </a:xfrm>
+          <a:prstGeom prst="roundRect">
+            <a:avLst>
+              <a:gd name="adj" fmla="val 8000"/>
+            </a:avLst>
+          </a:prstGeom>
+          <a:solidFill>
+            <a:srgbClr val="EEF4F7"/>
+          </a:solidFill>
+          <a:ln>
+            <a:noFill/>
+          </a:ln>
+          <a:effectLst/>
+        </p:spPr>
+        <p:style>
+          <a:lnRef idx="1">
+            <a:schemeClr val="accent1"/>
+          </a:lnRef>
+          <a:fillRef idx="3">
+            <a:schemeClr val="accent1"/>
+          </a:fillRef>
+          <a:effectRef idx="2">
+            <a:schemeClr val="accent1"/>
+          </a:effectRef>
+          <a:fontRef idx="minor">
+            <a:schemeClr val="lt1"/>
+          </a:fontRef>
+        </p:style>
+        <p:txBody>
+          <a:bodyPr rtlCol="0" anchor="ctr"/>
+          <a:lstStyle/>
+          <a:p>
+            <a:pPr algn="ctr"/>
+          </a:p>
+        </p:txBody>
+      </p:sp>
+      <p:sp>
+        <p:nvSpPr>
+          <p:cNvPr id="7" name="TextBox 6"/>
+          <p:cNvSpPr txBox="1"/>
+          <p:nvPr/>
+        </p:nvSpPr>
+        <p:spPr>
+          <a:xfrm>
+            <a:off x="914400" y="1874519"/>
+            <a:ext cx="2743200" cy="365760"/>
+          </a:xfrm>
+          <a:prstGeom prst="rect">
+            <a:avLst/>
+          </a:prstGeom>
+          <a:noFill/>
+        </p:spPr>
+        <p:txBody>
+          <a:bodyPr wrap="square" anchor="t" lIns="0" rIns="0" tIns="0" bIns="0">
+            <a:spAutoFit/>
+          </a:bodyPr>
+          <a:lstStyle/>
+          <a:p>
+            <a:pPr algn="l"/>
+            <a:r>
+              <a:rPr sz="1600" b="1">
+                <a:solidFill>
+                  <a:srgbClr val="1D7A8C"/>
+                </a:solidFill>
+                <a:latin typeface="Microsoft YaHei"/>
+              </a:rPr>
+              <a:t>要点</a:t>
+            </a:r>
+          </a:p>
+        </p:txBody>
+      </p:sp>
+      <p:sp>
+        <p:nvSpPr>
+          <p:cNvPr id="8" name="TextBox 7"/>
+          <p:cNvSpPr txBox="1"/>
+          <p:nvPr/>
+        </p:nvSpPr>
+        <p:spPr>
+          <a:xfrm>
+            <a:off x="914400" y="2377440"/>
+            <a:ext cx="5925129" cy="2267712"/>
+          </a:xfrm>
+          <a:prstGeom prst="rect">
+            <a:avLst/>
+          </a:prstGeom>
+          <a:noFill/>
+        </p:spPr>
+        <p:txBody>
+          <a:bodyPr wrap="square" lIns="0" rIns="0" tIns="0" bIns="0">
+            <a:spAutoFit/>
+          </a:bodyPr>
+          <a:lstStyle/>
+          <a:p>
+            <a:pPr>
+              <a:spcAft>
+                <a:spcPts val="1000"/>
+              </a:spcAft>
+            </a:pPr>
+            <a:r>
+              <a:rPr sz="2000">
+                <a:solidFill>
+                  <a:srgbClr val="222B33"/>
+                </a:solidFill>
+                <a:latin typeface="Microsoft YaHei"/>
+              </a:rPr>
+              <a:t>▪ 先按危险源分类：化学、生物、辐射、机电等</a:t>
+            </a:r>
+          </a:p>
+          <a:p>
+            <a:pPr>
+              <a:spcAft>
+                <a:spcPts val="1000"/>
+              </a:spcAft>
+            </a:pPr>
+            <a:r>
+              <a:rPr sz="2000">
+                <a:solidFill>
+                  <a:srgbClr val="222B33"/>
+                </a:solidFill>
+                <a:latin typeface="Microsoft YaHei"/>
+              </a:rPr>
+              <a:t>▪ 再按风险高低分级，危险越高管控越严</a:t>
+            </a:r>
+          </a:p>
+          <a:p>
+            <a:pPr>
+              <a:spcAft>
+                <a:spcPts val="1000"/>
+              </a:spcAft>
+            </a:pPr>
+            <a:r>
+              <a:rPr sz="2000">
+                <a:solidFill>
+                  <a:srgbClr val="222B33"/>
+                </a:solidFill>
+                <a:latin typeface="Microsoft YaHei"/>
+              </a:rPr>
+              <a:t>▪ 高风险实验室准入更严、检查更勤</a:t>
+            </a:r>
+          </a:p>
+          <a:p>
+            <a:pPr>
+              <a:spcAft>
+                <a:spcPts val="1000"/>
+              </a:spcAft>
+            </a:pPr>
+            <a:r>
+              <a:rPr sz="2000">
+                <a:solidFill>
+                  <a:srgbClr val="222B33"/>
+                </a:solidFill>
+                <a:latin typeface="Microsoft YaHei"/>
+              </a:rPr>
+              <a:t>▪ 分级标准和标识颜色以本校规定为准</a:t>
+            </a:r>
+          </a:p>
+        </p:txBody>
+      </p:sp>
+      <p:sp>
+        <p:nvSpPr>
+          <p:cNvPr id="9" name="TextBox 8"/>
+          <p:cNvSpPr txBox="1"/>
+          <p:nvPr/>
+        </p:nvSpPr>
+        <p:spPr>
+          <a:xfrm>
+            <a:off x="914400" y="4782312"/>
+            <a:ext cx="5925129" cy="320040"/>
+          </a:xfrm>
+          <a:prstGeom prst="rect">
+            <a:avLst/>
+          </a:prstGeom>
+          <a:noFill/>
+        </p:spPr>
+        <p:txBody>
+          <a:bodyPr wrap="square" anchor="t" lIns="0" rIns="0" tIns="0" bIns="0">
+            <a:spAutoFit/>
+          </a:bodyPr>
+          <a:lstStyle/>
+          <a:p>
+            <a:pPr algn="l"/>
+            <a:r>
+              <a:rPr sz="1300" b="1">
+                <a:solidFill>
+                  <a:srgbClr val="1D7A8C"/>
+                </a:solidFill>
+                <a:latin typeface="Microsoft YaHei"/>
+              </a:rPr>
+              <a:t>说明</a:t>
+            </a:r>
+          </a:p>
+        </p:txBody>
+      </p:sp>
+      <p:sp>
+        <p:nvSpPr>
+          <p:cNvPr id="10" name="TextBox 9"/>
+          <p:cNvSpPr txBox="1"/>
+          <p:nvPr/>
+        </p:nvSpPr>
+        <p:spPr>
+          <a:xfrm>
+            <a:off x="914400" y="5148072"/>
+            <a:ext cx="5925129" cy="612648"/>
+          </a:xfrm>
+          <a:prstGeom prst="rect">
+            <a:avLst/>
+          </a:prstGeom>
+          <a:noFill/>
+        </p:spPr>
+        <p:txBody>
+          <a:bodyPr wrap="square" anchor="t" lIns="0" rIns="0" tIns="0" bIns="0">
+            <a:spAutoFit/>
+          </a:bodyPr>
+          <a:lstStyle/>
+          <a:p>
+            <a:pPr algn="l"/>
+            <a:r>
+              <a:rPr sz="1400" b="0">
+                <a:solidFill>
+                  <a:srgbClr val="5F6B75"/>
+                </a:solidFill>
+                <a:latin typeface="Microsoft YaHei"/>
+              </a:rPr>
+              <a:t>高校实验室数量多、差别大，不能“一刀切”管理。规范要求对实验室实行分类分级管理：按主要危险源的种类分类，例如化学类、生物类、辐射类、机电类、特种设备类等（一间实验室可能同时属于几类）；再按危险源的性质、数量和风险程度……</a:t>
+            </a:r>
+          </a:p>
+        </p:txBody>
+      </p:sp>
+      <p:sp>
+        <p:nvSpPr>
+          <p:cNvPr id="11" name="Rounded Rectangle 10"/>
+          <p:cNvSpPr/>
+          <p:nvPr/>
+        </p:nvSpPr>
+        <p:spPr>
+          <a:xfrm>
+            <a:off x="7571049" y="1645920"/>
+            <a:ext cx="4072006" cy="4389120"/>
+          </a:xfrm>
+          <a:prstGeom prst="roundRect">
+            <a:avLst>
+              <a:gd name="adj" fmla="val 8000"/>
+            </a:avLst>
+          </a:prstGeom>
+          <a:solidFill>
+            <a:srgbClr val="FBECEA"/>
+          </a:solidFill>
+          <a:ln>
+            <a:noFill/>
+          </a:ln>
+          <a:effectLst/>
+        </p:spPr>
+        <p:style>
+          <a:lnRef idx="1">
+            <a:schemeClr val="accent1"/>
+          </a:lnRef>
+          <a:fillRef idx="3">
+            <a:schemeClr val="accent1"/>
+          </a:fillRef>
+          <a:effectRef idx="2">
+            <a:schemeClr val="accent1"/>
+          </a:effectRef>
+          <a:fontRef idx="minor">
+            <a:schemeClr val="lt1"/>
+          </a:fontRef>
+        </p:style>
+        <p:txBody>
+          <a:bodyPr rtlCol="0" anchor="ctr"/>
+          <a:lstStyle/>
+          <a:p>
+            <a:pPr algn="ctr"/>
+          </a:p>
+        </p:txBody>
+      </p:sp>
+      <p:sp>
+        <p:nvSpPr>
+          <p:cNvPr id="12" name="Oval 11"/>
+          <p:cNvSpPr/>
+          <p:nvPr/>
+        </p:nvSpPr>
+        <p:spPr>
+          <a:xfrm>
+            <a:off x="7936809" y="1828800"/>
+            <a:ext cx="457200" cy="457200"/>
+          </a:xfrm>
+          <a:prstGeom prst="ellipse">
+            <a:avLst/>
+          </a:prstGeom>
+          <a:solidFill>
+            <a:srgbClr val="C0392B"/>
+          </a:solidFill>
+          <a:ln>
+            <a:noFill/>
+          </a:ln>
+          <a:effectLst/>
+        </p:spPr>
+        <p:style>
+          <a:lnRef idx="1">
+            <a:schemeClr val="accent1"/>
+          </a:lnRef>
+          <a:fillRef idx="3">
+            <a:schemeClr val="accent1"/>
+          </a:fillRef>
+          <a:effectRef idx="2">
+            <a:schemeClr val="accent1"/>
+          </a:effectRef>
+          <a:fontRef idx="minor">
+            <a:schemeClr val="lt1"/>
+          </a:fontRef>
+        </p:style>
+        <p:txBody>
+          <a:bodyPr rtlCol="0" anchor="ctr" lIns="0" rIns="0" tIns="0" bIns="0"/>
+          <a:lstStyle/>
+          <a:p>
+            <a:pPr algn="ctr"/>
+            <a:r>
+              <a:rPr sz="1600" b="1">
+                <a:solidFill>
+                  <a:srgbClr val="FFFFFF"/>
+                </a:solidFill>
+                <a:latin typeface="Microsoft YaHei"/>
+              </a:rPr>
+              <a:t>✕</a:t>
+            </a:r>
+          </a:p>
+        </p:txBody>
+      </p:sp>
+      <p:sp>
+        <p:nvSpPr>
+          <p:cNvPr id="13" name="TextBox 12"/>
+          <p:cNvSpPr txBox="1"/>
+          <p:nvPr/>
+        </p:nvSpPr>
+        <p:spPr>
+          <a:xfrm>
+            <a:off x="8531169" y="1874519"/>
+            <a:ext cx="2791846" cy="365760"/>
+          </a:xfrm>
+          <a:prstGeom prst="rect">
+            <a:avLst/>
+          </a:prstGeom>
+          <a:noFill/>
+        </p:spPr>
+        <p:txBody>
+          <a:bodyPr wrap="square" anchor="t" lIns="0" rIns="0" tIns="0" bIns="0">
+            <a:spAutoFit/>
+          </a:bodyPr>
+          <a:lstStyle/>
+          <a:p>
+            <a:pPr algn="l"/>
+            <a:r>
+              <a:rPr sz="1600" b="1">
+                <a:solidFill>
+                  <a:srgbClr val="C0392B"/>
+                </a:solidFill>
+                <a:latin typeface="Microsoft YaHei"/>
+              </a:rPr>
+              <a:t>常见错误</a:t>
+            </a:r>
+          </a:p>
+        </p:txBody>
+      </p:sp>
+      <p:sp>
+        <p:nvSpPr>
+          <p:cNvPr id="14" name="TextBox 13"/>
+          <p:cNvSpPr txBox="1"/>
+          <p:nvPr/>
+        </p:nvSpPr>
+        <p:spPr>
+          <a:xfrm>
+            <a:off x="7936809" y="2514600"/>
+            <a:ext cx="3340486" cy="3291840"/>
+          </a:xfrm>
+          <a:prstGeom prst="rect">
+            <a:avLst/>
+          </a:prstGeom>
+          <a:noFill/>
+        </p:spPr>
+        <p:txBody>
+          <a:bodyPr wrap="square" lIns="0" rIns="0" tIns="0" bIns="0">
+            <a:spAutoFit/>
+          </a:bodyPr>
+          <a:lstStyle/>
+          <a:p>
+            <a:pPr>
+              <a:spcAft>
+                <a:spcPts val="1000"/>
+              </a:spcAft>
+            </a:pPr>
+            <a:r>
+              <a:rPr sz="1500">
+                <a:solidFill>
+                  <a:srgbClr val="222B33"/>
+                </a:solidFill>
+                <a:latin typeface="Microsoft YaHei"/>
+              </a:rPr>
+              <a:t>▪ 认为低级别实验室“不用管”</a:t>
+            </a:r>
+          </a:p>
+          <a:p>
+            <a:pPr>
+              <a:spcAft>
+                <a:spcPts val="1000"/>
+              </a:spcAft>
+            </a:pPr>
+            <a:r>
+              <a:rPr sz="1500">
+                <a:solidFill>
+                  <a:srgbClr val="222B33"/>
+                </a:solidFill>
+                <a:latin typeface="Microsoft YaHei"/>
+              </a:rPr>
+              <a:t>▪ 实验内容已变化，实验室分级和信息牌仍不更新</a:t>
+            </a:r>
+          </a:p>
+        </p:txBody>
+      </p:sp>
+    </p:spTree>
+  </p:cSld>
+  <p:clrMapOvr>
+    <a:masterClrMapping/>
+  </p:clrMapOvr>
+</p:sld>
+</file>
+
 <file path=ppt/slides/slide4.xml><?xml version="1.0" encoding="utf-8"?>
 <p:sld xmlns:a="http://schemas.openxmlformats.org/drawingml/2006/main" xmlns:p="http://schemas.openxmlformats.org/presentationml/2006/main" xmlns:r="http://schemas.openxmlformats.org/officeDocument/2006/relationships">
   <p:cSld>
@@ -21012,6 +25605,4643 @@
                 <a:latin typeface="Microsoft YaHei"/>
               </a:rPr>
               <a:t>▪ 觉得自己只做简单实验，不需要学安全知识</a:t>
+            </a:r>
+          </a:p>
+        </p:txBody>
+      </p:sp>
+    </p:spTree>
+  </p:cSld>
+  <p:clrMapOvr>
+    <a:masterClrMapping/>
+  </p:clrMapOvr>
+</p:sld>
+</file>
+
+<file path=ppt/slides/slide40.xml><?xml version="1.0" encoding="utf-8"?>
+<p:sld xmlns:a="http://schemas.openxmlformats.org/drawingml/2006/main" xmlns:p="http://schemas.openxmlformats.org/presentationml/2006/main" xmlns:r="http://schemas.openxmlformats.org/officeDocument/2006/relationships">
+  <p:cSld>
+    <p:bg>
+      <p:bgPr>
+        <a:solidFill>
+          <a:srgbClr val="FFFFFF"/>
+        </a:solidFill>
+        <a:effectLst/>
+      </p:bgPr>
+    </p:bg>
+    <p:spTree>
+      <p:nvGrpSpPr>
+        <p:cNvPr id="1" name=""/>
+        <p:cNvGrpSpPr/>
+        <p:nvPr/>
+      </p:nvGrpSpPr>
+      <p:grpSpPr/>
+      <p:sp>
+        <p:nvSpPr>
+          <p:cNvPr id="2" name="TextBox 1"/>
+          <p:cNvSpPr txBox="1"/>
+          <p:nvPr/>
+        </p:nvSpPr>
+        <p:spPr>
+          <a:xfrm>
+            <a:off x="548640" y="320040"/>
+            <a:ext cx="8229600" cy="320040"/>
+          </a:xfrm>
+          <a:prstGeom prst="rect">
+            <a:avLst/>
+          </a:prstGeom>
+          <a:noFill/>
+        </p:spPr>
+        <p:txBody>
+          <a:bodyPr wrap="square" anchor="t" lIns="0" rIns="0" tIns="0" bIns="0">
+            <a:spAutoFit/>
+          </a:bodyPr>
+          <a:lstStyle/>
+          <a:p>
+            <a:pPr algn="l"/>
+            <a:r>
+              <a:rPr sz="1200" b="1">
+                <a:solidFill>
+                  <a:srgbClr val="1D7A8C"/>
+                </a:solidFill>
+                <a:latin typeface="Microsoft YaHei"/>
+              </a:rPr>
+              <a:t>003 · 高校实验室安全规范与检查</a:t>
+            </a:r>
+          </a:p>
+        </p:txBody>
+      </p:sp>
+      <p:sp>
+        <p:nvSpPr>
+          <p:cNvPr id="3" name="TextBox 2"/>
+          <p:cNvSpPr txBox="1"/>
+          <p:nvPr/>
+        </p:nvSpPr>
+        <p:spPr>
+          <a:xfrm>
+            <a:off x="548640" y="640080"/>
+            <a:ext cx="11094415" cy="731520"/>
+          </a:xfrm>
+          <a:prstGeom prst="rect">
+            <a:avLst/>
+          </a:prstGeom>
+          <a:noFill/>
+        </p:spPr>
+        <p:txBody>
+          <a:bodyPr wrap="square" anchor="t" lIns="0" rIns="0" tIns="0" bIns="0">
+            <a:spAutoFit/>
+          </a:bodyPr>
+          <a:lstStyle/>
+          <a:p>
+            <a:pPr algn="l"/>
+            <a:r>
+              <a:rPr sz="3000" b="1">
+                <a:solidFill>
+                  <a:srgbClr val="0B3C5D"/>
+                </a:solidFill>
+                <a:latin typeface="Microsoft YaHei"/>
+              </a:rPr>
+              <a:t>同样的化学品，不同的管法</a:t>
+            </a:r>
+          </a:p>
+        </p:txBody>
+      </p:sp>
+      <p:sp>
+        <p:nvSpPr>
+          <p:cNvPr id="4" name="TextBox 3"/>
+          <p:cNvSpPr txBox="1"/>
+          <p:nvPr/>
+        </p:nvSpPr>
+        <p:spPr>
+          <a:xfrm>
+            <a:off x="548640" y="6446520"/>
+            <a:ext cx="7315200" cy="274320"/>
+          </a:xfrm>
+          <a:prstGeom prst="rect">
+            <a:avLst/>
+          </a:prstGeom>
+          <a:noFill/>
+        </p:spPr>
+        <p:txBody>
+          <a:bodyPr wrap="square" anchor="t" lIns="0" rIns="0" tIns="0" bIns="0">
+            <a:spAutoFit/>
+          </a:bodyPr>
+          <a:lstStyle/>
+          <a:p>
+            <a:pPr algn="l"/>
+            <a:r>
+              <a:rPr sz="1000" b="0">
+                <a:solidFill>
+                  <a:srgbClr val="5F6B75"/>
+                </a:solidFill>
+                <a:latin typeface="Microsoft YaHei"/>
+              </a:rPr>
+              <a:t>《高校实验室安全》 003 高校实验室安全规范与检查</a:t>
+            </a:r>
+          </a:p>
+        </p:txBody>
+      </p:sp>
+      <p:sp>
+        <p:nvSpPr>
+          <p:cNvPr id="5" name="Oval 4"/>
+          <p:cNvSpPr/>
+          <p:nvPr/>
+        </p:nvSpPr>
+        <p:spPr>
+          <a:xfrm>
+            <a:off x="10820095" y="411480"/>
+            <a:ext cx="822960" cy="822960"/>
+          </a:xfrm>
+          <a:prstGeom prst="ellipse">
+            <a:avLst/>
+          </a:prstGeom>
+          <a:solidFill>
+            <a:srgbClr val="F28C28"/>
+          </a:solidFill>
+          <a:ln>
+            <a:noFill/>
+          </a:ln>
+          <a:effectLst/>
+        </p:spPr>
+        <p:style>
+          <a:lnRef idx="1">
+            <a:schemeClr val="accent1"/>
+          </a:lnRef>
+          <a:fillRef idx="3">
+            <a:schemeClr val="accent1"/>
+          </a:fillRef>
+          <a:effectRef idx="2">
+            <a:schemeClr val="accent1"/>
+          </a:effectRef>
+          <a:fontRef idx="minor">
+            <a:schemeClr val="lt1"/>
+          </a:fontRef>
+        </p:style>
+        <p:txBody>
+          <a:bodyPr rtlCol="0" anchor="ctr" lIns="0" rIns="0" tIns="0" bIns="0"/>
+          <a:lstStyle/>
+          <a:p>
+            <a:pPr algn="ctr"/>
+            <a:r>
+              <a:rPr sz="1800" b="1">
+                <a:solidFill>
+                  <a:srgbClr val="FFFFFF"/>
+                </a:solidFill>
+                <a:latin typeface="Microsoft YaHei"/>
+              </a:rPr>
+              <a:t>K2</a:t>
+            </a:r>
+          </a:p>
+        </p:txBody>
+      </p:sp>
+      <p:sp>
+        <p:nvSpPr>
+          <p:cNvPr id="6" name="Rounded Rectangle 5"/>
+          <p:cNvSpPr/>
+          <p:nvPr/>
+        </p:nvSpPr>
+        <p:spPr>
+          <a:xfrm>
+            <a:off x="548640" y="1645920"/>
+            <a:ext cx="6656649" cy="4389120"/>
+          </a:xfrm>
+          <a:prstGeom prst="roundRect">
+            <a:avLst>
+              <a:gd name="adj" fmla="val 8000"/>
+            </a:avLst>
+          </a:prstGeom>
+          <a:solidFill>
+            <a:srgbClr val="EEF4F7"/>
+          </a:solidFill>
+          <a:ln>
+            <a:noFill/>
+          </a:ln>
+          <a:effectLst/>
+        </p:spPr>
+        <p:style>
+          <a:lnRef idx="1">
+            <a:schemeClr val="accent1"/>
+          </a:lnRef>
+          <a:fillRef idx="3">
+            <a:schemeClr val="accent1"/>
+          </a:fillRef>
+          <a:effectRef idx="2">
+            <a:schemeClr val="accent1"/>
+          </a:effectRef>
+          <a:fontRef idx="minor">
+            <a:schemeClr val="lt1"/>
+          </a:fontRef>
+        </p:style>
+        <p:txBody>
+          <a:bodyPr rtlCol="0" anchor="ctr"/>
+          <a:lstStyle/>
+          <a:p>
+            <a:pPr algn="ctr"/>
+          </a:p>
+        </p:txBody>
+      </p:sp>
+      <p:sp>
+        <p:nvSpPr>
+          <p:cNvPr id="7" name="TextBox 6"/>
+          <p:cNvSpPr txBox="1"/>
+          <p:nvPr/>
+        </p:nvSpPr>
+        <p:spPr>
+          <a:xfrm>
+            <a:off x="914400" y="1874519"/>
+            <a:ext cx="2743200" cy="365760"/>
+          </a:xfrm>
+          <a:prstGeom prst="rect">
+            <a:avLst/>
+          </a:prstGeom>
+          <a:noFill/>
+        </p:spPr>
+        <p:txBody>
+          <a:bodyPr wrap="square" anchor="t" lIns="0" rIns="0" tIns="0" bIns="0">
+            <a:spAutoFit/>
+          </a:bodyPr>
+          <a:lstStyle/>
+          <a:p>
+            <a:pPr algn="l"/>
+            <a:r>
+              <a:rPr sz="1600" b="1">
+                <a:solidFill>
+                  <a:srgbClr val="1D7A8C"/>
+                </a:solidFill>
+                <a:latin typeface="Microsoft YaHei"/>
+              </a:rPr>
+              <a:t>要点</a:t>
+            </a:r>
+          </a:p>
+        </p:txBody>
+      </p:sp>
+      <p:sp>
+        <p:nvSpPr>
+          <p:cNvPr id="8" name="TextBox 7"/>
+          <p:cNvSpPr txBox="1"/>
+          <p:nvPr/>
+        </p:nvSpPr>
+        <p:spPr>
+          <a:xfrm>
+            <a:off x="914400" y="2377440"/>
+            <a:ext cx="5925129" cy="2267712"/>
+          </a:xfrm>
+          <a:prstGeom prst="rect">
+            <a:avLst/>
+          </a:prstGeom>
+          <a:noFill/>
+        </p:spPr>
+        <p:txBody>
+          <a:bodyPr wrap="square" lIns="0" rIns="0" tIns="0" bIns="0">
+            <a:spAutoFit/>
+          </a:bodyPr>
+          <a:lstStyle/>
+          <a:p>
+            <a:pPr>
+              <a:spcAft>
+                <a:spcPts val="1000"/>
+              </a:spcAft>
+            </a:pPr>
+            <a:r>
+              <a:rPr sz="2000">
+                <a:solidFill>
+                  <a:srgbClr val="222B33"/>
+                </a:solidFill>
+                <a:latin typeface="Microsoft YaHei"/>
+              </a:rPr>
+              <a:t>▪ 风险不只取决于用什么，还取决于怎么用</a:t>
+            </a:r>
+          </a:p>
+          <a:p>
+            <a:pPr>
+              <a:spcAft>
+                <a:spcPts val="1000"/>
+              </a:spcAft>
+            </a:pPr>
+            <a:r>
+              <a:rPr sz="2000">
+                <a:solidFill>
+                  <a:srgbClr val="222B33"/>
+                </a:solidFill>
+                <a:latin typeface="Microsoft YaHei"/>
+              </a:rPr>
+              <a:t>▪ 用量、操作方式、场所不同，风险不同</a:t>
+            </a:r>
+          </a:p>
+          <a:p>
+            <a:pPr>
+              <a:spcAft>
+                <a:spcPts val="1000"/>
+              </a:spcAft>
+            </a:pPr>
+            <a:r>
+              <a:rPr sz="2000">
+                <a:solidFill>
+                  <a:srgbClr val="222B33"/>
+                </a:solidFill>
+                <a:latin typeface="Microsoft YaHei"/>
+              </a:rPr>
+              <a:t>▪ 管理要求按实际在做的工作来定</a:t>
+            </a:r>
+          </a:p>
+          <a:p>
+            <a:pPr>
+              <a:spcAft>
+                <a:spcPts val="1000"/>
+              </a:spcAft>
+            </a:pPr>
+            <a:r>
+              <a:rPr sz="2000">
+                <a:solidFill>
+                  <a:srgbClr val="222B33"/>
+                </a:solidFill>
+                <a:latin typeface="Microsoft YaHei"/>
+              </a:rPr>
+              <a:t>▪ 改变操作方式时要重新评估</a:t>
+            </a:r>
+          </a:p>
+        </p:txBody>
+      </p:sp>
+      <p:sp>
+        <p:nvSpPr>
+          <p:cNvPr id="9" name="TextBox 8"/>
+          <p:cNvSpPr txBox="1"/>
+          <p:nvPr/>
+        </p:nvSpPr>
+        <p:spPr>
+          <a:xfrm>
+            <a:off x="914400" y="4782312"/>
+            <a:ext cx="5925129" cy="320040"/>
+          </a:xfrm>
+          <a:prstGeom prst="rect">
+            <a:avLst/>
+          </a:prstGeom>
+          <a:noFill/>
+        </p:spPr>
+        <p:txBody>
+          <a:bodyPr wrap="square" anchor="t" lIns="0" rIns="0" tIns="0" bIns="0">
+            <a:spAutoFit/>
+          </a:bodyPr>
+          <a:lstStyle/>
+          <a:p>
+            <a:pPr algn="l"/>
+            <a:r>
+              <a:rPr sz="1300" b="1">
+                <a:solidFill>
+                  <a:srgbClr val="1D7A8C"/>
+                </a:solidFill>
+                <a:latin typeface="Microsoft YaHei"/>
+              </a:rPr>
+              <a:t>说明</a:t>
+            </a:r>
+          </a:p>
+        </p:txBody>
+      </p:sp>
+      <p:sp>
+        <p:nvSpPr>
+          <p:cNvPr id="10" name="TextBox 9"/>
+          <p:cNvSpPr txBox="1"/>
+          <p:nvPr/>
+        </p:nvSpPr>
+        <p:spPr>
+          <a:xfrm>
+            <a:off x="914400" y="5148072"/>
+            <a:ext cx="5925129" cy="612648"/>
+          </a:xfrm>
+          <a:prstGeom prst="rect">
+            <a:avLst/>
+          </a:prstGeom>
+          <a:noFill/>
+        </p:spPr>
+        <p:txBody>
+          <a:bodyPr wrap="square" anchor="t" lIns="0" rIns="0" tIns="0" bIns="0">
+            <a:spAutoFit/>
+          </a:bodyPr>
+          <a:lstStyle/>
+          <a:p>
+            <a:pPr algn="l"/>
+            <a:r>
+              <a:rPr sz="1400" b="0">
+                <a:solidFill>
+                  <a:srgbClr val="5F6B75"/>
+                </a:solidFill>
+                <a:latin typeface="Microsoft YaHei"/>
+              </a:rPr>
+              <a:t>两间相邻的实验室，可能用着同一种化学品，但一间只是取几滴做显色，另一间要大量加热、回流或放大反应。前者暴露少、后果有限，后者可能产生大量蒸气、存在火灾或喷溅风险。两者的防护措施、设施要求和管理要求自然不同。</a:t>
+            </a:r>
+          </a:p>
+        </p:txBody>
+      </p:sp>
+      <p:sp>
+        <p:nvSpPr>
+          <p:cNvPr id="11" name="Rounded Rectangle 10"/>
+          <p:cNvSpPr/>
+          <p:nvPr/>
+        </p:nvSpPr>
+        <p:spPr>
+          <a:xfrm>
+            <a:off x="7571049" y="1645920"/>
+            <a:ext cx="4072006" cy="4389120"/>
+          </a:xfrm>
+          <a:prstGeom prst="roundRect">
+            <a:avLst>
+              <a:gd name="adj" fmla="val 8000"/>
+            </a:avLst>
+          </a:prstGeom>
+          <a:solidFill>
+            <a:srgbClr val="FBECEA"/>
+          </a:solidFill>
+          <a:ln>
+            <a:noFill/>
+          </a:ln>
+          <a:effectLst/>
+        </p:spPr>
+        <p:style>
+          <a:lnRef idx="1">
+            <a:schemeClr val="accent1"/>
+          </a:lnRef>
+          <a:fillRef idx="3">
+            <a:schemeClr val="accent1"/>
+          </a:fillRef>
+          <a:effectRef idx="2">
+            <a:schemeClr val="accent1"/>
+          </a:effectRef>
+          <a:fontRef idx="minor">
+            <a:schemeClr val="lt1"/>
+          </a:fontRef>
+        </p:style>
+        <p:txBody>
+          <a:bodyPr rtlCol="0" anchor="ctr"/>
+          <a:lstStyle/>
+          <a:p>
+            <a:pPr algn="ctr"/>
+          </a:p>
+        </p:txBody>
+      </p:sp>
+      <p:sp>
+        <p:nvSpPr>
+          <p:cNvPr id="12" name="Oval 11"/>
+          <p:cNvSpPr/>
+          <p:nvPr/>
+        </p:nvSpPr>
+        <p:spPr>
+          <a:xfrm>
+            <a:off x="7936809" y="1828800"/>
+            <a:ext cx="457200" cy="457200"/>
+          </a:xfrm>
+          <a:prstGeom prst="ellipse">
+            <a:avLst/>
+          </a:prstGeom>
+          <a:solidFill>
+            <a:srgbClr val="C0392B"/>
+          </a:solidFill>
+          <a:ln>
+            <a:noFill/>
+          </a:ln>
+          <a:effectLst/>
+        </p:spPr>
+        <p:style>
+          <a:lnRef idx="1">
+            <a:schemeClr val="accent1"/>
+          </a:lnRef>
+          <a:fillRef idx="3">
+            <a:schemeClr val="accent1"/>
+          </a:fillRef>
+          <a:effectRef idx="2">
+            <a:schemeClr val="accent1"/>
+          </a:effectRef>
+          <a:fontRef idx="minor">
+            <a:schemeClr val="lt1"/>
+          </a:fontRef>
+        </p:style>
+        <p:txBody>
+          <a:bodyPr rtlCol="0" anchor="ctr" lIns="0" rIns="0" tIns="0" bIns="0"/>
+          <a:lstStyle/>
+          <a:p>
+            <a:pPr algn="ctr"/>
+            <a:r>
+              <a:rPr sz="1600" b="1">
+                <a:solidFill>
+                  <a:srgbClr val="FFFFFF"/>
+                </a:solidFill>
+                <a:latin typeface="Microsoft YaHei"/>
+              </a:rPr>
+              <a:t>✕</a:t>
+            </a:r>
+          </a:p>
+        </p:txBody>
+      </p:sp>
+      <p:sp>
+        <p:nvSpPr>
+          <p:cNvPr id="13" name="TextBox 12"/>
+          <p:cNvSpPr txBox="1"/>
+          <p:nvPr/>
+        </p:nvSpPr>
+        <p:spPr>
+          <a:xfrm>
+            <a:off x="8531169" y="1874519"/>
+            <a:ext cx="2791846" cy="365760"/>
+          </a:xfrm>
+          <a:prstGeom prst="rect">
+            <a:avLst/>
+          </a:prstGeom>
+          <a:noFill/>
+        </p:spPr>
+        <p:txBody>
+          <a:bodyPr wrap="square" anchor="t" lIns="0" rIns="0" tIns="0" bIns="0">
+            <a:spAutoFit/>
+          </a:bodyPr>
+          <a:lstStyle/>
+          <a:p>
+            <a:pPr algn="l"/>
+            <a:r>
+              <a:rPr sz="1600" b="1">
+                <a:solidFill>
+                  <a:srgbClr val="C0392B"/>
+                </a:solidFill>
+                <a:latin typeface="Microsoft YaHei"/>
+              </a:rPr>
+              <a:t>常见错误</a:t>
+            </a:r>
+          </a:p>
+        </p:txBody>
+      </p:sp>
+      <p:sp>
+        <p:nvSpPr>
+          <p:cNvPr id="14" name="TextBox 13"/>
+          <p:cNvSpPr txBox="1"/>
+          <p:nvPr/>
+        </p:nvSpPr>
+        <p:spPr>
+          <a:xfrm>
+            <a:off x="7936809" y="2514600"/>
+            <a:ext cx="3340486" cy="3291840"/>
+          </a:xfrm>
+          <a:prstGeom prst="rect">
+            <a:avLst/>
+          </a:prstGeom>
+          <a:noFill/>
+        </p:spPr>
+        <p:txBody>
+          <a:bodyPr wrap="square" lIns="0" rIns="0" tIns="0" bIns="0">
+            <a:spAutoFit/>
+          </a:bodyPr>
+          <a:lstStyle/>
+          <a:p>
+            <a:pPr>
+              <a:spcAft>
+                <a:spcPts val="1000"/>
+              </a:spcAft>
+            </a:pPr>
+            <a:r>
+              <a:rPr sz="1500">
+                <a:solidFill>
+                  <a:srgbClr val="222B33"/>
+                </a:solidFill>
+                <a:latin typeface="Microsoft YaHei"/>
+              </a:rPr>
+              <a:t>▪ 照搬别的实验室的防护要求，不看自己的实际操作</a:t>
+            </a:r>
+          </a:p>
+          <a:p>
+            <a:pPr>
+              <a:spcAft>
+                <a:spcPts val="1000"/>
+              </a:spcAft>
+            </a:pPr>
+            <a:r>
+              <a:rPr sz="1500">
+                <a:solidFill>
+                  <a:srgbClr val="222B33"/>
+                </a:solidFill>
+                <a:latin typeface="Microsoft YaHei"/>
+              </a:rPr>
+              <a:t>▪ 实验放大后仍沿用小量实验的防护措施</a:t>
+            </a:r>
+          </a:p>
+        </p:txBody>
+      </p:sp>
+    </p:spTree>
+  </p:cSld>
+  <p:clrMapOvr>
+    <a:masterClrMapping/>
+  </p:clrMapOvr>
+</p:sld>
+</file>
+
+<file path=ppt/slides/slide41.xml><?xml version="1.0" encoding="utf-8"?>
+<p:sld xmlns:a="http://schemas.openxmlformats.org/drawingml/2006/main" xmlns:p="http://schemas.openxmlformats.org/presentationml/2006/main" xmlns:r="http://schemas.openxmlformats.org/officeDocument/2006/relationships">
+  <p:cSld>
+    <p:bg>
+      <p:bgPr>
+        <a:solidFill>
+          <a:srgbClr val="FFFFFF"/>
+        </a:solidFill>
+        <a:effectLst/>
+      </p:bgPr>
+    </p:bg>
+    <p:spTree>
+      <p:nvGrpSpPr>
+        <p:cNvPr id="1" name=""/>
+        <p:cNvGrpSpPr/>
+        <p:nvPr/>
+      </p:nvGrpSpPr>
+      <p:grpSpPr/>
+      <p:sp>
+        <p:nvSpPr>
+          <p:cNvPr id="2" name="TextBox 1"/>
+          <p:cNvSpPr txBox="1"/>
+          <p:nvPr/>
+        </p:nvSpPr>
+        <p:spPr>
+          <a:xfrm>
+            <a:off x="548640" y="320040"/>
+            <a:ext cx="8229600" cy="320040"/>
+          </a:xfrm>
+          <a:prstGeom prst="rect">
+            <a:avLst/>
+          </a:prstGeom>
+          <a:noFill/>
+        </p:spPr>
+        <p:txBody>
+          <a:bodyPr wrap="square" anchor="t" lIns="0" rIns="0" tIns="0" bIns="0">
+            <a:spAutoFit/>
+          </a:bodyPr>
+          <a:lstStyle/>
+          <a:p>
+            <a:pPr algn="l"/>
+            <a:r>
+              <a:rPr sz="1200" b="1">
+                <a:solidFill>
+                  <a:srgbClr val="1D7A8C"/>
+                </a:solidFill>
+                <a:latin typeface="Microsoft YaHei"/>
+              </a:rPr>
+              <a:t>003 · 高校实验室安全规范与检查</a:t>
+            </a:r>
+          </a:p>
+        </p:txBody>
+      </p:sp>
+      <p:sp>
+        <p:nvSpPr>
+          <p:cNvPr id="3" name="TextBox 2"/>
+          <p:cNvSpPr txBox="1"/>
+          <p:nvPr/>
+        </p:nvSpPr>
+        <p:spPr>
+          <a:xfrm>
+            <a:off x="548640" y="640080"/>
+            <a:ext cx="11094415" cy="731520"/>
+          </a:xfrm>
+          <a:prstGeom prst="rect">
+            <a:avLst/>
+          </a:prstGeom>
+          <a:noFill/>
+        </p:spPr>
+        <p:txBody>
+          <a:bodyPr wrap="square" anchor="t" lIns="0" rIns="0" tIns="0" bIns="0">
+            <a:spAutoFit/>
+          </a:bodyPr>
+          <a:lstStyle/>
+          <a:p>
+            <a:pPr algn="l"/>
+            <a:r>
+              <a:rPr sz="3000" b="1">
+                <a:solidFill>
+                  <a:srgbClr val="0B3C5D"/>
+                </a:solidFill>
+                <a:latin typeface="Microsoft YaHei"/>
+              </a:rPr>
+              <a:t>门口信息牌写明主要危险</a:t>
+            </a:r>
+          </a:p>
+        </p:txBody>
+      </p:sp>
+      <p:sp>
+        <p:nvSpPr>
+          <p:cNvPr id="4" name="TextBox 3"/>
+          <p:cNvSpPr txBox="1"/>
+          <p:nvPr/>
+        </p:nvSpPr>
+        <p:spPr>
+          <a:xfrm>
+            <a:off x="548640" y="6446520"/>
+            <a:ext cx="7315200" cy="274320"/>
+          </a:xfrm>
+          <a:prstGeom prst="rect">
+            <a:avLst/>
+          </a:prstGeom>
+          <a:noFill/>
+        </p:spPr>
+        <p:txBody>
+          <a:bodyPr wrap="square" anchor="t" lIns="0" rIns="0" tIns="0" bIns="0">
+            <a:spAutoFit/>
+          </a:bodyPr>
+          <a:lstStyle/>
+          <a:p>
+            <a:pPr algn="l"/>
+            <a:r>
+              <a:rPr sz="1000" b="0">
+                <a:solidFill>
+                  <a:srgbClr val="5F6B75"/>
+                </a:solidFill>
+                <a:latin typeface="Microsoft YaHei"/>
+              </a:rPr>
+              <a:t>《高校实验室安全》 003 高校实验室安全规范与检查</a:t>
+            </a:r>
+          </a:p>
+        </p:txBody>
+      </p:sp>
+      <p:sp>
+        <p:nvSpPr>
+          <p:cNvPr id="5" name="Oval 4"/>
+          <p:cNvSpPr/>
+          <p:nvPr/>
+        </p:nvSpPr>
+        <p:spPr>
+          <a:xfrm>
+            <a:off x="10820095" y="411480"/>
+            <a:ext cx="822960" cy="822960"/>
+          </a:xfrm>
+          <a:prstGeom prst="ellipse">
+            <a:avLst/>
+          </a:prstGeom>
+          <a:solidFill>
+            <a:srgbClr val="F28C28"/>
+          </a:solidFill>
+          <a:ln>
+            <a:noFill/>
+          </a:ln>
+          <a:effectLst/>
+        </p:spPr>
+        <p:style>
+          <a:lnRef idx="1">
+            <a:schemeClr val="accent1"/>
+          </a:lnRef>
+          <a:fillRef idx="3">
+            <a:schemeClr val="accent1"/>
+          </a:fillRef>
+          <a:effectRef idx="2">
+            <a:schemeClr val="accent1"/>
+          </a:effectRef>
+          <a:fontRef idx="minor">
+            <a:schemeClr val="lt1"/>
+          </a:fontRef>
+        </p:style>
+        <p:txBody>
+          <a:bodyPr rtlCol="0" anchor="ctr" lIns="0" rIns="0" tIns="0" bIns="0"/>
+          <a:lstStyle/>
+          <a:p>
+            <a:pPr algn="ctr"/>
+            <a:r>
+              <a:rPr sz="1800" b="1">
+                <a:solidFill>
+                  <a:srgbClr val="FFFFFF"/>
+                </a:solidFill>
+                <a:latin typeface="Microsoft YaHei"/>
+              </a:rPr>
+              <a:t>K3</a:t>
+            </a:r>
+          </a:p>
+        </p:txBody>
+      </p:sp>
+      <p:sp>
+        <p:nvSpPr>
+          <p:cNvPr id="6" name="Rounded Rectangle 5"/>
+          <p:cNvSpPr/>
+          <p:nvPr/>
+        </p:nvSpPr>
+        <p:spPr>
+          <a:xfrm>
+            <a:off x="548640" y="1645920"/>
+            <a:ext cx="6656649" cy="4389120"/>
+          </a:xfrm>
+          <a:prstGeom prst="roundRect">
+            <a:avLst>
+              <a:gd name="adj" fmla="val 8000"/>
+            </a:avLst>
+          </a:prstGeom>
+          <a:solidFill>
+            <a:srgbClr val="EEF4F7"/>
+          </a:solidFill>
+          <a:ln>
+            <a:noFill/>
+          </a:ln>
+          <a:effectLst/>
+        </p:spPr>
+        <p:style>
+          <a:lnRef idx="1">
+            <a:schemeClr val="accent1"/>
+          </a:lnRef>
+          <a:fillRef idx="3">
+            <a:schemeClr val="accent1"/>
+          </a:fillRef>
+          <a:effectRef idx="2">
+            <a:schemeClr val="accent1"/>
+          </a:effectRef>
+          <a:fontRef idx="minor">
+            <a:schemeClr val="lt1"/>
+          </a:fontRef>
+        </p:style>
+        <p:txBody>
+          <a:bodyPr rtlCol="0" anchor="ctr"/>
+          <a:lstStyle/>
+          <a:p>
+            <a:pPr algn="ctr"/>
+          </a:p>
+        </p:txBody>
+      </p:sp>
+      <p:sp>
+        <p:nvSpPr>
+          <p:cNvPr id="7" name="TextBox 6"/>
+          <p:cNvSpPr txBox="1"/>
+          <p:nvPr/>
+        </p:nvSpPr>
+        <p:spPr>
+          <a:xfrm>
+            <a:off x="914400" y="1874519"/>
+            <a:ext cx="2743200" cy="365760"/>
+          </a:xfrm>
+          <a:prstGeom prst="rect">
+            <a:avLst/>
+          </a:prstGeom>
+          <a:noFill/>
+        </p:spPr>
+        <p:txBody>
+          <a:bodyPr wrap="square" anchor="t" lIns="0" rIns="0" tIns="0" bIns="0">
+            <a:spAutoFit/>
+          </a:bodyPr>
+          <a:lstStyle/>
+          <a:p>
+            <a:pPr algn="l"/>
+            <a:r>
+              <a:rPr sz="1600" b="1">
+                <a:solidFill>
+                  <a:srgbClr val="1D7A8C"/>
+                </a:solidFill>
+                <a:latin typeface="Microsoft YaHei"/>
+              </a:rPr>
+              <a:t>要点</a:t>
+            </a:r>
+          </a:p>
+        </p:txBody>
+      </p:sp>
+      <p:sp>
+        <p:nvSpPr>
+          <p:cNvPr id="8" name="TextBox 7"/>
+          <p:cNvSpPr txBox="1"/>
+          <p:nvPr/>
+        </p:nvSpPr>
+        <p:spPr>
+          <a:xfrm>
+            <a:off x="914400" y="2377440"/>
+            <a:ext cx="5925129" cy="2267712"/>
+          </a:xfrm>
+          <a:prstGeom prst="rect">
+            <a:avLst/>
+          </a:prstGeom>
+          <a:noFill/>
+        </p:spPr>
+        <p:txBody>
+          <a:bodyPr wrap="square" lIns="0" rIns="0" tIns="0" bIns="0">
+            <a:spAutoFit/>
+          </a:bodyPr>
+          <a:lstStyle/>
+          <a:p>
+            <a:pPr>
+              <a:spcAft>
+                <a:spcPts val="1000"/>
+              </a:spcAft>
+            </a:pPr>
+            <a:r>
+              <a:rPr sz="2000">
+                <a:solidFill>
+                  <a:srgbClr val="222B33"/>
+                </a:solidFill>
+                <a:latin typeface="Microsoft YaHei"/>
+              </a:rPr>
+              <a:t>▪ 实验室门口要张贴安全信息牌</a:t>
+            </a:r>
+          </a:p>
+          <a:p>
+            <a:pPr>
+              <a:spcAft>
+                <a:spcPts val="1000"/>
+              </a:spcAft>
+            </a:pPr>
+            <a:r>
+              <a:rPr sz="2000">
+                <a:solidFill>
+                  <a:srgbClr val="222B33"/>
+                </a:solidFill>
+                <a:latin typeface="Microsoft YaHei"/>
+              </a:rPr>
+              <a:t>▪ 写明危险类别、安全责任人、防护要求、应急电话</a:t>
+            </a:r>
+          </a:p>
+          <a:p>
+            <a:pPr>
+              <a:spcAft>
+                <a:spcPts val="1000"/>
+              </a:spcAft>
+            </a:pPr>
+            <a:r>
+              <a:rPr sz="2000">
+                <a:solidFill>
+                  <a:srgbClr val="222B33"/>
+                </a:solidFill>
+                <a:latin typeface="Microsoft YaHei"/>
+              </a:rPr>
+              <a:t>▪ 新进危化品要对照 SDS 及时更新</a:t>
+            </a:r>
+          </a:p>
+          <a:p>
+            <a:pPr>
+              <a:spcAft>
+                <a:spcPts val="1000"/>
+              </a:spcAft>
+            </a:pPr>
+            <a:r>
+              <a:rPr sz="2000">
+                <a:solidFill>
+                  <a:srgbClr val="222B33"/>
+                </a:solidFill>
+                <a:latin typeface="Microsoft YaHei"/>
+              </a:rPr>
+              <a:t>▪ 让救援人员进门前一看就懂</a:t>
+            </a:r>
+          </a:p>
+        </p:txBody>
+      </p:sp>
+      <p:sp>
+        <p:nvSpPr>
+          <p:cNvPr id="9" name="TextBox 8"/>
+          <p:cNvSpPr txBox="1"/>
+          <p:nvPr/>
+        </p:nvSpPr>
+        <p:spPr>
+          <a:xfrm>
+            <a:off x="914400" y="4782312"/>
+            <a:ext cx="5925129" cy="320040"/>
+          </a:xfrm>
+          <a:prstGeom prst="rect">
+            <a:avLst/>
+          </a:prstGeom>
+          <a:noFill/>
+        </p:spPr>
+        <p:txBody>
+          <a:bodyPr wrap="square" anchor="t" lIns="0" rIns="0" tIns="0" bIns="0">
+            <a:spAutoFit/>
+          </a:bodyPr>
+          <a:lstStyle/>
+          <a:p>
+            <a:pPr algn="l"/>
+            <a:r>
+              <a:rPr sz="1300" b="1">
+                <a:solidFill>
+                  <a:srgbClr val="1D7A8C"/>
+                </a:solidFill>
+                <a:latin typeface="Microsoft YaHei"/>
+              </a:rPr>
+              <a:t>说明</a:t>
+            </a:r>
+          </a:p>
+        </p:txBody>
+      </p:sp>
+      <p:sp>
+        <p:nvSpPr>
+          <p:cNvPr id="10" name="TextBox 9"/>
+          <p:cNvSpPr txBox="1"/>
+          <p:nvPr/>
+        </p:nvSpPr>
+        <p:spPr>
+          <a:xfrm>
+            <a:off x="914400" y="5148072"/>
+            <a:ext cx="5925129" cy="612648"/>
+          </a:xfrm>
+          <a:prstGeom prst="rect">
+            <a:avLst/>
+          </a:prstGeom>
+          <a:noFill/>
+        </p:spPr>
+        <p:txBody>
+          <a:bodyPr wrap="square" anchor="t" lIns="0" rIns="0" tIns="0" bIns="0">
+            <a:spAutoFit/>
+          </a:bodyPr>
+          <a:lstStyle/>
+          <a:p>
+            <a:pPr algn="l"/>
+            <a:r>
+              <a:rPr sz="1400" b="0">
+                <a:solidFill>
+                  <a:srgbClr val="5F6B75"/>
+                </a:solidFill>
+                <a:latin typeface="Microsoft YaHei"/>
+              </a:rPr>
+              <a:t>实验室应在门口等显著位置张贴安全信息牌，内容一般包括：实验室名称和安全分级，涉及的主要危险类别和相应的安全警示标志，安全责任人和联系方式，必要的防护要求，以及有效的应急联系电话（具体格式以本校规定为准）。室内还应张贴……</a:t>
+            </a:r>
+          </a:p>
+        </p:txBody>
+      </p:sp>
+      <p:sp>
+        <p:nvSpPr>
+          <p:cNvPr id="11" name="Rounded Rectangle 10"/>
+          <p:cNvSpPr/>
+          <p:nvPr/>
+        </p:nvSpPr>
+        <p:spPr>
+          <a:xfrm>
+            <a:off x="7571049" y="1645920"/>
+            <a:ext cx="4072006" cy="4389120"/>
+          </a:xfrm>
+          <a:prstGeom prst="roundRect">
+            <a:avLst>
+              <a:gd name="adj" fmla="val 8000"/>
+            </a:avLst>
+          </a:prstGeom>
+          <a:solidFill>
+            <a:srgbClr val="FBECEA"/>
+          </a:solidFill>
+          <a:ln>
+            <a:noFill/>
+          </a:ln>
+          <a:effectLst/>
+        </p:spPr>
+        <p:style>
+          <a:lnRef idx="1">
+            <a:schemeClr val="accent1"/>
+          </a:lnRef>
+          <a:fillRef idx="3">
+            <a:schemeClr val="accent1"/>
+          </a:fillRef>
+          <a:effectRef idx="2">
+            <a:schemeClr val="accent1"/>
+          </a:effectRef>
+          <a:fontRef idx="minor">
+            <a:schemeClr val="lt1"/>
+          </a:fontRef>
+        </p:style>
+        <p:txBody>
+          <a:bodyPr rtlCol="0" anchor="ctr"/>
+          <a:lstStyle/>
+          <a:p>
+            <a:pPr algn="ctr"/>
+          </a:p>
+        </p:txBody>
+      </p:sp>
+      <p:sp>
+        <p:nvSpPr>
+          <p:cNvPr id="12" name="Oval 11"/>
+          <p:cNvSpPr/>
+          <p:nvPr/>
+        </p:nvSpPr>
+        <p:spPr>
+          <a:xfrm>
+            <a:off x="7936809" y="1828800"/>
+            <a:ext cx="457200" cy="457200"/>
+          </a:xfrm>
+          <a:prstGeom prst="ellipse">
+            <a:avLst/>
+          </a:prstGeom>
+          <a:solidFill>
+            <a:srgbClr val="C0392B"/>
+          </a:solidFill>
+          <a:ln>
+            <a:noFill/>
+          </a:ln>
+          <a:effectLst/>
+        </p:spPr>
+        <p:style>
+          <a:lnRef idx="1">
+            <a:schemeClr val="accent1"/>
+          </a:lnRef>
+          <a:fillRef idx="3">
+            <a:schemeClr val="accent1"/>
+          </a:fillRef>
+          <a:effectRef idx="2">
+            <a:schemeClr val="accent1"/>
+          </a:effectRef>
+          <a:fontRef idx="minor">
+            <a:schemeClr val="lt1"/>
+          </a:fontRef>
+        </p:style>
+        <p:txBody>
+          <a:bodyPr rtlCol="0" anchor="ctr" lIns="0" rIns="0" tIns="0" bIns="0"/>
+          <a:lstStyle/>
+          <a:p>
+            <a:pPr algn="ctr"/>
+            <a:r>
+              <a:rPr sz="1600" b="1">
+                <a:solidFill>
+                  <a:srgbClr val="FFFFFF"/>
+                </a:solidFill>
+                <a:latin typeface="Microsoft YaHei"/>
+              </a:rPr>
+              <a:t>✕</a:t>
+            </a:r>
+          </a:p>
+        </p:txBody>
+      </p:sp>
+      <p:sp>
+        <p:nvSpPr>
+          <p:cNvPr id="13" name="TextBox 12"/>
+          <p:cNvSpPr txBox="1"/>
+          <p:nvPr/>
+        </p:nvSpPr>
+        <p:spPr>
+          <a:xfrm>
+            <a:off x="8531169" y="1874519"/>
+            <a:ext cx="2791846" cy="365760"/>
+          </a:xfrm>
+          <a:prstGeom prst="rect">
+            <a:avLst/>
+          </a:prstGeom>
+          <a:noFill/>
+        </p:spPr>
+        <p:txBody>
+          <a:bodyPr wrap="square" anchor="t" lIns="0" rIns="0" tIns="0" bIns="0">
+            <a:spAutoFit/>
+          </a:bodyPr>
+          <a:lstStyle/>
+          <a:p>
+            <a:pPr algn="l"/>
+            <a:r>
+              <a:rPr sz="1600" b="1">
+                <a:solidFill>
+                  <a:srgbClr val="C0392B"/>
+                </a:solidFill>
+                <a:latin typeface="Microsoft YaHei"/>
+              </a:rPr>
+              <a:t>常见错误</a:t>
+            </a:r>
+          </a:p>
+        </p:txBody>
+      </p:sp>
+      <p:sp>
+        <p:nvSpPr>
+          <p:cNvPr id="14" name="TextBox 13"/>
+          <p:cNvSpPr txBox="1"/>
+          <p:nvPr/>
+        </p:nvSpPr>
+        <p:spPr>
+          <a:xfrm>
+            <a:off x="7936809" y="2514600"/>
+            <a:ext cx="3340486" cy="3291840"/>
+          </a:xfrm>
+          <a:prstGeom prst="rect">
+            <a:avLst/>
+          </a:prstGeom>
+          <a:noFill/>
+        </p:spPr>
+        <p:txBody>
+          <a:bodyPr wrap="square" lIns="0" rIns="0" tIns="0" bIns="0">
+            <a:spAutoFit/>
+          </a:bodyPr>
+          <a:lstStyle/>
+          <a:p>
+            <a:pPr>
+              <a:spcAft>
+                <a:spcPts val="1000"/>
+              </a:spcAft>
+            </a:pPr>
+            <a:r>
+              <a:rPr sz="1500">
+                <a:solidFill>
+                  <a:srgbClr val="222B33"/>
+                </a:solidFill>
+                <a:latin typeface="Microsoft YaHei"/>
+              </a:rPr>
+              <a:t>▪ 信息牌多年不更新，责任人、电话已失效</a:t>
+            </a:r>
+          </a:p>
+          <a:p>
+            <a:pPr>
+              <a:spcAft>
+                <a:spcPts val="1000"/>
+              </a:spcAft>
+            </a:pPr>
+            <a:r>
+              <a:rPr sz="1500">
+                <a:solidFill>
+                  <a:srgbClr val="222B33"/>
+                </a:solidFill>
+                <a:latin typeface="Microsoft YaHei"/>
+              </a:rPr>
+              <a:t>▪ 新增危化品或危险实验后不更新危险类别</a:t>
+            </a:r>
+          </a:p>
+        </p:txBody>
+      </p:sp>
+    </p:spTree>
+  </p:cSld>
+  <p:clrMapOvr>
+    <a:masterClrMapping/>
+  </p:clrMapOvr>
+</p:sld>
+</file>
+
+<file path=ppt/slides/slide42.xml><?xml version="1.0" encoding="utf-8"?>
+<p:sld xmlns:a="http://schemas.openxmlformats.org/drawingml/2006/main" xmlns:p="http://schemas.openxmlformats.org/presentationml/2006/main" xmlns:r="http://schemas.openxmlformats.org/officeDocument/2006/relationships">
+  <p:cSld>
+    <p:bg>
+      <p:bgPr>
+        <a:solidFill>
+          <a:srgbClr val="FFFFFF"/>
+        </a:solidFill>
+        <a:effectLst/>
+      </p:bgPr>
+    </p:bg>
+    <p:spTree>
+      <p:nvGrpSpPr>
+        <p:cNvPr id="1" name=""/>
+        <p:cNvGrpSpPr/>
+        <p:nvPr/>
+      </p:nvGrpSpPr>
+      <p:grpSpPr/>
+      <p:sp>
+        <p:nvSpPr>
+          <p:cNvPr id="2" name="TextBox 1"/>
+          <p:cNvSpPr txBox="1"/>
+          <p:nvPr/>
+        </p:nvSpPr>
+        <p:spPr>
+          <a:xfrm>
+            <a:off x="548640" y="320040"/>
+            <a:ext cx="8229600" cy="320040"/>
+          </a:xfrm>
+          <a:prstGeom prst="rect">
+            <a:avLst/>
+          </a:prstGeom>
+          <a:noFill/>
+        </p:spPr>
+        <p:txBody>
+          <a:bodyPr wrap="square" anchor="t" lIns="0" rIns="0" tIns="0" bIns="0">
+            <a:spAutoFit/>
+          </a:bodyPr>
+          <a:lstStyle/>
+          <a:p>
+            <a:pPr algn="l"/>
+            <a:r>
+              <a:rPr sz="1200" b="1">
+                <a:solidFill>
+                  <a:srgbClr val="1D7A8C"/>
+                </a:solidFill>
+                <a:latin typeface="Microsoft YaHei"/>
+              </a:rPr>
+              <a:t>003 · 高校实验室安全规范与检查</a:t>
+            </a:r>
+          </a:p>
+        </p:txBody>
+      </p:sp>
+      <p:sp>
+        <p:nvSpPr>
+          <p:cNvPr id="3" name="TextBox 2"/>
+          <p:cNvSpPr txBox="1"/>
+          <p:nvPr/>
+        </p:nvSpPr>
+        <p:spPr>
+          <a:xfrm>
+            <a:off x="548640" y="640080"/>
+            <a:ext cx="11094415" cy="731520"/>
+          </a:xfrm>
+          <a:prstGeom prst="rect">
+            <a:avLst/>
+          </a:prstGeom>
+          <a:noFill/>
+        </p:spPr>
+        <p:txBody>
+          <a:bodyPr wrap="square" anchor="t" lIns="0" rIns="0" tIns="0" bIns="0">
+            <a:spAutoFit/>
+          </a:bodyPr>
+          <a:lstStyle/>
+          <a:p>
+            <a:pPr algn="l"/>
+            <a:r>
+              <a:rPr sz="3000" b="1">
+                <a:solidFill>
+                  <a:srgbClr val="0B3C5D"/>
+                </a:solidFill>
+                <a:latin typeface="Microsoft YaHei"/>
+              </a:rPr>
+              <a:t>安全承诺要落到行动</a:t>
+            </a:r>
+          </a:p>
+        </p:txBody>
+      </p:sp>
+      <p:sp>
+        <p:nvSpPr>
+          <p:cNvPr id="4" name="TextBox 3"/>
+          <p:cNvSpPr txBox="1"/>
+          <p:nvPr/>
+        </p:nvSpPr>
+        <p:spPr>
+          <a:xfrm>
+            <a:off x="548640" y="6446520"/>
+            <a:ext cx="7315200" cy="274320"/>
+          </a:xfrm>
+          <a:prstGeom prst="rect">
+            <a:avLst/>
+          </a:prstGeom>
+          <a:noFill/>
+        </p:spPr>
+        <p:txBody>
+          <a:bodyPr wrap="square" anchor="t" lIns="0" rIns="0" tIns="0" bIns="0">
+            <a:spAutoFit/>
+          </a:bodyPr>
+          <a:lstStyle/>
+          <a:p>
+            <a:pPr algn="l"/>
+            <a:r>
+              <a:rPr sz="1000" b="0">
+                <a:solidFill>
+                  <a:srgbClr val="5F6B75"/>
+                </a:solidFill>
+                <a:latin typeface="Microsoft YaHei"/>
+              </a:rPr>
+              <a:t>《高校实验室安全》 003 高校实验室安全规范与检查</a:t>
+            </a:r>
+          </a:p>
+        </p:txBody>
+      </p:sp>
+      <p:sp>
+        <p:nvSpPr>
+          <p:cNvPr id="5" name="Oval 4"/>
+          <p:cNvSpPr/>
+          <p:nvPr/>
+        </p:nvSpPr>
+        <p:spPr>
+          <a:xfrm>
+            <a:off x="10820095" y="411480"/>
+            <a:ext cx="822960" cy="822960"/>
+          </a:xfrm>
+          <a:prstGeom prst="ellipse">
+            <a:avLst/>
+          </a:prstGeom>
+          <a:solidFill>
+            <a:srgbClr val="F28C28"/>
+          </a:solidFill>
+          <a:ln>
+            <a:noFill/>
+          </a:ln>
+          <a:effectLst/>
+        </p:spPr>
+        <p:style>
+          <a:lnRef idx="1">
+            <a:schemeClr val="accent1"/>
+          </a:lnRef>
+          <a:fillRef idx="3">
+            <a:schemeClr val="accent1"/>
+          </a:fillRef>
+          <a:effectRef idx="2">
+            <a:schemeClr val="accent1"/>
+          </a:effectRef>
+          <a:fontRef idx="minor">
+            <a:schemeClr val="lt1"/>
+          </a:fontRef>
+        </p:style>
+        <p:txBody>
+          <a:bodyPr rtlCol="0" anchor="ctr" lIns="0" rIns="0" tIns="0" bIns="0"/>
+          <a:lstStyle/>
+          <a:p>
+            <a:pPr algn="ctr"/>
+            <a:r>
+              <a:rPr sz="1800" b="1">
+                <a:solidFill>
+                  <a:srgbClr val="FFFFFF"/>
+                </a:solidFill>
+                <a:latin typeface="Microsoft YaHei"/>
+              </a:rPr>
+              <a:t>K4</a:t>
+            </a:r>
+          </a:p>
+        </p:txBody>
+      </p:sp>
+      <p:sp>
+        <p:nvSpPr>
+          <p:cNvPr id="6" name="Rounded Rectangle 5"/>
+          <p:cNvSpPr/>
+          <p:nvPr/>
+        </p:nvSpPr>
+        <p:spPr>
+          <a:xfrm>
+            <a:off x="548640" y="1645920"/>
+            <a:ext cx="6656649" cy="4389120"/>
+          </a:xfrm>
+          <a:prstGeom prst="roundRect">
+            <a:avLst>
+              <a:gd name="adj" fmla="val 8000"/>
+            </a:avLst>
+          </a:prstGeom>
+          <a:solidFill>
+            <a:srgbClr val="EEF4F7"/>
+          </a:solidFill>
+          <a:ln>
+            <a:noFill/>
+          </a:ln>
+          <a:effectLst/>
+        </p:spPr>
+        <p:style>
+          <a:lnRef idx="1">
+            <a:schemeClr val="accent1"/>
+          </a:lnRef>
+          <a:fillRef idx="3">
+            <a:schemeClr val="accent1"/>
+          </a:fillRef>
+          <a:effectRef idx="2">
+            <a:schemeClr val="accent1"/>
+          </a:effectRef>
+          <a:fontRef idx="minor">
+            <a:schemeClr val="lt1"/>
+          </a:fontRef>
+        </p:style>
+        <p:txBody>
+          <a:bodyPr rtlCol="0" anchor="ctr"/>
+          <a:lstStyle/>
+          <a:p>
+            <a:pPr algn="ctr"/>
+          </a:p>
+        </p:txBody>
+      </p:sp>
+      <p:sp>
+        <p:nvSpPr>
+          <p:cNvPr id="7" name="TextBox 6"/>
+          <p:cNvSpPr txBox="1"/>
+          <p:nvPr/>
+        </p:nvSpPr>
+        <p:spPr>
+          <a:xfrm>
+            <a:off x="914400" y="1874519"/>
+            <a:ext cx="2743200" cy="365760"/>
+          </a:xfrm>
+          <a:prstGeom prst="rect">
+            <a:avLst/>
+          </a:prstGeom>
+          <a:noFill/>
+        </p:spPr>
+        <p:txBody>
+          <a:bodyPr wrap="square" anchor="t" lIns="0" rIns="0" tIns="0" bIns="0">
+            <a:spAutoFit/>
+          </a:bodyPr>
+          <a:lstStyle/>
+          <a:p>
+            <a:pPr algn="l"/>
+            <a:r>
+              <a:rPr sz="1600" b="1">
+                <a:solidFill>
+                  <a:srgbClr val="1D7A8C"/>
+                </a:solidFill>
+                <a:latin typeface="Microsoft YaHei"/>
+              </a:rPr>
+              <a:t>要点</a:t>
+            </a:r>
+          </a:p>
+        </p:txBody>
+      </p:sp>
+      <p:sp>
+        <p:nvSpPr>
+          <p:cNvPr id="8" name="TextBox 7"/>
+          <p:cNvSpPr txBox="1"/>
+          <p:nvPr/>
+        </p:nvSpPr>
+        <p:spPr>
+          <a:xfrm>
+            <a:off x="914400" y="2377440"/>
+            <a:ext cx="5925129" cy="2267712"/>
+          </a:xfrm>
+          <a:prstGeom prst="rect">
+            <a:avLst/>
+          </a:prstGeom>
+          <a:noFill/>
+        </p:spPr>
+        <p:txBody>
+          <a:bodyPr wrap="square" lIns="0" rIns="0" tIns="0" bIns="0">
+            <a:spAutoFit/>
+          </a:bodyPr>
+          <a:lstStyle/>
+          <a:p>
+            <a:pPr>
+              <a:spcAft>
+                <a:spcPts val="1000"/>
+              </a:spcAft>
+            </a:pPr>
+            <a:r>
+              <a:rPr sz="2000">
+                <a:solidFill>
+                  <a:srgbClr val="222B33"/>
+                </a:solidFill>
+                <a:latin typeface="Microsoft YaHei"/>
+              </a:rPr>
+              <a:t>▪ 进入实验室前签订安全承诺书</a:t>
+            </a:r>
+          </a:p>
+          <a:p>
+            <a:pPr>
+              <a:spcAft>
+                <a:spcPts val="1000"/>
+              </a:spcAft>
+            </a:pPr>
+            <a:r>
+              <a:rPr sz="2000">
+                <a:solidFill>
+                  <a:srgbClr val="222B33"/>
+                </a:solidFill>
+                <a:latin typeface="Microsoft YaHei"/>
+              </a:rPr>
+              <a:t>▪ 签了不等于做了，不能签完就算</a:t>
+            </a:r>
+          </a:p>
+          <a:p>
+            <a:pPr>
+              <a:spcAft>
+                <a:spcPts val="1000"/>
+              </a:spcAft>
+            </a:pPr>
+            <a:r>
+              <a:rPr sz="2000">
+                <a:solidFill>
+                  <a:srgbClr val="222B33"/>
+                </a:solidFill>
+                <a:latin typeface="Microsoft YaHei"/>
+              </a:rPr>
+              <a:t>▪ 每天进门穿好防护、查看记录</a:t>
+            </a:r>
+          </a:p>
+          <a:p>
+            <a:pPr>
+              <a:spcAft>
+                <a:spcPts val="1000"/>
+              </a:spcAft>
+            </a:pPr>
+            <a:r>
+              <a:rPr sz="2000">
+                <a:solidFill>
+                  <a:srgbClr val="222B33"/>
+                </a:solidFill>
+                <a:latin typeface="Microsoft YaHei"/>
+              </a:rPr>
+              <a:t>▪ 离开前关水、关电、关气、关门窗</a:t>
+            </a:r>
+          </a:p>
+        </p:txBody>
+      </p:sp>
+      <p:sp>
+        <p:nvSpPr>
+          <p:cNvPr id="9" name="TextBox 8"/>
+          <p:cNvSpPr txBox="1"/>
+          <p:nvPr/>
+        </p:nvSpPr>
+        <p:spPr>
+          <a:xfrm>
+            <a:off x="914400" y="4782312"/>
+            <a:ext cx="5925129" cy="320040"/>
+          </a:xfrm>
+          <a:prstGeom prst="rect">
+            <a:avLst/>
+          </a:prstGeom>
+          <a:noFill/>
+        </p:spPr>
+        <p:txBody>
+          <a:bodyPr wrap="square" anchor="t" lIns="0" rIns="0" tIns="0" bIns="0">
+            <a:spAutoFit/>
+          </a:bodyPr>
+          <a:lstStyle/>
+          <a:p>
+            <a:pPr algn="l"/>
+            <a:r>
+              <a:rPr sz="1300" b="1">
+                <a:solidFill>
+                  <a:srgbClr val="1D7A8C"/>
+                </a:solidFill>
+                <a:latin typeface="Microsoft YaHei"/>
+              </a:rPr>
+              <a:t>说明</a:t>
+            </a:r>
+          </a:p>
+        </p:txBody>
+      </p:sp>
+      <p:sp>
+        <p:nvSpPr>
+          <p:cNvPr id="10" name="TextBox 9"/>
+          <p:cNvSpPr txBox="1"/>
+          <p:nvPr/>
+        </p:nvSpPr>
+        <p:spPr>
+          <a:xfrm>
+            <a:off x="914400" y="5148072"/>
+            <a:ext cx="5925129" cy="612648"/>
+          </a:xfrm>
+          <a:prstGeom prst="rect">
+            <a:avLst/>
+          </a:prstGeom>
+          <a:noFill/>
+        </p:spPr>
+        <p:txBody>
+          <a:bodyPr wrap="square" anchor="t" lIns="0" rIns="0" tIns="0" bIns="0">
+            <a:spAutoFit/>
+          </a:bodyPr>
+          <a:lstStyle/>
+          <a:p>
+            <a:pPr algn="l"/>
+            <a:r>
+              <a:rPr sz="1400" b="0">
+                <a:solidFill>
+                  <a:srgbClr val="5F6B75"/>
+                </a:solidFill>
+                <a:latin typeface="Microsoft YaHei"/>
+              </a:rPr>
+              <a:t>很多高校要求进入实验室的人员签订安全承诺书（或安全责任书），承诺遵守学校和实验室的安全制度、规范操作、及时报告隐患。签字是一种郑重的承诺，也意味着本人知晓并愿意承担相应责任。</a:t>
+            </a:r>
+          </a:p>
+        </p:txBody>
+      </p:sp>
+      <p:sp>
+        <p:nvSpPr>
+          <p:cNvPr id="11" name="Rounded Rectangle 10"/>
+          <p:cNvSpPr/>
+          <p:nvPr/>
+        </p:nvSpPr>
+        <p:spPr>
+          <a:xfrm>
+            <a:off x="7571049" y="1645920"/>
+            <a:ext cx="4072006" cy="4389120"/>
+          </a:xfrm>
+          <a:prstGeom prst="roundRect">
+            <a:avLst>
+              <a:gd name="adj" fmla="val 8000"/>
+            </a:avLst>
+          </a:prstGeom>
+          <a:solidFill>
+            <a:srgbClr val="FBECEA"/>
+          </a:solidFill>
+          <a:ln>
+            <a:noFill/>
+          </a:ln>
+          <a:effectLst/>
+        </p:spPr>
+        <p:style>
+          <a:lnRef idx="1">
+            <a:schemeClr val="accent1"/>
+          </a:lnRef>
+          <a:fillRef idx="3">
+            <a:schemeClr val="accent1"/>
+          </a:fillRef>
+          <a:effectRef idx="2">
+            <a:schemeClr val="accent1"/>
+          </a:effectRef>
+          <a:fontRef idx="minor">
+            <a:schemeClr val="lt1"/>
+          </a:fontRef>
+        </p:style>
+        <p:txBody>
+          <a:bodyPr rtlCol="0" anchor="ctr"/>
+          <a:lstStyle/>
+          <a:p>
+            <a:pPr algn="ctr"/>
+          </a:p>
+        </p:txBody>
+      </p:sp>
+      <p:sp>
+        <p:nvSpPr>
+          <p:cNvPr id="12" name="Oval 11"/>
+          <p:cNvSpPr/>
+          <p:nvPr/>
+        </p:nvSpPr>
+        <p:spPr>
+          <a:xfrm>
+            <a:off x="7936809" y="1828800"/>
+            <a:ext cx="457200" cy="457200"/>
+          </a:xfrm>
+          <a:prstGeom prst="ellipse">
+            <a:avLst/>
+          </a:prstGeom>
+          <a:solidFill>
+            <a:srgbClr val="C0392B"/>
+          </a:solidFill>
+          <a:ln>
+            <a:noFill/>
+          </a:ln>
+          <a:effectLst/>
+        </p:spPr>
+        <p:style>
+          <a:lnRef idx="1">
+            <a:schemeClr val="accent1"/>
+          </a:lnRef>
+          <a:fillRef idx="3">
+            <a:schemeClr val="accent1"/>
+          </a:fillRef>
+          <a:effectRef idx="2">
+            <a:schemeClr val="accent1"/>
+          </a:effectRef>
+          <a:fontRef idx="minor">
+            <a:schemeClr val="lt1"/>
+          </a:fontRef>
+        </p:style>
+        <p:txBody>
+          <a:bodyPr rtlCol="0" anchor="ctr" lIns="0" rIns="0" tIns="0" bIns="0"/>
+          <a:lstStyle/>
+          <a:p>
+            <a:pPr algn="ctr"/>
+            <a:r>
+              <a:rPr sz="1600" b="1">
+                <a:solidFill>
+                  <a:srgbClr val="FFFFFF"/>
+                </a:solidFill>
+                <a:latin typeface="Microsoft YaHei"/>
+              </a:rPr>
+              <a:t>✕</a:t>
+            </a:r>
+          </a:p>
+        </p:txBody>
+      </p:sp>
+      <p:sp>
+        <p:nvSpPr>
+          <p:cNvPr id="13" name="TextBox 12"/>
+          <p:cNvSpPr txBox="1"/>
+          <p:nvPr/>
+        </p:nvSpPr>
+        <p:spPr>
+          <a:xfrm>
+            <a:off x="8531169" y="1874519"/>
+            <a:ext cx="2791846" cy="365760"/>
+          </a:xfrm>
+          <a:prstGeom prst="rect">
+            <a:avLst/>
+          </a:prstGeom>
+          <a:noFill/>
+        </p:spPr>
+        <p:txBody>
+          <a:bodyPr wrap="square" anchor="t" lIns="0" rIns="0" tIns="0" bIns="0">
+            <a:spAutoFit/>
+          </a:bodyPr>
+          <a:lstStyle/>
+          <a:p>
+            <a:pPr algn="l"/>
+            <a:r>
+              <a:rPr sz="1600" b="1">
+                <a:solidFill>
+                  <a:srgbClr val="C0392B"/>
+                </a:solidFill>
+                <a:latin typeface="Microsoft YaHei"/>
+              </a:rPr>
+              <a:t>常见错误</a:t>
+            </a:r>
+          </a:p>
+        </p:txBody>
+      </p:sp>
+      <p:sp>
+        <p:nvSpPr>
+          <p:cNvPr id="14" name="TextBox 13"/>
+          <p:cNvSpPr txBox="1"/>
+          <p:nvPr/>
+        </p:nvSpPr>
+        <p:spPr>
+          <a:xfrm>
+            <a:off x="7936809" y="2514600"/>
+            <a:ext cx="3340486" cy="3291840"/>
+          </a:xfrm>
+          <a:prstGeom prst="rect">
+            <a:avLst/>
+          </a:prstGeom>
+          <a:noFill/>
+        </p:spPr>
+        <p:txBody>
+          <a:bodyPr wrap="square" lIns="0" rIns="0" tIns="0" bIns="0">
+            <a:spAutoFit/>
+          </a:bodyPr>
+          <a:lstStyle/>
+          <a:p>
+            <a:pPr>
+              <a:spcAft>
+                <a:spcPts val="1000"/>
+              </a:spcAft>
+            </a:pPr>
+            <a:r>
+              <a:rPr sz="1500">
+                <a:solidFill>
+                  <a:srgbClr val="222B33"/>
+                </a:solidFill>
+                <a:latin typeface="Microsoft YaHei"/>
+              </a:rPr>
+              <a:t>▪ 签完承诺书就忘，实际行为不变</a:t>
+            </a:r>
+          </a:p>
+          <a:p>
+            <a:pPr>
+              <a:spcAft>
+                <a:spcPts val="1000"/>
+              </a:spcAft>
+            </a:pPr>
+            <a:r>
+              <a:rPr sz="1500">
+                <a:solidFill>
+                  <a:srgbClr val="222B33"/>
+                </a:solidFill>
+                <a:latin typeface="Microsoft YaHei"/>
+              </a:rPr>
+              <a:t>▪ 最后离开的人不做关水关电检查</a:t>
+            </a:r>
+          </a:p>
+        </p:txBody>
+      </p:sp>
+    </p:spTree>
+  </p:cSld>
+  <p:clrMapOvr>
+    <a:masterClrMapping/>
+  </p:clrMapOvr>
+</p:sld>
+</file>
+
+<file path=ppt/slides/slide43.xml><?xml version="1.0" encoding="utf-8"?>
+<p:sld xmlns:a="http://schemas.openxmlformats.org/drawingml/2006/main" xmlns:p="http://schemas.openxmlformats.org/presentationml/2006/main" xmlns:r="http://schemas.openxmlformats.org/officeDocument/2006/relationships">
+  <p:cSld>
+    <p:bg>
+      <p:bgPr>
+        <a:solidFill>
+          <a:srgbClr val="FFFFFF"/>
+        </a:solidFill>
+        <a:effectLst/>
+      </p:bgPr>
+    </p:bg>
+    <p:spTree>
+      <p:nvGrpSpPr>
+        <p:cNvPr id="1" name=""/>
+        <p:cNvGrpSpPr/>
+        <p:nvPr/>
+      </p:nvGrpSpPr>
+      <p:grpSpPr/>
+      <p:sp>
+        <p:nvSpPr>
+          <p:cNvPr id="2" name="TextBox 1"/>
+          <p:cNvSpPr txBox="1"/>
+          <p:nvPr/>
+        </p:nvSpPr>
+        <p:spPr>
+          <a:xfrm>
+            <a:off x="548640" y="320040"/>
+            <a:ext cx="8229600" cy="320040"/>
+          </a:xfrm>
+          <a:prstGeom prst="rect">
+            <a:avLst/>
+          </a:prstGeom>
+          <a:noFill/>
+        </p:spPr>
+        <p:txBody>
+          <a:bodyPr wrap="square" anchor="t" lIns="0" rIns="0" tIns="0" bIns="0">
+            <a:spAutoFit/>
+          </a:bodyPr>
+          <a:lstStyle/>
+          <a:p>
+            <a:pPr algn="l"/>
+            <a:r>
+              <a:rPr sz="1200" b="1">
+                <a:solidFill>
+                  <a:srgbClr val="1D7A8C"/>
+                </a:solidFill>
+                <a:latin typeface="Microsoft YaHei"/>
+              </a:rPr>
+              <a:t>003 · 高校实验室安全规范与检查</a:t>
+            </a:r>
+          </a:p>
+        </p:txBody>
+      </p:sp>
+      <p:sp>
+        <p:nvSpPr>
+          <p:cNvPr id="3" name="TextBox 2"/>
+          <p:cNvSpPr txBox="1"/>
+          <p:nvPr/>
+        </p:nvSpPr>
+        <p:spPr>
+          <a:xfrm>
+            <a:off x="548640" y="640080"/>
+            <a:ext cx="11094415" cy="731520"/>
+          </a:xfrm>
+          <a:prstGeom prst="rect">
+            <a:avLst/>
+          </a:prstGeom>
+          <a:noFill/>
+        </p:spPr>
+        <p:txBody>
+          <a:bodyPr wrap="square" anchor="t" lIns="0" rIns="0" tIns="0" bIns="0">
+            <a:spAutoFit/>
+          </a:bodyPr>
+          <a:lstStyle/>
+          <a:p>
+            <a:pPr algn="l"/>
+            <a:r>
+              <a:rPr sz="3000" b="1">
+                <a:solidFill>
+                  <a:srgbClr val="0B3C5D"/>
+                </a:solidFill>
+                <a:latin typeface="Microsoft YaHei"/>
+              </a:rPr>
+              <a:t>检查项目表的结构与重点</a:t>
+            </a:r>
+          </a:p>
+        </p:txBody>
+      </p:sp>
+      <p:sp>
+        <p:nvSpPr>
+          <p:cNvPr id="4" name="TextBox 3"/>
+          <p:cNvSpPr txBox="1"/>
+          <p:nvPr/>
+        </p:nvSpPr>
+        <p:spPr>
+          <a:xfrm>
+            <a:off x="548640" y="6446520"/>
+            <a:ext cx="7315200" cy="274320"/>
+          </a:xfrm>
+          <a:prstGeom prst="rect">
+            <a:avLst/>
+          </a:prstGeom>
+          <a:noFill/>
+        </p:spPr>
+        <p:txBody>
+          <a:bodyPr wrap="square" anchor="t" lIns="0" rIns="0" tIns="0" bIns="0">
+            <a:spAutoFit/>
+          </a:bodyPr>
+          <a:lstStyle/>
+          <a:p>
+            <a:pPr algn="l"/>
+            <a:r>
+              <a:rPr sz="1000" b="0">
+                <a:solidFill>
+                  <a:srgbClr val="5F6B75"/>
+                </a:solidFill>
+                <a:latin typeface="Microsoft YaHei"/>
+              </a:rPr>
+              <a:t>《高校实验室安全》 003 高校实验室安全规范与检查</a:t>
+            </a:r>
+          </a:p>
+        </p:txBody>
+      </p:sp>
+      <p:sp>
+        <p:nvSpPr>
+          <p:cNvPr id="5" name="Oval 4"/>
+          <p:cNvSpPr/>
+          <p:nvPr/>
+        </p:nvSpPr>
+        <p:spPr>
+          <a:xfrm>
+            <a:off x="10820095" y="411480"/>
+            <a:ext cx="822960" cy="822960"/>
+          </a:xfrm>
+          <a:prstGeom prst="ellipse">
+            <a:avLst/>
+          </a:prstGeom>
+          <a:solidFill>
+            <a:srgbClr val="F28C28"/>
+          </a:solidFill>
+          <a:ln>
+            <a:noFill/>
+          </a:ln>
+          <a:effectLst/>
+        </p:spPr>
+        <p:style>
+          <a:lnRef idx="1">
+            <a:schemeClr val="accent1"/>
+          </a:lnRef>
+          <a:fillRef idx="3">
+            <a:schemeClr val="accent1"/>
+          </a:fillRef>
+          <a:effectRef idx="2">
+            <a:schemeClr val="accent1"/>
+          </a:effectRef>
+          <a:fontRef idx="minor">
+            <a:schemeClr val="lt1"/>
+          </a:fontRef>
+        </p:style>
+        <p:txBody>
+          <a:bodyPr rtlCol="0" anchor="ctr" lIns="0" rIns="0" tIns="0" bIns="0"/>
+          <a:lstStyle/>
+          <a:p>
+            <a:pPr algn="ctr"/>
+            <a:r>
+              <a:rPr sz="1800" b="1">
+                <a:solidFill>
+                  <a:srgbClr val="FFFFFF"/>
+                </a:solidFill>
+                <a:latin typeface="Microsoft YaHei"/>
+              </a:rPr>
+              <a:t>S3</a:t>
+            </a:r>
+          </a:p>
+        </p:txBody>
+      </p:sp>
+      <p:sp>
+        <p:nvSpPr>
+          <p:cNvPr id="6" name="Rounded Rectangle 5"/>
+          <p:cNvSpPr/>
+          <p:nvPr/>
+        </p:nvSpPr>
+        <p:spPr>
+          <a:xfrm>
+            <a:off x="548640" y="1645920"/>
+            <a:ext cx="6656649" cy="4389120"/>
+          </a:xfrm>
+          <a:prstGeom prst="roundRect">
+            <a:avLst>
+              <a:gd name="adj" fmla="val 8000"/>
+            </a:avLst>
+          </a:prstGeom>
+          <a:solidFill>
+            <a:srgbClr val="EEF4F7"/>
+          </a:solidFill>
+          <a:ln>
+            <a:noFill/>
+          </a:ln>
+          <a:effectLst/>
+        </p:spPr>
+        <p:style>
+          <a:lnRef idx="1">
+            <a:schemeClr val="accent1"/>
+          </a:lnRef>
+          <a:fillRef idx="3">
+            <a:schemeClr val="accent1"/>
+          </a:fillRef>
+          <a:effectRef idx="2">
+            <a:schemeClr val="accent1"/>
+          </a:effectRef>
+          <a:fontRef idx="minor">
+            <a:schemeClr val="lt1"/>
+          </a:fontRef>
+        </p:style>
+        <p:txBody>
+          <a:bodyPr rtlCol="0" anchor="ctr"/>
+          <a:lstStyle/>
+          <a:p>
+            <a:pPr algn="ctr"/>
+          </a:p>
+        </p:txBody>
+      </p:sp>
+      <p:sp>
+        <p:nvSpPr>
+          <p:cNvPr id="7" name="TextBox 6"/>
+          <p:cNvSpPr txBox="1"/>
+          <p:nvPr/>
+        </p:nvSpPr>
+        <p:spPr>
+          <a:xfrm>
+            <a:off x="914400" y="1874519"/>
+            <a:ext cx="2743200" cy="365760"/>
+          </a:xfrm>
+          <a:prstGeom prst="rect">
+            <a:avLst/>
+          </a:prstGeom>
+          <a:noFill/>
+        </p:spPr>
+        <p:txBody>
+          <a:bodyPr wrap="square" anchor="t" lIns="0" rIns="0" tIns="0" bIns="0">
+            <a:spAutoFit/>
+          </a:bodyPr>
+          <a:lstStyle/>
+          <a:p>
+            <a:pPr algn="l"/>
+            <a:r>
+              <a:rPr sz="1600" b="1">
+                <a:solidFill>
+                  <a:srgbClr val="1D7A8C"/>
+                </a:solidFill>
+                <a:latin typeface="Microsoft YaHei"/>
+              </a:rPr>
+              <a:t>要点</a:t>
+            </a:r>
+          </a:p>
+        </p:txBody>
+      </p:sp>
+      <p:sp>
+        <p:nvSpPr>
+          <p:cNvPr id="8" name="TextBox 7"/>
+          <p:cNvSpPr txBox="1"/>
+          <p:nvPr/>
+        </p:nvSpPr>
+        <p:spPr>
+          <a:xfrm>
+            <a:off x="914400" y="2377440"/>
+            <a:ext cx="5925129" cy="2267712"/>
+          </a:xfrm>
+          <a:prstGeom prst="rect">
+            <a:avLst/>
+          </a:prstGeom>
+          <a:noFill/>
+        </p:spPr>
+        <p:txBody>
+          <a:bodyPr wrap="square" lIns="0" rIns="0" tIns="0" bIns="0">
+            <a:spAutoFit/>
+          </a:bodyPr>
+          <a:lstStyle/>
+          <a:p>
+            <a:pPr>
+              <a:spcAft>
+                <a:spcPts val="1000"/>
+              </a:spcAft>
+            </a:pPr>
+            <a:r>
+              <a:rPr sz="2000">
+                <a:solidFill>
+                  <a:srgbClr val="222B33"/>
+                </a:solidFill>
+                <a:latin typeface="Microsoft YaHei"/>
+              </a:rPr>
+              <a:t>▪ 检查项目表是校内自查和上级检查的依据</a:t>
+            </a:r>
+          </a:p>
+          <a:p>
+            <a:pPr>
+              <a:spcAft>
+                <a:spcPts val="1000"/>
+              </a:spcAft>
+            </a:pPr>
+            <a:r>
+              <a:rPr sz="2000">
+                <a:solidFill>
+                  <a:srgbClr val="222B33"/>
+                </a:solidFill>
+                <a:latin typeface="Microsoft YaHei"/>
+              </a:rPr>
+              <a:t>▪ 大体分为管理类和现场类两部分</a:t>
+            </a:r>
+          </a:p>
+          <a:p>
+            <a:pPr>
+              <a:spcAft>
+                <a:spcPts val="1000"/>
+              </a:spcAft>
+            </a:pPr>
+            <a:r>
+              <a:rPr sz="2000">
+                <a:solidFill>
+                  <a:srgbClr val="222B33"/>
+                </a:solidFill>
+                <a:latin typeface="Microsoft YaHei"/>
+              </a:rPr>
+              <a:t>▪ 现场重点：危化品、气瓶、消防、用电等</a:t>
+            </a:r>
+          </a:p>
+          <a:p>
+            <a:pPr>
+              <a:spcAft>
+                <a:spcPts val="1000"/>
+              </a:spcAft>
+            </a:pPr>
+            <a:r>
+              <a:rPr sz="2000">
+                <a:solidFill>
+                  <a:srgbClr val="222B33"/>
+                </a:solidFill>
+                <a:latin typeface="Microsoft YaHei"/>
+              </a:rPr>
+              <a:t>▪ 项目表会更新，以现行版本为准</a:t>
+            </a:r>
+          </a:p>
+        </p:txBody>
+      </p:sp>
+      <p:sp>
+        <p:nvSpPr>
+          <p:cNvPr id="9" name="TextBox 8"/>
+          <p:cNvSpPr txBox="1"/>
+          <p:nvPr/>
+        </p:nvSpPr>
+        <p:spPr>
+          <a:xfrm>
+            <a:off x="914400" y="4782312"/>
+            <a:ext cx="5925129" cy="320040"/>
+          </a:xfrm>
+          <a:prstGeom prst="rect">
+            <a:avLst/>
+          </a:prstGeom>
+          <a:noFill/>
+        </p:spPr>
+        <p:txBody>
+          <a:bodyPr wrap="square" anchor="t" lIns="0" rIns="0" tIns="0" bIns="0">
+            <a:spAutoFit/>
+          </a:bodyPr>
+          <a:lstStyle/>
+          <a:p>
+            <a:pPr algn="l"/>
+            <a:r>
+              <a:rPr sz="1300" b="1">
+                <a:solidFill>
+                  <a:srgbClr val="1D7A8C"/>
+                </a:solidFill>
+                <a:latin typeface="Microsoft YaHei"/>
+              </a:rPr>
+              <a:t>说明</a:t>
+            </a:r>
+          </a:p>
+        </p:txBody>
+      </p:sp>
+      <p:sp>
+        <p:nvSpPr>
+          <p:cNvPr id="10" name="TextBox 9"/>
+          <p:cNvSpPr txBox="1"/>
+          <p:nvPr/>
+        </p:nvSpPr>
+        <p:spPr>
+          <a:xfrm>
+            <a:off x="914400" y="5148072"/>
+            <a:ext cx="5925129" cy="612648"/>
+          </a:xfrm>
+          <a:prstGeom prst="rect">
+            <a:avLst/>
+          </a:prstGeom>
+          <a:noFill/>
+        </p:spPr>
+        <p:txBody>
+          <a:bodyPr wrap="square" anchor="t" lIns="0" rIns="0" tIns="0" bIns="0">
+            <a:spAutoFit/>
+          </a:bodyPr>
+          <a:lstStyle/>
+          <a:p>
+            <a:pPr algn="l"/>
+            <a:r>
+              <a:rPr sz="1400" b="0">
+                <a:solidFill>
+                  <a:srgbClr val="5F6B75"/>
+                </a:solidFill>
+                <a:latin typeface="Microsoft YaHei"/>
+              </a:rPr>
+              <a:t>教育部组织制定的高校实验室安全检查项目表，把规范和相关法规的要求细化为一条条可检查的条目，是学校、学院、实验室自查和上级部门检查的依据。</a:t>
+            </a:r>
+          </a:p>
+        </p:txBody>
+      </p:sp>
+      <p:sp>
+        <p:nvSpPr>
+          <p:cNvPr id="11" name="Rounded Rectangle 10"/>
+          <p:cNvSpPr/>
+          <p:nvPr/>
+        </p:nvSpPr>
+        <p:spPr>
+          <a:xfrm>
+            <a:off x="7571049" y="1645920"/>
+            <a:ext cx="4072006" cy="4389120"/>
+          </a:xfrm>
+          <a:prstGeom prst="roundRect">
+            <a:avLst>
+              <a:gd name="adj" fmla="val 8000"/>
+            </a:avLst>
+          </a:prstGeom>
+          <a:solidFill>
+            <a:srgbClr val="FBECEA"/>
+          </a:solidFill>
+          <a:ln>
+            <a:noFill/>
+          </a:ln>
+          <a:effectLst/>
+        </p:spPr>
+        <p:style>
+          <a:lnRef idx="1">
+            <a:schemeClr val="accent1"/>
+          </a:lnRef>
+          <a:fillRef idx="3">
+            <a:schemeClr val="accent1"/>
+          </a:fillRef>
+          <a:effectRef idx="2">
+            <a:schemeClr val="accent1"/>
+          </a:effectRef>
+          <a:fontRef idx="minor">
+            <a:schemeClr val="lt1"/>
+          </a:fontRef>
+        </p:style>
+        <p:txBody>
+          <a:bodyPr rtlCol="0" anchor="ctr"/>
+          <a:lstStyle/>
+          <a:p>
+            <a:pPr algn="ctr"/>
+          </a:p>
+        </p:txBody>
+      </p:sp>
+      <p:sp>
+        <p:nvSpPr>
+          <p:cNvPr id="12" name="Oval 11"/>
+          <p:cNvSpPr/>
+          <p:nvPr/>
+        </p:nvSpPr>
+        <p:spPr>
+          <a:xfrm>
+            <a:off x="7936809" y="1828800"/>
+            <a:ext cx="457200" cy="457200"/>
+          </a:xfrm>
+          <a:prstGeom prst="ellipse">
+            <a:avLst/>
+          </a:prstGeom>
+          <a:solidFill>
+            <a:srgbClr val="C0392B"/>
+          </a:solidFill>
+          <a:ln>
+            <a:noFill/>
+          </a:ln>
+          <a:effectLst/>
+        </p:spPr>
+        <p:style>
+          <a:lnRef idx="1">
+            <a:schemeClr val="accent1"/>
+          </a:lnRef>
+          <a:fillRef idx="3">
+            <a:schemeClr val="accent1"/>
+          </a:fillRef>
+          <a:effectRef idx="2">
+            <a:schemeClr val="accent1"/>
+          </a:effectRef>
+          <a:fontRef idx="minor">
+            <a:schemeClr val="lt1"/>
+          </a:fontRef>
+        </p:style>
+        <p:txBody>
+          <a:bodyPr rtlCol="0" anchor="ctr" lIns="0" rIns="0" tIns="0" bIns="0"/>
+          <a:lstStyle/>
+          <a:p>
+            <a:pPr algn="ctr"/>
+            <a:r>
+              <a:rPr sz="1600" b="1">
+                <a:solidFill>
+                  <a:srgbClr val="FFFFFF"/>
+                </a:solidFill>
+                <a:latin typeface="Microsoft YaHei"/>
+              </a:rPr>
+              <a:t>✕</a:t>
+            </a:r>
+          </a:p>
+        </p:txBody>
+      </p:sp>
+      <p:sp>
+        <p:nvSpPr>
+          <p:cNvPr id="13" name="TextBox 12"/>
+          <p:cNvSpPr txBox="1"/>
+          <p:nvPr/>
+        </p:nvSpPr>
+        <p:spPr>
+          <a:xfrm>
+            <a:off x="8531169" y="1874519"/>
+            <a:ext cx="2791846" cy="365760"/>
+          </a:xfrm>
+          <a:prstGeom prst="rect">
+            <a:avLst/>
+          </a:prstGeom>
+          <a:noFill/>
+        </p:spPr>
+        <p:txBody>
+          <a:bodyPr wrap="square" anchor="t" lIns="0" rIns="0" tIns="0" bIns="0">
+            <a:spAutoFit/>
+          </a:bodyPr>
+          <a:lstStyle/>
+          <a:p>
+            <a:pPr algn="l"/>
+            <a:r>
+              <a:rPr sz="1600" b="1">
+                <a:solidFill>
+                  <a:srgbClr val="C0392B"/>
+                </a:solidFill>
+                <a:latin typeface="Microsoft YaHei"/>
+              </a:rPr>
+              <a:t>常见错误</a:t>
+            </a:r>
+          </a:p>
+        </p:txBody>
+      </p:sp>
+      <p:sp>
+        <p:nvSpPr>
+          <p:cNvPr id="14" name="TextBox 13"/>
+          <p:cNvSpPr txBox="1"/>
+          <p:nvPr/>
+        </p:nvSpPr>
+        <p:spPr>
+          <a:xfrm>
+            <a:off x="7936809" y="2514600"/>
+            <a:ext cx="3340486" cy="3291840"/>
+          </a:xfrm>
+          <a:prstGeom prst="rect">
+            <a:avLst/>
+          </a:prstGeom>
+          <a:noFill/>
+        </p:spPr>
+        <p:txBody>
+          <a:bodyPr wrap="square" lIns="0" rIns="0" tIns="0" bIns="0">
+            <a:spAutoFit/>
+          </a:bodyPr>
+          <a:lstStyle/>
+          <a:p>
+            <a:pPr>
+              <a:spcAft>
+                <a:spcPts val="1000"/>
+              </a:spcAft>
+            </a:pPr>
+            <a:r>
+              <a:rPr sz="1500">
+                <a:solidFill>
+                  <a:srgbClr val="222B33"/>
+                </a:solidFill>
+                <a:latin typeface="Microsoft YaHei"/>
+              </a:rPr>
+              <a:t>▪ 只在检查前才翻看项目表</a:t>
+            </a:r>
+          </a:p>
+          <a:p>
+            <a:pPr>
+              <a:spcAft>
+                <a:spcPts val="1000"/>
+              </a:spcAft>
+            </a:pPr>
+            <a:r>
+              <a:rPr sz="1500">
+                <a:solidFill>
+                  <a:srgbClr val="222B33"/>
+                </a:solidFill>
+                <a:latin typeface="Microsoft YaHei"/>
+              </a:rPr>
+              <a:t>▪ 使用过时版本的检查表自查</a:t>
+            </a:r>
+          </a:p>
+        </p:txBody>
+      </p:sp>
+    </p:spTree>
+  </p:cSld>
+  <p:clrMapOvr>
+    <a:masterClrMapping/>
+  </p:clrMapOvr>
+</p:sld>
+</file>
+
+<file path=ppt/slides/slide44.xml><?xml version="1.0" encoding="utf-8"?>
+<p:sld xmlns:a="http://schemas.openxmlformats.org/drawingml/2006/main" xmlns:p="http://schemas.openxmlformats.org/presentationml/2006/main" xmlns:r="http://schemas.openxmlformats.org/officeDocument/2006/relationships">
+  <p:cSld>
+    <p:bg>
+      <p:bgPr>
+        <a:solidFill>
+          <a:srgbClr val="FFFFFF"/>
+        </a:solidFill>
+        <a:effectLst/>
+      </p:bgPr>
+    </p:bg>
+    <p:spTree>
+      <p:nvGrpSpPr>
+        <p:cNvPr id="1" name=""/>
+        <p:cNvGrpSpPr/>
+        <p:nvPr/>
+      </p:nvGrpSpPr>
+      <p:grpSpPr/>
+      <p:sp>
+        <p:nvSpPr>
+          <p:cNvPr id="2" name="TextBox 1"/>
+          <p:cNvSpPr txBox="1"/>
+          <p:nvPr/>
+        </p:nvSpPr>
+        <p:spPr>
+          <a:xfrm>
+            <a:off x="548640" y="320040"/>
+            <a:ext cx="8229600" cy="320040"/>
+          </a:xfrm>
+          <a:prstGeom prst="rect">
+            <a:avLst/>
+          </a:prstGeom>
+          <a:noFill/>
+        </p:spPr>
+        <p:txBody>
+          <a:bodyPr wrap="square" anchor="t" lIns="0" rIns="0" tIns="0" bIns="0">
+            <a:spAutoFit/>
+          </a:bodyPr>
+          <a:lstStyle/>
+          <a:p>
+            <a:pPr algn="l"/>
+            <a:r>
+              <a:rPr sz="1200" b="1">
+                <a:solidFill>
+                  <a:srgbClr val="1D7A8C"/>
+                </a:solidFill>
+                <a:latin typeface="Microsoft YaHei"/>
+              </a:rPr>
+              <a:t>003 · 高校实验室安全规范与检查</a:t>
+            </a:r>
+          </a:p>
+        </p:txBody>
+      </p:sp>
+      <p:sp>
+        <p:nvSpPr>
+          <p:cNvPr id="3" name="TextBox 2"/>
+          <p:cNvSpPr txBox="1"/>
+          <p:nvPr/>
+        </p:nvSpPr>
+        <p:spPr>
+          <a:xfrm>
+            <a:off x="548640" y="640080"/>
+            <a:ext cx="11094415" cy="731520"/>
+          </a:xfrm>
+          <a:prstGeom prst="rect">
+            <a:avLst/>
+          </a:prstGeom>
+          <a:noFill/>
+        </p:spPr>
+        <p:txBody>
+          <a:bodyPr wrap="square" anchor="t" lIns="0" rIns="0" tIns="0" bIns="0">
+            <a:spAutoFit/>
+          </a:bodyPr>
+          <a:lstStyle/>
+          <a:p>
+            <a:pPr algn="l"/>
+            <a:r>
+              <a:rPr sz="3000" b="1">
+                <a:solidFill>
+                  <a:srgbClr val="0B3C5D"/>
+                </a:solidFill>
+                <a:latin typeface="Microsoft YaHei"/>
+              </a:rPr>
+              <a:t>校院室定期检查与上级检查</a:t>
+            </a:r>
+          </a:p>
+        </p:txBody>
+      </p:sp>
+      <p:sp>
+        <p:nvSpPr>
+          <p:cNvPr id="4" name="TextBox 3"/>
+          <p:cNvSpPr txBox="1"/>
+          <p:nvPr/>
+        </p:nvSpPr>
+        <p:spPr>
+          <a:xfrm>
+            <a:off x="548640" y="6446520"/>
+            <a:ext cx="7315200" cy="274320"/>
+          </a:xfrm>
+          <a:prstGeom prst="rect">
+            <a:avLst/>
+          </a:prstGeom>
+          <a:noFill/>
+        </p:spPr>
+        <p:txBody>
+          <a:bodyPr wrap="square" anchor="t" lIns="0" rIns="0" tIns="0" bIns="0">
+            <a:spAutoFit/>
+          </a:bodyPr>
+          <a:lstStyle/>
+          <a:p>
+            <a:pPr algn="l"/>
+            <a:r>
+              <a:rPr sz="1000" b="0">
+                <a:solidFill>
+                  <a:srgbClr val="5F6B75"/>
+                </a:solidFill>
+                <a:latin typeface="Microsoft YaHei"/>
+              </a:rPr>
+              <a:t>《高校实验室安全》 003 高校实验室安全规范与检查</a:t>
+            </a:r>
+          </a:p>
+        </p:txBody>
+      </p:sp>
+      <p:sp>
+        <p:nvSpPr>
+          <p:cNvPr id="5" name="Oval 4"/>
+          <p:cNvSpPr/>
+          <p:nvPr/>
+        </p:nvSpPr>
+        <p:spPr>
+          <a:xfrm>
+            <a:off x="10820095" y="411480"/>
+            <a:ext cx="822960" cy="822960"/>
+          </a:xfrm>
+          <a:prstGeom prst="ellipse">
+            <a:avLst/>
+          </a:prstGeom>
+          <a:solidFill>
+            <a:srgbClr val="F28C28"/>
+          </a:solidFill>
+          <a:ln>
+            <a:noFill/>
+          </a:ln>
+          <a:effectLst/>
+        </p:spPr>
+        <p:style>
+          <a:lnRef idx="1">
+            <a:schemeClr val="accent1"/>
+          </a:lnRef>
+          <a:fillRef idx="3">
+            <a:schemeClr val="accent1"/>
+          </a:fillRef>
+          <a:effectRef idx="2">
+            <a:schemeClr val="accent1"/>
+          </a:effectRef>
+          <a:fontRef idx="minor">
+            <a:schemeClr val="lt1"/>
+          </a:fontRef>
+        </p:style>
+        <p:txBody>
+          <a:bodyPr rtlCol="0" anchor="ctr" lIns="0" rIns="0" tIns="0" bIns="0"/>
+          <a:lstStyle/>
+          <a:p>
+            <a:pPr algn="ctr"/>
+            <a:r>
+              <a:rPr sz="1800" b="1">
+                <a:solidFill>
+                  <a:srgbClr val="FFFFFF"/>
+                </a:solidFill>
+                <a:latin typeface="Microsoft YaHei"/>
+              </a:rPr>
+              <a:t>K5</a:t>
+            </a:r>
+          </a:p>
+        </p:txBody>
+      </p:sp>
+      <p:sp>
+        <p:nvSpPr>
+          <p:cNvPr id="6" name="Rounded Rectangle 5"/>
+          <p:cNvSpPr/>
+          <p:nvPr/>
+        </p:nvSpPr>
+        <p:spPr>
+          <a:xfrm>
+            <a:off x="548640" y="1645920"/>
+            <a:ext cx="6656649" cy="4389120"/>
+          </a:xfrm>
+          <a:prstGeom prst="roundRect">
+            <a:avLst>
+              <a:gd name="adj" fmla="val 8000"/>
+            </a:avLst>
+          </a:prstGeom>
+          <a:solidFill>
+            <a:srgbClr val="EEF4F7"/>
+          </a:solidFill>
+          <a:ln>
+            <a:noFill/>
+          </a:ln>
+          <a:effectLst/>
+        </p:spPr>
+        <p:style>
+          <a:lnRef idx="1">
+            <a:schemeClr val="accent1"/>
+          </a:lnRef>
+          <a:fillRef idx="3">
+            <a:schemeClr val="accent1"/>
+          </a:fillRef>
+          <a:effectRef idx="2">
+            <a:schemeClr val="accent1"/>
+          </a:effectRef>
+          <a:fontRef idx="minor">
+            <a:schemeClr val="lt1"/>
+          </a:fontRef>
+        </p:style>
+        <p:txBody>
+          <a:bodyPr rtlCol="0" anchor="ctr"/>
+          <a:lstStyle/>
+          <a:p>
+            <a:pPr algn="ctr"/>
+          </a:p>
+        </p:txBody>
+      </p:sp>
+      <p:sp>
+        <p:nvSpPr>
+          <p:cNvPr id="7" name="TextBox 6"/>
+          <p:cNvSpPr txBox="1"/>
+          <p:nvPr/>
+        </p:nvSpPr>
+        <p:spPr>
+          <a:xfrm>
+            <a:off x="914400" y="1874519"/>
+            <a:ext cx="2743200" cy="365760"/>
+          </a:xfrm>
+          <a:prstGeom prst="rect">
+            <a:avLst/>
+          </a:prstGeom>
+          <a:noFill/>
+        </p:spPr>
+        <p:txBody>
+          <a:bodyPr wrap="square" anchor="t" lIns="0" rIns="0" tIns="0" bIns="0">
+            <a:spAutoFit/>
+          </a:bodyPr>
+          <a:lstStyle/>
+          <a:p>
+            <a:pPr algn="l"/>
+            <a:r>
+              <a:rPr sz="1600" b="1">
+                <a:solidFill>
+                  <a:srgbClr val="1D7A8C"/>
+                </a:solidFill>
+                <a:latin typeface="Microsoft YaHei"/>
+              </a:rPr>
+              <a:t>要点</a:t>
+            </a:r>
+          </a:p>
+        </p:txBody>
+      </p:sp>
+      <p:sp>
+        <p:nvSpPr>
+          <p:cNvPr id="8" name="TextBox 7"/>
+          <p:cNvSpPr txBox="1"/>
+          <p:nvPr/>
+        </p:nvSpPr>
+        <p:spPr>
+          <a:xfrm>
+            <a:off x="914400" y="2377440"/>
+            <a:ext cx="5925129" cy="2267712"/>
+          </a:xfrm>
+          <a:prstGeom prst="rect">
+            <a:avLst/>
+          </a:prstGeom>
+          <a:noFill/>
+        </p:spPr>
+        <p:txBody>
+          <a:bodyPr wrap="square" lIns="0" rIns="0" tIns="0" bIns="0">
+            <a:spAutoFit/>
+          </a:bodyPr>
+          <a:lstStyle/>
+          <a:p>
+            <a:pPr>
+              <a:spcAft>
+                <a:spcPts val="1000"/>
+              </a:spcAft>
+            </a:pPr>
+            <a:r>
+              <a:rPr sz="2000">
+                <a:solidFill>
+                  <a:srgbClr val="222B33"/>
+                </a:solidFill>
+                <a:latin typeface="Microsoft YaHei"/>
+              </a:rPr>
+              <a:t>▪ 学校、学院、实验室分层开展定期检查</a:t>
+            </a:r>
+          </a:p>
+          <a:p>
+            <a:pPr>
+              <a:spcAft>
+                <a:spcPts val="1000"/>
+              </a:spcAft>
+            </a:pPr>
+            <a:r>
+              <a:rPr sz="2000">
+                <a:solidFill>
+                  <a:srgbClr val="222B33"/>
+                </a:solidFill>
+                <a:latin typeface="Microsoft YaHei"/>
+              </a:rPr>
+              <a:t>▪ 上级部门按检查项目表开展检查</a:t>
+            </a:r>
+          </a:p>
+          <a:p>
+            <a:pPr>
+              <a:spcAft>
+                <a:spcPts val="1000"/>
+              </a:spcAft>
+            </a:pPr>
+            <a:r>
+              <a:rPr sz="2000">
+                <a:solidFill>
+                  <a:srgbClr val="222B33"/>
+                </a:solidFill>
+                <a:latin typeface="Microsoft YaHei"/>
+              </a:rPr>
+              <a:t>▪ 迎检不靠突击，靠平时做到位</a:t>
+            </a:r>
+          </a:p>
+          <a:p>
+            <a:pPr>
+              <a:spcAft>
+                <a:spcPts val="1000"/>
+              </a:spcAft>
+            </a:pPr>
+            <a:r>
+              <a:rPr sz="2000">
+                <a:solidFill>
+                  <a:srgbClr val="222B33"/>
+                </a:solidFill>
+                <a:latin typeface="Microsoft YaHei"/>
+              </a:rPr>
+              <a:t>▪ 查出问题要整改、复查；重大隐患立即停用</a:t>
+            </a:r>
+          </a:p>
+        </p:txBody>
+      </p:sp>
+      <p:sp>
+        <p:nvSpPr>
+          <p:cNvPr id="9" name="TextBox 8"/>
+          <p:cNvSpPr txBox="1"/>
+          <p:nvPr/>
+        </p:nvSpPr>
+        <p:spPr>
+          <a:xfrm>
+            <a:off x="914400" y="4782312"/>
+            <a:ext cx="5925129" cy="320040"/>
+          </a:xfrm>
+          <a:prstGeom prst="rect">
+            <a:avLst/>
+          </a:prstGeom>
+          <a:noFill/>
+        </p:spPr>
+        <p:txBody>
+          <a:bodyPr wrap="square" anchor="t" lIns="0" rIns="0" tIns="0" bIns="0">
+            <a:spAutoFit/>
+          </a:bodyPr>
+          <a:lstStyle/>
+          <a:p>
+            <a:pPr algn="l"/>
+            <a:r>
+              <a:rPr sz="1300" b="1">
+                <a:solidFill>
+                  <a:srgbClr val="1D7A8C"/>
+                </a:solidFill>
+                <a:latin typeface="Microsoft YaHei"/>
+              </a:rPr>
+              <a:t>说明</a:t>
+            </a:r>
+          </a:p>
+        </p:txBody>
+      </p:sp>
+      <p:sp>
+        <p:nvSpPr>
+          <p:cNvPr id="10" name="TextBox 9"/>
+          <p:cNvSpPr txBox="1"/>
+          <p:nvPr/>
+        </p:nvSpPr>
+        <p:spPr>
+          <a:xfrm>
+            <a:off x="914400" y="5148072"/>
+            <a:ext cx="5925129" cy="612648"/>
+          </a:xfrm>
+          <a:prstGeom prst="rect">
+            <a:avLst/>
+          </a:prstGeom>
+          <a:noFill/>
+        </p:spPr>
+        <p:txBody>
+          <a:bodyPr wrap="square" anchor="t" lIns="0" rIns="0" tIns="0" bIns="0">
+            <a:spAutoFit/>
+          </a:bodyPr>
+          <a:lstStyle/>
+          <a:p>
+            <a:pPr algn="l"/>
+            <a:r>
+              <a:rPr sz="1400" b="0">
+                <a:solidFill>
+                  <a:srgbClr val="5F6B75"/>
+                </a:solidFill>
+                <a:latin typeface="Microsoft YaHei"/>
+              </a:rPr>
+              <a:t>高校实验室安全检查分层开展：学校层面组织定期和专项检查，学院（二级单位）开展定期巡查，实验室负责人和安全员组织日常自查。教育部等上级部门也会按检查项目表对高校进行检查或抽查。</a:t>
+            </a:r>
+          </a:p>
+        </p:txBody>
+      </p:sp>
+      <p:sp>
+        <p:nvSpPr>
+          <p:cNvPr id="11" name="Rounded Rectangle 10"/>
+          <p:cNvSpPr/>
+          <p:nvPr/>
+        </p:nvSpPr>
+        <p:spPr>
+          <a:xfrm>
+            <a:off x="7571049" y="1645920"/>
+            <a:ext cx="4072006" cy="4389120"/>
+          </a:xfrm>
+          <a:prstGeom prst="roundRect">
+            <a:avLst>
+              <a:gd name="adj" fmla="val 8000"/>
+            </a:avLst>
+          </a:prstGeom>
+          <a:solidFill>
+            <a:srgbClr val="FBECEA"/>
+          </a:solidFill>
+          <a:ln>
+            <a:noFill/>
+          </a:ln>
+          <a:effectLst/>
+        </p:spPr>
+        <p:style>
+          <a:lnRef idx="1">
+            <a:schemeClr val="accent1"/>
+          </a:lnRef>
+          <a:fillRef idx="3">
+            <a:schemeClr val="accent1"/>
+          </a:fillRef>
+          <a:effectRef idx="2">
+            <a:schemeClr val="accent1"/>
+          </a:effectRef>
+          <a:fontRef idx="minor">
+            <a:schemeClr val="lt1"/>
+          </a:fontRef>
+        </p:style>
+        <p:txBody>
+          <a:bodyPr rtlCol="0" anchor="ctr"/>
+          <a:lstStyle/>
+          <a:p>
+            <a:pPr algn="ctr"/>
+          </a:p>
+        </p:txBody>
+      </p:sp>
+      <p:sp>
+        <p:nvSpPr>
+          <p:cNvPr id="12" name="Oval 11"/>
+          <p:cNvSpPr/>
+          <p:nvPr/>
+        </p:nvSpPr>
+        <p:spPr>
+          <a:xfrm>
+            <a:off x="7936809" y="1828800"/>
+            <a:ext cx="457200" cy="457200"/>
+          </a:xfrm>
+          <a:prstGeom prst="ellipse">
+            <a:avLst/>
+          </a:prstGeom>
+          <a:solidFill>
+            <a:srgbClr val="C0392B"/>
+          </a:solidFill>
+          <a:ln>
+            <a:noFill/>
+          </a:ln>
+          <a:effectLst/>
+        </p:spPr>
+        <p:style>
+          <a:lnRef idx="1">
+            <a:schemeClr val="accent1"/>
+          </a:lnRef>
+          <a:fillRef idx="3">
+            <a:schemeClr val="accent1"/>
+          </a:fillRef>
+          <a:effectRef idx="2">
+            <a:schemeClr val="accent1"/>
+          </a:effectRef>
+          <a:fontRef idx="minor">
+            <a:schemeClr val="lt1"/>
+          </a:fontRef>
+        </p:style>
+        <p:txBody>
+          <a:bodyPr rtlCol="0" anchor="ctr" lIns="0" rIns="0" tIns="0" bIns="0"/>
+          <a:lstStyle/>
+          <a:p>
+            <a:pPr algn="ctr"/>
+            <a:r>
+              <a:rPr sz="1600" b="1">
+                <a:solidFill>
+                  <a:srgbClr val="FFFFFF"/>
+                </a:solidFill>
+                <a:latin typeface="Microsoft YaHei"/>
+              </a:rPr>
+              <a:t>✕</a:t>
+            </a:r>
+          </a:p>
+        </p:txBody>
+      </p:sp>
+      <p:sp>
+        <p:nvSpPr>
+          <p:cNvPr id="13" name="TextBox 12"/>
+          <p:cNvSpPr txBox="1"/>
+          <p:nvPr/>
+        </p:nvSpPr>
+        <p:spPr>
+          <a:xfrm>
+            <a:off x="8531169" y="1874519"/>
+            <a:ext cx="2791846" cy="365760"/>
+          </a:xfrm>
+          <a:prstGeom prst="rect">
+            <a:avLst/>
+          </a:prstGeom>
+          <a:noFill/>
+        </p:spPr>
+        <p:txBody>
+          <a:bodyPr wrap="square" anchor="t" lIns="0" rIns="0" tIns="0" bIns="0">
+            <a:spAutoFit/>
+          </a:bodyPr>
+          <a:lstStyle/>
+          <a:p>
+            <a:pPr algn="l"/>
+            <a:r>
+              <a:rPr sz="1600" b="1">
+                <a:solidFill>
+                  <a:srgbClr val="C0392B"/>
+                </a:solidFill>
+                <a:latin typeface="Microsoft YaHei"/>
+              </a:rPr>
+              <a:t>常见错误</a:t>
+            </a:r>
+          </a:p>
+        </p:txBody>
+      </p:sp>
+      <p:sp>
+        <p:nvSpPr>
+          <p:cNvPr id="14" name="TextBox 13"/>
+          <p:cNvSpPr txBox="1"/>
+          <p:nvPr/>
+        </p:nvSpPr>
+        <p:spPr>
+          <a:xfrm>
+            <a:off x="7936809" y="2514600"/>
+            <a:ext cx="3340486" cy="3291840"/>
+          </a:xfrm>
+          <a:prstGeom prst="rect">
+            <a:avLst/>
+          </a:prstGeom>
+          <a:noFill/>
+        </p:spPr>
+        <p:txBody>
+          <a:bodyPr wrap="square" lIns="0" rIns="0" tIns="0" bIns="0">
+            <a:spAutoFit/>
+          </a:bodyPr>
+          <a:lstStyle/>
+          <a:p>
+            <a:pPr>
+              <a:spcAft>
+                <a:spcPts val="1000"/>
+              </a:spcAft>
+            </a:pPr>
+            <a:r>
+              <a:rPr sz="1500">
+                <a:solidFill>
+                  <a:srgbClr val="222B33"/>
+                </a:solidFill>
+                <a:latin typeface="Microsoft YaHei"/>
+              </a:rPr>
+              <a:t>▪ 检查前突击藏匿杂物、补记录</a:t>
+            </a:r>
+          </a:p>
+          <a:p>
+            <a:pPr>
+              <a:spcAft>
+                <a:spcPts val="1000"/>
+              </a:spcAft>
+            </a:pPr>
+            <a:r>
+              <a:rPr sz="1500">
+                <a:solidFill>
+                  <a:srgbClr val="222B33"/>
+                </a:solidFill>
+                <a:latin typeface="Microsoft YaHei"/>
+              </a:rPr>
+              <a:t>▪ 查出问题后只做表面整改，不复查</a:t>
+            </a:r>
+          </a:p>
+        </p:txBody>
+      </p:sp>
+    </p:spTree>
+  </p:cSld>
+  <p:clrMapOvr>
+    <a:masterClrMapping/>
+  </p:clrMapOvr>
+</p:sld>
+</file>
+
+<file path=ppt/slides/slide45.xml><?xml version="1.0" encoding="utf-8"?>
+<p:sld xmlns:a="http://schemas.openxmlformats.org/drawingml/2006/main" xmlns:p="http://schemas.openxmlformats.org/presentationml/2006/main" xmlns:r="http://schemas.openxmlformats.org/officeDocument/2006/relationships">
+  <p:cSld>
+    <p:bg>
+      <p:bgPr>
+        <a:solidFill>
+          <a:srgbClr val="FFFFFF"/>
+        </a:solidFill>
+        <a:effectLst/>
+      </p:bgPr>
+    </p:bg>
+    <p:spTree>
+      <p:nvGrpSpPr>
+        <p:cNvPr id="1" name=""/>
+        <p:cNvGrpSpPr/>
+        <p:nvPr/>
+      </p:nvGrpSpPr>
+      <p:grpSpPr/>
+      <p:sp>
+        <p:nvSpPr>
+          <p:cNvPr id="2" name="TextBox 1"/>
+          <p:cNvSpPr txBox="1"/>
+          <p:nvPr/>
+        </p:nvSpPr>
+        <p:spPr>
+          <a:xfrm>
+            <a:off x="548640" y="320040"/>
+            <a:ext cx="8229600" cy="320040"/>
+          </a:xfrm>
+          <a:prstGeom prst="rect">
+            <a:avLst/>
+          </a:prstGeom>
+          <a:noFill/>
+        </p:spPr>
+        <p:txBody>
+          <a:bodyPr wrap="square" anchor="t" lIns="0" rIns="0" tIns="0" bIns="0">
+            <a:spAutoFit/>
+          </a:bodyPr>
+          <a:lstStyle/>
+          <a:p>
+            <a:pPr algn="l"/>
+            <a:r>
+              <a:rPr sz="1200" b="1">
+                <a:solidFill>
+                  <a:srgbClr val="1D7A8C"/>
+                </a:solidFill>
+                <a:latin typeface="Microsoft YaHei"/>
+              </a:rPr>
+              <a:t>003 · 高校实验室安全规范与检查</a:t>
+            </a:r>
+          </a:p>
+        </p:txBody>
+      </p:sp>
+      <p:sp>
+        <p:nvSpPr>
+          <p:cNvPr id="3" name="TextBox 2"/>
+          <p:cNvSpPr txBox="1"/>
+          <p:nvPr/>
+        </p:nvSpPr>
+        <p:spPr>
+          <a:xfrm>
+            <a:off x="548640" y="640080"/>
+            <a:ext cx="11094415" cy="731520"/>
+          </a:xfrm>
+          <a:prstGeom prst="rect">
+            <a:avLst/>
+          </a:prstGeom>
+          <a:noFill/>
+        </p:spPr>
+        <p:txBody>
+          <a:bodyPr wrap="square" anchor="t" lIns="0" rIns="0" tIns="0" bIns="0">
+            <a:spAutoFit/>
+          </a:bodyPr>
+          <a:lstStyle/>
+          <a:p>
+            <a:pPr algn="l"/>
+            <a:r>
+              <a:rPr sz="3000" b="1">
+                <a:solidFill>
+                  <a:srgbClr val="0B3C5D"/>
+                </a:solidFill>
+                <a:latin typeface="Microsoft YaHei"/>
+              </a:rPr>
+              <a:t>课后练习</a:t>
+            </a:r>
+          </a:p>
+        </p:txBody>
+      </p:sp>
+      <p:sp>
+        <p:nvSpPr>
+          <p:cNvPr id="4" name="TextBox 3"/>
+          <p:cNvSpPr txBox="1"/>
+          <p:nvPr/>
+        </p:nvSpPr>
+        <p:spPr>
+          <a:xfrm>
+            <a:off x="548640" y="6446520"/>
+            <a:ext cx="7315200" cy="274320"/>
+          </a:xfrm>
+          <a:prstGeom prst="rect">
+            <a:avLst/>
+          </a:prstGeom>
+          <a:noFill/>
+        </p:spPr>
+        <p:txBody>
+          <a:bodyPr wrap="square" anchor="t" lIns="0" rIns="0" tIns="0" bIns="0">
+            <a:spAutoFit/>
+          </a:bodyPr>
+          <a:lstStyle/>
+          <a:p>
+            <a:pPr algn="l"/>
+            <a:r>
+              <a:rPr sz="1000" b="0">
+                <a:solidFill>
+                  <a:srgbClr val="5F6B75"/>
+                </a:solidFill>
+                <a:latin typeface="Microsoft YaHei"/>
+              </a:rPr>
+              <a:t>《高校实验室安全》 003 高校实验室安全规范与检查</a:t>
+            </a:r>
+          </a:p>
+        </p:txBody>
+      </p:sp>
+      <p:sp>
+        <p:nvSpPr>
+          <p:cNvPr id="5" name="Rounded Rectangle 4"/>
+          <p:cNvSpPr/>
+          <p:nvPr/>
+        </p:nvSpPr>
+        <p:spPr>
+          <a:xfrm>
+            <a:off x="548640" y="1645920"/>
+            <a:ext cx="5364327" cy="4389120"/>
+          </a:xfrm>
+          <a:prstGeom prst="roundRect">
+            <a:avLst>
+              <a:gd name="adj" fmla="val 8000"/>
+            </a:avLst>
+          </a:prstGeom>
+          <a:solidFill>
+            <a:srgbClr val="EEF4F7"/>
+          </a:solidFill>
+          <a:ln>
+            <a:noFill/>
+          </a:ln>
+          <a:effectLst/>
+        </p:spPr>
+        <p:style>
+          <a:lnRef idx="1">
+            <a:schemeClr val="accent1"/>
+          </a:lnRef>
+          <a:fillRef idx="3">
+            <a:schemeClr val="accent1"/>
+          </a:fillRef>
+          <a:effectRef idx="2">
+            <a:schemeClr val="accent1"/>
+          </a:effectRef>
+          <a:fontRef idx="minor">
+            <a:schemeClr val="lt1"/>
+          </a:fontRef>
+        </p:style>
+        <p:txBody>
+          <a:bodyPr rtlCol="0" anchor="ctr"/>
+          <a:lstStyle/>
+          <a:p>
+            <a:pPr algn="ctr"/>
+          </a:p>
+        </p:txBody>
+      </p:sp>
+      <p:sp>
+        <p:nvSpPr>
+          <p:cNvPr id="6" name="Oval 5"/>
+          <p:cNvSpPr/>
+          <p:nvPr/>
+        </p:nvSpPr>
+        <p:spPr>
+          <a:xfrm>
+            <a:off x="868680" y="1874519"/>
+            <a:ext cx="548640" cy="548640"/>
+          </a:xfrm>
+          <a:prstGeom prst="ellipse">
+            <a:avLst/>
+          </a:prstGeom>
+          <a:solidFill>
+            <a:srgbClr val="0B3C5D"/>
+          </a:solidFill>
+          <a:ln>
+            <a:noFill/>
+          </a:ln>
+          <a:effectLst/>
+        </p:spPr>
+        <p:style>
+          <a:lnRef idx="1">
+            <a:schemeClr val="accent1"/>
+          </a:lnRef>
+          <a:fillRef idx="3">
+            <a:schemeClr val="accent1"/>
+          </a:fillRef>
+          <a:effectRef idx="2">
+            <a:schemeClr val="accent1"/>
+          </a:effectRef>
+          <a:fontRef idx="minor">
+            <a:schemeClr val="lt1"/>
+          </a:fontRef>
+        </p:style>
+        <p:txBody>
+          <a:bodyPr rtlCol="0" anchor="ctr" lIns="0" rIns="0" tIns="0" bIns="0"/>
+          <a:lstStyle/>
+          <a:p>
+            <a:pPr algn="ctr"/>
+            <a:r>
+              <a:rPr sz="1600" b="1">
+                <a:solidFill>
+                  <a:srgbClr val="FFFFFF"/>
+                </a:solidFill>
+                <a:latin typeface="Microsoft YaHei"/>
+              </a:rPr>
+              <a:t>1</a:t>
+            </a:r>
+          </a:p>
+        </p:txBody>
+      </p:sp>
+      <p:sp>
+        <p:nvSpPr>
+          <p:cNvPr id="7" name="TextBox 6"/>
+          <p:cNvSpPr txBox="1"/>
+          <p:nvPr/>
+        </p:nvSpPr>
+        <p:spPr>
+          <a:xfrm>
+            <a:off x="1600200" y="1920240"/>
+            <a:ext cx="3992727" cy="1280160"/>
+          </a:xfrm>
+          <a:prstGeom prst="rect">
+            <a:avLst/>
+          </a:prstGeom>
+          <a:noFill/>
+        </p:spPr>
+        <p:txBody>
+          <a:bodyPr wrap="square" anchor="t" lIns="0" rIns="0" tIns="0" bIns="0">
+            <a:spAutoFit/>
+          </a:bodyPr>
+          <a:lstStyle/>
+          <a:p>
+            <a:pPr algn="l"/>
+            <a:r>
+              <a:rPr sz="1700" b="1">
+                <a:solidFill>
+                  <a:srgbClr val="222B33"/>
+                </a:solidFill>
+                <a:latin typeface="Microsoft YaHei"/>
+              </a:rPr>
+              <a:t>《高等学校实验室安全规范》的文号是：</a:t>
+            </a:r>
+          </a:p>
+        </p:txBody>
+      </p:sp>
+      <p:sp>
+        <p:nvSpPr>
+          <p:cNvPr id="8" name="TextBox 7"/>
+          <p:cNvSpPr txBox="1"/>
+          <p:nvPr/>
+        </p:nvSpPr>
+        <p:spPr>
+          <a:xfrm>
+            <a:off x="1600200" y="3291840"/>
+            <a:ext cx="3992727" cy="2560320"/>
+          </a:xfrm>
+          <a:prstGeom prst="rect">
+            <a:avLst/>
+          </a:prstGeom>
+          <a:noFill/>
+        </p:spPr>
+        <p:txBody>
+          <a:bodyPr wrap="square" anchor="t" lIns="0" rIns="0" tIns="0" bIns="0">
+            <a:spAutoFit/>
+          </a:bodyPr>
+          <a:lstStyle/>
+          <a:p>
+            <a:pPr algn="l"/>
+            <a:r>
+              <a:rPr sz="1500" b="0">
+                <a:solidFill>
+                  <a:srgbClr val="222B33"/>
+                </a:solidFill>
+                <a:latin typeface="Microsoft YaHei"/>
+              </a:rPr>
+              <a:t>A. 教科信厅函〔2023〕5 号</a:t>
+            </a:r>
+          </a:p>
+          <a:p>
+            <a:pPr algn="l"/>
+            <a:r>
+              <a:rPr sz="1500" b="0">
+                <a:solidFill>
+                  <a:srgbClr val="222B33"/>
+                </a:solidFill>
+                <a:latin typeface="Microsoft YaHei"/>
+              </a:rPr>
+              <a:t>B. 国务院令第 591 号</a:t>
+            </a:r>
+          </a:p>
+          <a:p>
+            <a:pPr algn="l"/>
+            <a:r>
+              <a:rPr sz="1500" b="0">
+                <a:solidFill>
+                  <a:srgbClr val="222B33"/>
+                </a:solidFill>
+                <a:latin typeface="Microsoft YaHei"/>
+              </a:rPr>
+              <a:t>C. GB 19489-2008</a:t>
+            </a:r>
+          </a:p>
+          <a:p>
+            <a:pPr algn="l"/>
+            <a:r>
+              <a:rPr sz="1500" b="0">
+                <a:solidFill>
+                  <a:srgbClr val="222B33"/>
+                </a:solidFill>
+                <a:latin typeface="Microsoft YaHei"/>
+              </a:rPr>
+              <a:t>D. 主席令第六十四号</a:t>
+            </a:r>
+          </a:p>
+        </p:txBody>
+      </p:sp>
+      <p:sp>
+        <p:nvSpPr>
+          <p:cNvPr id="9" name="Rounded Rectangle 8"/>
+          <p:cNvSpPr/>
+          <p:nvPr/>
+        </p:nvSpPr>
+        <p:spPr>
+          <a:xfrm>
+            <a:off x="6278727" y="1645920"/>
+            <a:ext cx="5364327" cy="4389120"/>
+          </a:xfrm>
+          <a:prstGeom prst="roundRect">
+            <a:avLst>
+              <a:gd name="adj" fmla="val 8000"/>
+            </a:avLst>
+          </a:prstGeom>
+          <a:solidFill>
+            <a:srgbClr val="EEF4F7"/>
+          </a:solidFill>
+          <a:ln>
+            <a:noFill/>
+          </a:ln>
+          <a:effectLst/>
+        </p:spPr>
+        <p:style>
+          <a:lnRef idx="1">
+            <a:schemeClr val="accent1"/>
+          </a:lnRef>
+          <a:fillRef idx="3">
+            <a:schemeClr val="accent1"/>
+          </a:fillRef>
+          <a:effectRef idx="2">
+            <a:schemeClr val="accent1"/>
+          </a:effectRef>
+          <a:fontRef idx="minor">
+            <a:schemeClr val="lt1"/>
+          </a:fontRef>
+        </p:style>
+        <p:txBody>
+          <a:bodyPr rtlCol="0" anchor="ctr"/>
+          <a:lstStyle/>
+          <a:p>
+            <a:pPr algn="ctr"/>
+          </a:p>
+        </p:txBody>
+      </p:sp>
+      <p:sp>
+        <p:nvSpPr>
+          <p:cNvPr id="10" name="Oval 9"/>
+          <p:cNvSpPr/>
+          <p:nvPr/>
+        </p:nvSpPr>
+        <p:spPr>
+          <a:xfrm>
+            <a:off x="6598767" y="1874519"/>
+            <a:ext cx="548640" cy="548640"/>
+          </a:xfrm>
+          <a:prstGeom prst="ellipse">
+            <a:avLst/>
+          </a:prstGeom>
+          <a:solidFill>
+            <a:srgbClr val="0B3C5D"/>
+          </a:solidFill>
+          <a:ln>
+            <a:noFill/>
+          </a:ln>
+          <a:effectLst/>
+        </p:spPr>
+        <p:style>
+          <a:lnRef idx="1">
+            <a:schemeClr val="accent1"/>
+          </a:lnRef>
+          <a:fillRef idx="3">
+            <a:schemeClr val="accent1"/>
+          </a:fillRef>
+          <a:effectRef idx="2">
+            <a:schemeClr val="accent1"/>
+          </a:effectRef>
+          <a:fontRef idx="minor">
+            <a:schemeClr val="lt1"/>
+          </a:fontRef>
+        </p:style>
+        <p:txBody>
+          <a:bodyPr rtlCol="0" anchor="ctr" lIns="0" rIns="0" tIns="0" bIns="0"/>
+          <a:lstStyle/>
+          <a:p>
+            <a:pPr algn="ctr"/>
+            <a:r>
+              <a:rPr sz="1600" b="1">
+                <a:solidFill>
+                  <a:srgbClr val="FFFFFF"/>
+                </a:solidFill>
+                <a:latin typeface="Microsoft YaHei"/>
+              </a:rPr>
+              <a:t>2</a:t>
+            </a:r>
+          </a:p>
+        </p:txBody>
+      </p:sp>
+      <p:sp>
+        <p:nvSpPr>
+          <p:cNvPr id="11" name="TextBox 10"/>
+          <p:cNvSpPr txBox="1"/>
+          <p:nvPr/>
+        </p:nvSpPr>
+        <p:spPr>
+          <a:xfrm>
+            <a:off x="7330287" y="1920240"/>
+            <a:ext cx="3992727" cy="1280160"/>
+          </a:xfrm>
+          <a:prstGeom prst="rect">
+            <a:avLst/>
+          </a:prstGeom>
+          <a:noFill/>
+        </p:spPr>
+        <p:txBody>
+          <a:bodyPr wrap="square" anchor="t" lIns="0" rIns="0" tIns="0" bIns="0">
+            <a:spAutoFit/>
+          </a:bodyPr>
+          <a:lstStyle/>
+          <a:p>
+            <a:pPr algn="l"/>
+            <a:r>
+              <a:rPr sz="1700" b="1">
+                <a:solidFill>
+                  <a:srgbClr val="222B33"/>
+                </a:solidFill>
+                <a:latin typeface="Microsoft YaHei"/>
+              </a:rPr>
+              <a:t>隔壁两间实验室用同一种化学品，一间只取几滴，一间大量加热回流。关于管理要求，正确的是：</a:t>
+            </a:r>
+          </a:p>
+        </p:txBody>
+      </p:sp>
+      <p:sp>
+        <p:nvSpPr>
+          <p:cNvPr id="12" name="TextBox 11"/>
+          <p:cNvSpPr txBox="1"/>
+          <p:nvPr/>
+        </p:nvSpPr>
+        <p:spPr>
+          <a:xfrm>
+            <a:off x="7330287" y="3291840"/>
+            <a:ext cx="3992727" cy="2560320"/>
+          </a:xfrm>
+          <a:prstGeom prst="rect">
+            <a:avLst/>
+          </a:prstGeom>
+          <a:noFill/>
+        </p:spPr>
+        <p:txBody>
+          <a:bodyPr wrap="square" anchor="t" lIns="0" rIns="0" tIns="0" bIns="0">
+            <a:spAutoFit/>
+          </a:bodyPr>
+          <a:lstStyle/>
+          <a:p>
+            <a:pPr algn="l"/>
+            <a:r>
+              <a:rPr sz="1500" b="0">
+                <a:solidFill>
+                  <a:srgbClr val="222B33"/>
+                </a:solidFill>
+                <a:latin typeface="Microsoft YaHei"/>
+              </a:rPr>
+              <a:t>A. 两间完全一样</a:t>
+            </a:r>
+          </a:p>
+          <a:p>
+            <a:pPr algn="l"/>
+            <a:r>
+              <a:rPr sz="1500" b="0">
+                <a:solidFill>
+                  <a:srgbClr val="222B33"/>
+                </a:solidFill>
+                <a:latin typeface="Microsoft YaHei"/>
+              </a:rPr>
+              <a:t>B. 按实际操作的风险分别确定，加热回流的一间要求更严</a:t>
+            </a:r>
+          </a:p>
+          <a:p>
+            <a:pPr algn="l"/>
+            <a:r>
+              <a:rPr sz="1500" b="0">
+                <a:solidFill>
+                  <a:srgbClr val="222B33"/>
+                </a:solidFill>
+                <a:latin typeface="Microsoft YaHei"/>
+              </a:rPr>
+              <a:t>C. 只看化学品清单</a:t>
+            </a:r>
+          </a:p>
+          <a:p>
+            <a:pPr algn="l"/>
+            <a:r>
+              <a:rPr sz="1500" b="0">
+                <a:solidFill>
+                  <a:srgbClr val="222B33"/>
+                </a:solidFill>
+                <a:latin typeface="Microsoft YaHei"/>
+              </a:rPr>
+              <a:t>D. 取几滴的一间可以不管</a:t>
+            </a:r>
+          </a:p>
+        </p:txBody>
+      </p:sp>
+    </p:spTree>
+  </p:cSld>
+  <p:clrMapOvr>
+    <a:masterClrMapping/>
+  </p:clrMapOvr>
+</p:sld>
+</file>
+
+<file path=ppt/slides/slide46.xml><?xml version="1.0" encoding="utf-8"?>
+<p:sld xmlns:a="http://schemas.openxmlformats.org/drawingml/2006/main" xmlns:p="http://schemas.openxmlformats.org/presentationml/2006/main" xmlns:r="http://schemas.openxmlformats.org/officeDocument/2006/relationships">
+  <p:cSld>
+    <p:bg>
+      <p:bgPr>
+        <a:solidFill>
+          <a:srgbClr val="FFFFFF"/>
+        </a:solidFill>
+        <a:effectLst/>
+      </p:bgPr>
+    </p:bg>
+    <p:spTree>
+      <p:nvGrpSpPr>
+        <p:cNvPr id="1" name=""/>
+        <p:cNvGrpSpPr/>
+        <p:nvPr/>
+      </p:nvGrpSpPr>
+      <p:grpSpPr/>
+      <p:sp>
+        <p:nvSpPr>
+          <p:cNvPr id="2" name="TextBox 1"/>
+          <p:cNvSpPr txBox="1"/>
+          <p:nvPr/>
+        </p:nvSpPr>
+        <p:spPr>
+          <a:xfrm>
+            <a:off x="548640" y="320040"/>
+            <a:ext cx="8229600" cy="320040"/>
+          </a:xfrm>
+          <a:prstGeom prst="rect">
+            <a:avLst/>
+          </a:prstGeom>
+          <a:noFill/>
+        </p:spPr>
+        <p:txBody>
+          <a:bodyPr wrap="square" anchor="t" lIns="0" rIns="0" tIns="0" bIns="0">
+            <a:spAutoFit/>
+          </a:bodyPr>
+          <a:lstStyle/>
+          <a:p>
+            <a:pPr algn="l"/>
+            <a:r>
+              <a:rPr sz="1200" b="1">
+                <a:solidFill>
+                  <a:srgbClr val="1D7A8C"/>
+                </a:solidFill>
+                <a:latin typeface="Microsoft YaHei"/>
+              </a:rPr>
+              <a:t>003 · 高校实验室安全规范与检查</a:t>
+            </a:r>
+          </a:p>
+        </p:txBody>
+      </p:sp>
+      <p:sp>
+        <p:nvSpPr>
+          <p:cNvPr id="3" name="TextBox 2"/>
+          <p:cNvSpPr txBox="1"/>
+          <p:nvPr/>
+        </p:nvSpPr>
+        <p:spPr>
+          <a:xfrm>
+            <a:off x="548640" y="640080"/>
+            <a:ext cx="11094415" cy="731520"/>
+          </a:xfrm>
+          <a:prstGeom prst="rect">
+            <a:avLst/>
+          </a:prstGeom>
+          <a:noFill/>
+        </p:spPr>
+        <p:txBody>
+          <a:bodyPr wrap="square" anchor="t" lIns="0" rIns="0" tIns="0" bIns="0">
+            <a:spAutoFit/>
+          </a:bodyPr>
+          <a:lstStyle/>
+          <a:p>
+            <a:pPr algn="l"/>
+            <a:r>
+              <a:rPr sz="3000" b="1">
+                <a:solidFill>
+                  <a:srgbClr val="0B3C5D"/>
+                </a:solidFill>
+                <a:latin typeface="Microsoft YaHei"/>
+              </a:rPr>
+              <a:t>课后练习</a:t>
+            </a:r>
+          </a:p>
+        </p:txBody>
+      </p:sp>
+      <p:sp>
+        <p:nvSpPr>
+          <p:cNvPr id="4" name="TextBox 3"/>
+          <p:cNvSpPr txBox="1"/>
+          <p:nvPr/>
+        </p:nvSpPr>
+        <p:spPr>
+          <a:xfrm>
+            <a:off x="548640" y="6446520"/>
+            <a:ext cx="7315200" cy="274320"/>
+          </a:xfrm>
+          <a:prstGeom prst="rect">
+            <a:avLst/>
+          </a:prstGeom>
+          <a:noFill/>
+        </p:spPr>
+        <p:txBody>
+          <a:bodyPr wrap="square" anchor="t" lIns="0" rIns="0" tIns="0" bIns="0">
+            <a:spAutoFit/>
+          </a:bodyPr>
+          <a:lstStyle/>
+          <a:p>
+            <a:pPr algn="l"/>
+            <a:r>
+              <a:rPr sz="1000" b="0">
+                <a:solidFill>
+                  <a:srgbClr val="5F6B75"/>
+                </a:solidFill>
+                <a:latin typeface="Microsoft YaHei"/>
+              </a:rPr>
+              <a:t>《高校实验室安全》 003 高校实验室安全规范与检查</a:t>
+            </a:r>
+          </a:p>
+        </p:txBody>
+      </p:sp>
+      <p:sp>
+        <p:nvSpPr>
+          <p:cNvPr id="5" name="Rounded Rectangle 4"/>
+          <p:cNvSpPr/>
+          <p:nvPr/>
+        </p:nvSpPr>
+        <p:spPr>
+          <a:xfrm>
+            <a:off x="548640" y="1645920"/>
+            <a:ext cx="5364327" cy="4389120"/>
+          </a:xfrm>
+          <a:prstGeom prst="roundRect">
+            <a:avLst>
+              <a:gd name="adj" fmla="val 8000"/>
+            </a:avLst>
+          </a:prstGeom>
+          <a:solidFill>
+            <a:srgbClr val="EEF4F7"/>
+          </a:solidFill>
+          <a:ln>
+            <a:noFill/>
+          </a:ln>
+          <a:effectLst/>
+        </p:spPr>
+        <p:style>
+          <a:lnRef idx="1">
+            <a:schemeClr val="accent1"/>
+          </a:lnRef>
+          <a:fillRef idx="3">
+            <a:schemeClr val="accent1"/>
+          </a:fillRef>
+          <a:effectRef idx="2">
+            <a:schemeClr val="accent1"/>
+          </a:effectRef>
+          <a:fontRef idx="minor">
+            <a:schemeClr val="lt1"/>
+          </a:fontRef>
+        </p:style>
+        <p:txBody>
+          <a:bodyPr rtlCol="0" anchor="ctr"/>
+          <a:lstStyle/>
+          <a:p>
+            <a:pPr algn="ctr"/>
+          </a:p>
+        </p:txBody>
+      </p:sp>
+      <p:sp>
+        <p:nvSpPr>
+          <p:cNvPr id="6" name="Oval 5"/>
+          <p:cNvSpPr/>
+          <p:nvPr/>
+        </p:nvSpPr>
+        <p:spPr>
+          <a:xfrm>
+            <a:off x="868680" y="1874519"/>
+            <a:ext cx="548640" cy="548640"/>
+          </a:xfrm>
+          <a:prstGeom prst="ellipse">
+            <a:avLst/>
+          </a:prstGeom>
+          <a:solidFill>
+            <a:srgbClr val="0B3C5D"/>
+          </a:solidFill>
+          <a:ln>
+            <a:noFill/>
+          </a:ln>
+          <a:effectLst/>
+        </p:spPr>
+        <p:style>
+          <a:lnRef idx="1">
+            <a:schemeClr val="accent1"/>
+          </a:lnRef>
+          <a:fillRef idx="3">
+            <a:schemeClr val="accent1"/>
+          </a:fillRef>
+          <a:effectRef idx="2">
+            <a:schemeClr val="accent1"/>
+          </a:effectRef>
+          <a:fontRef idx="minor">
+            <a:schemeClr val="lt1"/>
+          </a:fontRef>
+        </p:style>
+        <p:txBody>
+          <a:bodyPr rtlCol="0" anchor="ctr" lIns="0" rIns="0" tIns="0" bIns="0"/>
+          <a:lstStyle/>
+          <a:p>
+            <a:pPr algn="ctr"/>
+            <a:r>
+              <a:rPr sz="1600" b="1">
+                <a:solidFill>
+                  <a:srgbClr val="FFFFFF"/>
+                </a:solidFill>
+                <a:latin typeface="Microsoft YaHei"/>
+              </a:rPr>
+              <a:t>3</a:t>
+            </a:r>
+          </a:p>
+        </p:txBody>
+      </p:sp>
+      <p:sp>
+        <p:nvSpPr>
+          <p:cNvPr id="7" name="TextBox 6"/>
+          <p:cNvSpPr txBox="1"/>
+          <p:nvPr/>
+        </p:nvSpPr>
+        <p:spPr>
+          <a:xfrm>
+            <a:off x="1600200" y="1920240"/>
+            <a:ext cx="3992727" cy="1280160"/>
+          </a:xfrm>
+          <a:prstGeom prst="rect">
+            <a:avLst/>
+          </a:prstGeom>
+          <a:noFill/>
+        </p:spPr>
+        <p:txBody>
+          <a:bodyPr wrap="square" anchor="t" lIns="0" rIns="0" tIns="0" bIns="0">
+            <a:spAutoFit/>
+          </a:bodyPr>
+          <a:lstStyle/>
+          <a:p>
+            <a:pPr algn="l"/>
+            <a:r>
+              <a:rPr sz="1700" b="1">
+                <a:solidFill>
+                  <a:srgbClr val="222B33"/>
+                </a:solidFill>
+                <a:latin typeface="Microsoft YaHei"/>
+              </a:rPr>
+              <a:t>实验室门口安全信息牌一般不需要包括的是：</a:t>
+            </a:r>
+          </a:p>
+        </p:txBody>
+      </p:sp>
+      <p:sp>
+        <p:nvSpPr>
+          <p:cNvPr id="8" name="TextBox 7"/>
+          <p:cNvSpPr txBox="1"/>
+          <p:nvPr/>
+        </p:nvSpPr>
+        <p:spPr>
+          <a:xfrm>
+            <a:off x="1600200" y="3291840"/>
+            <a:ext cx="3992727" cy="2560320"/>
+          </a:xfrm>
+          <a:prstGeom prst="rect">
+            <a:avLst/>
+          </a:prstGeom>
+          <a:noFill/>
+        </p:spPr>
+        <p:txBody>
+          <a:bodyPr wrap="square" anchor="t" lIns="0" rIns="0" tIns="0" bIns="0">
+            <a:spAutoFit/>
+          </a:bodyPr>
+          <a:lstStyle/>
+          <a:p>
+            <a:pPr algn="l"/>
+            <a:r>
+              <a:rPr sz="1500" b="0">
+                <a:solidFill>
+                  <a:srgbClr val="222B33"/>
+                </a:solidFill>
+                <a:latin typeface="Microsoft YaHei"/>
+              </a:rPr>
+              <a:t>A. 主要危险类别和警示标志</a:t>
+            </a:r>
+          </a:p>
+          <a:p>
+            <a:pPr algn="l"/>
+            <a:r>
+              <a:rPr sz="1500" b="0">
+                <a:solidFill>
+                  <a:srgbClr val="222B33"/>
+                </a:solidFill>
+                <a:latin typeface="Microsoft YaHei"/>
+              </a:rPr>
+              <a:t>B. 安全责任人</a:t>
+            </a:r>
+          </a:p>
+          <a:p>
+            <a:pPr algn="l"/>
+            <a:r>
+              <a:rPr sz="1500" b="0">
+                <a:solidFill>
+                  <a:srgbClr val="222B33"/>
+                </a:solidFill>
+                <a:latin typeface="Microsoft YaHei"/>
+              </a:rPr>
+              <a:t>C. 应急联系电话</a:t>
+            </a:r>
+          </a:p>
+          <a:p>
+            <a:pPr algn="l"/>
+            <a:r>
+              <a:rPr sz="1500" b="0">
+                <a:solidFill>
+                  <a:srgbClr val="222B33"/>
+                </a:solidFill>
+                <a:latin typeface="Microsoft YaHei"/>
+              </a:rPr>
+              <a:t>D. 实验室成员的考试成绩</a:t>
+            </a:r>
+          </a:p>
+        </p:txBody>
+      </p:sp>
+      <p:sp>
+        <p:nvSpPr>
+          <p:cNvPr id="9" name="Rounded Rectangle 8"/>
+          <p:cNvSpPr/>
+          <p:nvPr/>
+        </p:nvSpPr>
+        <p:spPr>
+          <a:xfrm>
+            <a:off x="6278727" y="1645920"/>
+            <a:ext cx="5364327" cy="4389120"/>
+          </a:xfrm>
+          <a:prstGeom prst="roundRect">
+            <a:avLst>
+              <a:gd name="adj" fmla="val 8000"/>
+            </a:avLst>
+          </a:prstGeom>
+          <a:solidFill>
+            <a:srgbClr val="EEF4F7"/>
+          </a:solidFill>
+          <a:ln>
+            <a:noFill/>
+          </a:ln>
+          <a:effectLst/>
+        </p:spPr>
+        <p:style>
+          <a:lnRef idx="1">
+            <a:schemeClr val="accent1"/>
+          </a:lnRef>
+          <a:fillRef idx="3">
+            <a:schemeClr val="accent1"/>
+          </a:fillRef>
+          <a:effectRef idx="2">
+            <a:schemeClr val="accent1"/>
+          </a:effectRef>
+          <a:fontRef idx="minor">
+            <a:schemeClr val="lt1"/>
+          </a:fontRef>
+        </p:style>
+        <p:txBody>
+          <a:bodyPr rtlCol="0" anchor="ctr"/>
+          <a:lstStyle/>
+          <a:p>
+            <a:pPr algn="ctr"/>
+          </a:p>
+        </p:txBody>
+      </p:sp>
+      <p:sp>
+        <p:nvSpPr>
+          <p:cNvPr id="10" name="Oval 9"/>
+          <p:cNvSpPr/>
+          <p:nvPr/>
+        </p:nvSpPr>
+        <p:spPr>
+          <a:xfrm>
+            <a:off x="6598767" y="1874519"/>
+            <a:ext cx="548640" cy="548640"/>
+          </a:xfrm>
+          <a:prstGeom prst="ellipse">
+            <a:avLst/>
+          </a:prstGeom>
+          <a:solidFill>
+            <a:srgbClr val="0B3C5D"/>
+          </a:solidFill>
+          <a:ln>
+            <a:noFill/>
+          </a:ln>
+          <a:effectLst/>
+        </p:spPr>
+        <p:style>
+          <a:lnRef idx="1">
+            <a:schemeClr val="accent1"/>
+          </a:lnRef>
+          <a:fillRef idx="3">
+            <a:schemeClr val="accent1"/>
+          </a:fillRef>
+          <a:effectRef idx="2">
+            <a:schemeClr val="accent1"/>
+          </a:effectRef>
+          <a:fontRef idx="minor">
+            <a:schemeClr val="lt1"/>
+          </a:fontRef>
+        </p:style>
+        <p:txBody>
+          <a:bodyPr rtlCol="0" anchor="ctr" lIns="0" rIns="0" tIns="0" bIns="0"/>
+          <a:lstStyle/>
+          <a:p>
+            <a:pPr algn="ctr"/>
+            <a:r>
+              <a:rPr sz="1600" b="1">
+                <a:solidFill>
+                  <a:srgbClr val="FFFFFF"/>
+                </a:solidFill>
+                <a:latin typeface="Microsoft YaHei"/>
+              </a:rPr>
+              <a:t>4</a:t>
+            </a:r>
+          </a:p>
+        </p:txBody>
+      </p:sp>
+      <p:sp>
+        <p:nvSpPr>
+          <p:cNvPr id="11" name="TextBox 10"/>
+          <p:cNvSpPr txBox="1"/>
+          <p:nvPr/>
+        </p:nvSpPr>
+        <p:spPr>
+          <a:xfrm>
+            <a:off x="7330287" y="1920240"/>
+            <a:ext cx="3992727" cy="1280160"/>
+          </a:xfrm>
+          <a:prstGeom prst="rect">
+            <a:avLst/>
+          </a:prstGeom>
+          <a:noFill/>
+        </p:spPr>
+        <p:txBody>
+          <a:bodyPr wrap="square" anchor="t" lIns="0" rIns="0" tIns="0" bIns="0">
+            <a:spAutoFit/>
+          </a:bodyPr>
+          <a:lstStyle/>
+          <a:p>
+            <a:pPr algn="l"/>
+            <a:r>
+              <a:rPr sz="1700" b="1">
+                <a:solidFill>
+                  <a:srgbClr val="222B33"/>
+                </a:solidFill>
+                <a:latin typeface="Microsoft YaHei"/>
+              </a:rPr>
+              <a:t>判断：为了顺利通过检查，可以在检查前把杂物临时塞进柜子。</a:t>
+            </a:r>
+          </a:p>
+        </p:txBody>
+      </p:sp>
+      <p:sp>
+        <p:nvSpPr>
+          <p:cNvPr id="12" name="TextBox 11"/>
+          <p:cNvSpPr txBox="1"/>
+          <p:nvPr/>
+        </p:nvSpPr>
+        <p:spPr>
+          <a:xfrm>
+            <a:off x="7330287" y="3291840"/>
+            <a:ext cx="3992727" cy="2560320"/>
+          </a:xfrm>
+          <a:prstGeom prst="rect">
+            <a:avLst/>
+          </a:prstGeom>
+          <a:noFill/>
+        </p:spPr>
+        <p:txBody>
+          <a:bodyPr wrap="square" anchor="t" lIns="0" rIns="0" tIns="0" bIns="0">
+            <a:spAutoFit/>
+          </a:bodyPr>
+          <a:lstStyle/>
+          <a:p>
+            <a:pPr algn="l"/>
+            <a:r>
+              <a:rPr sz="1500" b="0">
+                <a:solidFill>
+                  <a:srgbClr val="222B33"/>
+                </a:solidFill>
+                <a:latin typeface="Microsoft YaHei"/>
+              </a:rPr>
+              <a:t>A. 正确</a:t>
+            </a:r>
+          </a:p>
+          <a:p>
+            <a:pPr algn="l"/>
+            <a:r>
+              <a:rPr sz="1500" b="0">
+                <a:solidFill>
+                  <a:srgbClr val="222B33"/>
+                </a:solidFill>
+                <a:latin typeface="Microsoft YaHei"/>
+              </a:rPr>
+              <a:t>B. 错误</a:t>
+            </a:r>
+          </a:p>
+        </p:txBody>
+      </p:sp>
+    </p:spTree>
+  </p:cSld>
+  <p:clrMapOvr>
+    <a:masterClrMapping/>
+  </p:clrMapOvr>
+</p:sld>
+</file>
+
+<file path=ppt/slides/slide47.xml><?xml version="1.0" encoding="utf-8"?>
+<p:sld xmlns:a="http://schemas.openxmlformats.org/drawingml/2006/main" xmlns:p="http://schemas.openxmlformats.org/presentationml/2006/main" xmlns:r="http://schemas.openxmlformats.org/officeDocument/2006/relationships">
+  <p:cSld>
+    <p:bg>
+      <p:bgPr>
+        <a:solidFill>
+          <a:srgbClr val="FFFFFF"/>
+        </a:solidFill>
+        <a:effectLst/>
+      </p:bgPr>
+    </p:bg>
+    <p:spTree>
+      <p:nvGrpSpPr>
+        <p:cNvPr id="1" name=""/>
+        <p:cNvGrpSpPr/>
+        <p:nvPr/>
+      </p:nvGrpSpPr>
+      <p:grpSpPr/>
+      <p:sp>
+        <p:nvSpPr>
+          <p:cNvPr id="2" name="TextBox 1"/>
+          <p:cNvSpPr txBox="1"/>
+          <p:nvPr/>
+        </p:nvSpPr>
+        <p:spPr>
+          <a:xfrm>
+            <a:off x="548640" y="320040"/>
+            <a:ext cx="8229600" cy="320040"/>
+          </a:xfrm>
+          <a:prstGeom prst="rect">
+            <a:avLst/>
+          </a:prstGeom>
+          <a:noFill/>
+        </p:spPr>
+        <p:txBody>
+          <a:bodyPr wrap="square" anchor="t" lIns="0" rIns="0" tIns="0" bIns="0">
+            <a:spAutoFit/>
+          </a:bodyPr>
+          <a:lstStyle/>
+          <a:p>
+            <a:pPr algn="l"/>
+            <a:r>
+              <a:rPr sz="1200" b="1">
+                <a:solidFill>
+                  <a:srgbClr val="1D7A8C"/>
+                </a:solidFill>
+                <a:latin typeface="Microsoft YaHei"/>
+              </a:rPr>
+              <a:t>003 · 高校实验室安全规范与检查</a:t>
+            </a:r>
+          </a:p>
+        </p:txBody>
+      </p:sp>
+      <p:sp>
+        <p:nvSpPr>
+          <p:cNvPr id="3" name="TextBox 2"/>
+          <p:cNvSpPr txBox="1"/>
+          <p:nvPr/>
+        </p:nvSpPr>
+        <p:spPr>
+          <a:xfrm>
+            <a:off x="548640" y="640080"/>
+            <a:ext cx="11094415" cy="731520"/>
+          </a:xfrm>
+          <a:prstGeom prst="rect">
+            <a:avLst/>
+          </a:prstGeom>
+          <a:noFill/>
+        </p:spPr>
+        <p:txBody>
+          <a:bodyPr wrap="square" anchor="t" lIns="0" rIns="0" tIns="0" bIns="0">
+            <a:spAutoFit/>
+          </a:bodyPr>
+          <a:lstStyle/>
+          <a:p>
+            <a:pPr algn="l"/>
+            <a:r>
+              <a:rPr sz="3000" b="1">
+                <a:solidFill>
+                  <a:srgbClr val="0B3C5D"/>
+                </a:solidFill>
+                <a:latin typeface="Microsoft YaHei"/>
+              </a:rPr>
+              <a:t>课后练习</a:t>
+            </a:r>
+          </a:p>
+        </p:txBody>
+      </p:sp>
+      <p:sp>
+        <p:nvSpPr>
+          <p:cNvPr id="4" name="TextBox 3"/>
+          <p:cNvSpPr txBox="1"/>
+          <p:nvPr/>
+        </p:nvSpPr>
+        <p:spPr>
+          <a:xfrm>
+            <a:off x="548640" y="6446520"/>
+            <a:ext cx="7315200" cy="274320"/>
+          </a:xfrm>
+          <a:prstGeom prst="rect">
+            <a:avLst/>
+          </a:prstGeom>
+          <a:noFill/>
+        </p:spPr>
+        <p:txBody>
+          <a:bodyPr wrap="square" anchor="t" lIns="0" rIns="0" tIns="0" bIns="0">
+            <a:spAutoFit/>
+          </a:bodyPr>
+          <a:lstStyle/>
+          <a:p>
+            <a:pPr algn="l"/>
+            <a:r>
+              <a:rPr sz="1000" b="0">
+                <a:solidFill>
+                  <a:srgbClr val="5F6B75"/>
+                </a:solidFill>
+                <a:latin typeface="Microsoft YaHei"/>
+              </a:rPr>
+              <a:t>《高校实验室安全》 003 高校实验室安全规范与检查</a:t>
+            </a:r>
+          </a:p>
+        </p:txBody>
+      </p:sp>
+      <p:sp>
+        <p:nvSpPr>
+          <p:cNvPr id="5" name="Rounded Rectangle 4"/>
+          <p:cNvSpPr/>
+          <p:nvPr/>
+        </p:nvSpPr>
+        <p:spPr>
+          <a:xfrm>
+            <a:off x="548640" y="1645920"/>
+            <a:ext cx="5364327" cy="4389120"/>
+          </a:xfrm>
+          <a:prstGeom prst="roundRect">
+            <a:avLst>
+              <a:gd name="adj" fmla="val 8000"/>
+            </a:avLst>
+          </a:prstGeom>
+          <a:solidFill>
+            <a:srgbClr val="EEF4F7"/>
+          </a:solidFill>
+          <a:ln>
+            <a:noFill/>
+          </a:ln>
+          <a:effectLst/>
+        </p:spPr>
+        <p:style>
+          <a:lnRef idx="1">
+            <a:schemeClr val="accent1"/>
+          </a:lnRef>
+          <a:fillRef idx="3">
+            <a:schemeClr val="accent1"/>
+          </a:fillRef>
+          <a:effectRef idx="2">
+            <a:schemeClr val="accent1"/>
+          </a:effectRef>
+          <a:fontRef idx="minor">
+            <a:schemeClr val="lt1"/>
+          </a:fontRef>
+        </p:style>
+        <p:txBody>
+          <a:bodyPr rtlCol="0" anchor="ctr"/>
+          <a:lstStyle/>
+          <a:p>
+            <a:pPr algn="ctr"/>
+          </a:p>
+        </p:txBody>
+      </p:sp>
+      <p:sp>
+        <p:nvSpPr>
+          <p:cNvPr id="6" name="Oval 5"/>
+          <p:cNvSpPr/>
+          <p:nvPr/>
+        </p:nvSpPr>
+        <p:spPr>
+          <a:xfrm>
+            <a:off x="868680" y="1874519"/>
+            <a:ext cx="548640" cy="548640"/>
+          </a:xfrm>
+          <a:prstGeom prst="ellipse">
+            <a:avLst/>
+          </a:prstGeom>
+          <a:solidFill>
+            <a:srgbClr val="0B3C5D"/>
+          </a:solidFill>
+          <a:ln>
+            <a:noFill/>
+          </a:ln>
+          <a:effectLst/>
+        </p:spPr>
+        <p:style>
+          <a:lnRef idx="1">
+            <a:schemeClr val="accent1"/>
+          </a:lnRef>
+          <a:fillRef idx="3">
+            <a:schemeClr val="accent1"/>
+          </a:fillRef>
+          <a:effectRef idx="2">
+            <a:schemeClr val="accent1"/>
+          </a:effectRef>
+          <a:fontRef idx="minor">
+            <a:schemeClr val="lt1"/>
+          </a:fontRef>
+        </p:style>
+        <p:txBody>
+          <a:bodyPr rtlCol="0" anchor="ctr" lIns="0" rIns="0" tIns="0" bIns="0"/>
+          <a:lstStyle/>
+          <a:p>
+            <a:pPr algn="ctr"/>
+            <a:r>
+              <a:rPr sz="1600" b="1">
+                <a:solidFill>
+                  <a:srgbClr val="FFFFFF"/>
+                </a:solidFill>
+                <a:latin typeface="Microsoft YaHei"/>
+              </a:rPr>
+              <a:t>5</a:t>
+            </a:r>
+          </a:p>
+        </p:txBody>
+      </p:sp>
+      <p:sp>
+        <p:nvSpPr>
+          <p:cNvPr id="7" name="TextBox 6"/>
+          <p:cNvSpPr txBox="1"/>
+          <p:nvPr/>
+        </p:nvSpPr>
+        <p:spPr>
+          <a:xfrm>
+            <a:off x="1600200" y="1920240"/>
+            <a:ext cx="3992727" cy="1280160"/>
+          </a:xfrm>
+          <a:prstGeom prst="rect">
+            <a:avLst/>
+          </a:prstGeom>
+          <a:noFill/>
+        </p:spPr>
+        <p:txBody>
+          <a:bodyPr wrap="square" anchor="t" lIns="0" rIns="0" tIns="0" bIns="0">
+            <a:spAutoFit/>
+          </a:bodyPr>
+          <a:lstStyle/>
+          <a:p>
+            <a:pPr algn="l"/>
+            <a:r>
+              <a:rPr sz="1700" b="1">
+                <a:solidFill>
+                  <a:srgbClr val="222B33"/>
+                </a:solidFill>
+                <a:latin typeface="Microsoft YaHei"/>
+              </a:rPr>
+              <a:t>简答：签了安全承诺书后，每天离开实验室前要做哪些检查？</a:t>
+            </a:r>
+          </a:p>
+        </p:txBody>
+      </p:sp>
+      <p:sp>
+        <p:nvSpPr>
+          <p:cNvPr id="8" name="TextBox 7"/>
+          <p:cNvSpPr txBox="1"/>
+          <p:nvPr/>
+        </p:nvSpPr>
+        <p:spPr>
+          <a:xfrm>
+            <a:off x="1600200" y="3291840"/>
+            <a:ext cx="3992727" cy="2560320"/>
+          </a:xfrm>
+          <a:prstGeom prst="rect">
+            <a:avLst/>
+          </a:prstGeom>
+          <a:noFill/>
+        </p:spPr>
+        <p:txBody>
+          <a:bodyPr wrap="square" anchor="t" lIns="0" rIns="0" tIns="0" bIns="0">
+            <a:spAutoFit/>
+          </a:bodyPr>
+          <a:lstStyle/>
+          <a:p/>
+        </p:txBody>
+      </p:sp>
+    </p:spTree>
+  </p:cSld>
+  <p:clrMapOvr>
+    <a:masterClrMapping/>
+  </p:clrMapOvr>
+</p:sld>
+</file>
+
+<file path=ppt/slides/slide48.xml><?xml version="1.0" encoding="utf-8"?>
+<p:sld xmlns:a="http://schemas.openxmlformats.org/drawingml/2006/main" xmlns:p="http://schemas.openxmlformats.org/presentationml/2006/main" xmlns:r="http://schemas.openxmlformats.org/officeDocument/2006/relationships">
+  <p:cSld>
+    <p:bg>
+      <p:bgPr>
+        <a:solidFill>
+          <a:srgbClr val="0B3C5D"/>
+        </a:solidFill>
+        <a:effectLst/>
+      </p:bgPr>
+    </p:bg>
+    <p:spTree>
+      <p:nvGrpSpPr>
+        <p:cNvPr id="1" name=""/>
+        <p:cNvGrpSpPr/>
+        <p:nvPr/>
+      </p:nvGrpSpPr>
+      <p:grpSpPr/>
+      <p:sp>
+        <p:nvSpPr>
+          <p:cNvPr id="2" name="TextBox 1"/>
+          <p:cNvSpPr txBox="1"/>
+          <p:nvPr/>
+        </p:nvSpPr>
+        <p:spPr>
+          <a:xfrm>
+            <a:off x="548640" y="548640"/>
+            <a:ext cx="11094415" cy="731520"/>
+          </a:xfrm>
+          <a:prstGeom prst="rect">
+            <a:avLst/>
+          </a:prstGeom>
+          <a:noFill/>
+        </p:spPr>
+        <p:txBody>
+          <a:bodyPr wrap="square" anchor="t" lIns="0" rIns="0" tIns="0" bIns="0">
+            <a:spAutoFit/>
+          </a:bodyPr>
+          <a:lstStyle/>
+          <a:p>
+            <a:pPr algn="l"/>
+            <a:r>
+              <a:rPr sz="3400" b="1">
+                <a:solidFill>
+                  <a:srgbClr val="FFFFFF"/>
+                </a:solidFill>
+                <a:latin typeface="Microsoft YaHei"/>
+              </a:rPr>
+              <a:t>本课小结</a:t>
+            </a:r>
+          </a:p>
+        </p:txBody>
+      </p:sp>
+      <p:sp>
+        <p:nvSpPr>
+          <p:cNvPr id="3" name="TextBox 2"/>
+          <p:cNvSpPr txBox="1"/>
+          <p:nvPr/>
+        </p:nvSpPr>
+        <p:spPr>
+          <a:xfrm>
+            <a:off x="548640" y="1645920"/>
+            <a:ext cx="5364327" cy="4572000"/>
+          </a:xfrm>
+          <a:prstGeom prst="rect">
+            <a:avLst/>
+          </a:prstGeom>
+          <a:noFill/>
+        </p:spPr>
+        <p:txBody>
+          <a:bodyPr wrap="square" lIns="0" rIns="0" tIns="0" bIns="0">
+            <a:spAutoFit/>
+          </a:bodyPr>
+          <a:lstStyle/>
+          <a:p>
+            <a:pPr>
+              <a:spcAft>
+                <a:spcPts val="800"/>
+              </a:spcAft>
+            </a:pPr>
+            <a:r>
+              <a:rPr sz="1800">
+                <a:solidFill>
+                  <a:srgbClr val="FFFFFF"/>
+                </a:solidFill>
+                <a:latin typeface="Microsoft YaHei"/>
+              </a:rPr>
+              <a:t>▪ S1  《高等学校实验室安全规范》是什么</a:t>
+            </a:r>
+          </a:p>
+          <a:p>
+            <a:pPr>
+              <a:spcAft>
+                <a:spcPts val="800"/>
+              </a:spcAft>
+            </a:pPr>
+            <a:r>
+              <a:rPr sz="1800">
+                <a:solidFill>
+                  <a:srgbClr val="FFFFFF"/>
+                </a:solidFill>
+                <a:latin typeface="Microsoft YaHei"/>
+              </a:rPr>
+              <a:t>▪ S2  规范的主要要求</a:t>
+            </a:r>
+          </a:p>
+          <a:p>
+            <a:pPr>
+              <a:spcAft>
+                <a:spcPts val="800"/>
+              </a:spcAft>
+            </a:pPr>
+            <a:r>
+              <a:rPr sz="1800">
+                <a:solidFill>
+                  <a:srgbClr val="FFFFFF"/>
+                </a:solidFill>
+                <a:latin typeface="Microsoft YaHei"/>
+              </a:rPr>
+              <a:t>▪ K1  按危险源分类分级管理</a:t>
+            </a:r>
+          </a:p>
+          <a:p>
+            <a:pPr>
+              <a:spcAft>
+                <a:spcPts val="800"/>
+              </a:spcAft>
+            </a:pPr>
+            <a:r>
+              <a:rPr sz="1800">
+                <a:solidFill>
+                  <a:srgbClr val="FFFFFF"/>
+                </a:solidFill>
+                <a:latin typeface="Microsoft YaHei"/>
+              </a:rPr>
+              <a:t>▪ K2  同样的化学品，不同的管法</a:t>
+            </a:r>
+          </a:p>
+        </p:txBody>
+      </p:sp>
+      <p:sp>
+        <p:nvSpPr>
+          <p:cNvPr id="4" name="TextBox 3"/>
+          <p:cNvSpPr txBox="1"/>
+          <p:nvPr/>
+        </p:nvSpPr>
+        <p:spPr>
+          <a:xfrm>
+            <a:off x="6278727" y="1645920"/>
+            <a:ext cx="5364327" cy="4572000"/>
+          </a:xfrm>
+          <a:prstGeom prst="rect">
+            <a:avLst/>
+          </a:prstGeom>
+          <a:noFill/>
+        </p:spPr>
+        <p:txBody>
+          <a:bodyPr wrap="square" lIns="0" rIns="0" tIns="0" bIns="0">
+            <a:spAutoFit/>
+          </a:bodyPr>
+          <a:lstStyle/>
+          <a:p>
+            <a:pPr>
+              <a:spcAft>
+                <a:spcPts val="800"/>
+              </a:spcAft>
+            </a:pPr>
+            <a:r>
+              <a:rPr sz="1800">
+                <a:solidFill>
+                  <a:srgbClr val="FFFFFF"/>
+                </a:solidFill>
+                <a:latin typeface="Microsoft YaHei"/>
+              </a:rPr>
+              <a:t>▪ K3  门口信息牌写明主要危险</a:t>
+            </a:r>
+          </a:p>
+          <a:p>
+            <a:pPr>
+              <a:spcAft>
+                <a:spcPts val="800"/>
+              </a:spcAft>
+            </a:pPr>
+            <a:r>
+              <a:rPr sz="1800">
+                <a:solidFill>
+                  <a:srgbClr val="FFFFFF"/>
+                </a:solidFill>
+                <a:latin typeface="Microsoft YaHei"/>
+              </a:rPr>
+              <a:t>▪ K4  安全承诺要落到行动</a:t>
+            </a:r>
+          </a:p>
+          <a:p>
+            <a:pPr>
+              <a:spcAft>
+                <a:spcPts val="800"/>
+              </a:spcAft>
+            </a:pPr>
+            <a:r>
+              <a:rPr sz="1800">
+                <a:solidFill>
+                  <a:srgbClr val="FFFFFF"/>
+                </a:solidFill>
+                <a:latin typeface="Microsoft YaHei"/>
+              </a:rPr>
+              <a:t>▪ S3  检查项目表的结构与重点</a:t>
+            </a:r>
+          </a:p>
+          <a:p>
+            <a:pPr>
+              <a:spcAft>
+                <a:spcPts val="800"/>
+              </a:spcAft>
+            </a:pPr>
+            <a:r>
+              <a:rPr sz="1800">
+                <a:solidFill>
+                  <a:srgbClr val="FFFFFF"/>
+                </a:solidFill>
+                <a:latin typeface="Microsoft YaHei"/>
+              </a:rPr>
+              <a:t>▪ K5  校院室定期检查与上级检查</a:t>
             </a:r>
           </a:p>
         </p:txBody>
